--- a/docs/final/AI-Dispensing-Defect-Detective.pptx
+++ b/docs/final/AI-Dispensing-Defect-Detective.pptx
@@ -19,9 +19,11 @@
     <p:sldId id="267" r:id="rId13"/>
     <p:sldId id="268" r:id="rId14"/>
     <p:sldId id="269" r:id="rId15"/>
+    <p:sldId id="270" r:id="rId16"/>
+    <p:sldId id="271" r:id="rId17"/>
   </p:sldIdLst>
   <p:notesMasterIdLst>
-    <p:notesMasterId r:id="rId16"/>
+    <p:notesMasterId r:id="rId18"/>
   </p:notesMasterIdLst>
   <p:sldSz cx="12192000" cy="6858000"/>
   <p:notesSz cx="6858000" cy="12192000"/>
@@ -1908,7 +1910,7 @@
           <a:p>
             <a:r>
               <a:rPr lang="en-US" dirty="0"/>
-              <a:t>Backup for 'how do you know a fix worked?'. The one-change rule is the point: two changes at once can't say which one worked.</a:t>
+              <a:t>Backup for 'how do you know a fix worked?'. When a case closes it gets a verdict. CONFIRMED needs all five: a check confirmed one cause, exactly one change was made and aimed at it, the photo was re-measured against a before photo, it came back in spec, and it held for twenty shots. Anything less is PLAUSIBLE or UNVERIFIED, and the record names what's missing, like 'three things changed at once, no way to say which one worked'. Only CONFIRMED cases become precedent, so a guess never gets taught to the system. T1 is how sure the ranking is; CONFIRMED is proof the fix worked.</a:t>
             </a:r>
             <a:endParaRPr lang="en-US" dirty="0"/>
           </a:p>
@@ -1996,7 +1998,7 @@
           <a:p>
             <a:r>
               <a:rPr lang="en-US" dirty="0"/>
-              <a:t>Backup for 'how do you decide confidence?' and 'what if the AI and the rules disagree?'.</a:t>
+              <a:t>Backup for 'how is confidence decided?' and 'what if the AI disagrees?'. The tier tells the operator how far to trust the ranking. First: if a check on the machine confirmed the top cause, it's T1, because a test outweighs a reading of the evidence. Otherwise T1 needs three things: Brain 2 has no objection, the measured pattern beats chance, and at least three matching confirmed cases back it, with none disagreeing. If anything is missing it's T2, provisional, and the screen says what's missing. If Brain 2 objects, it's T3 when the measurement still backs Brain 1, or T4 when nothing separates the two, and then it shows the check that settles it instead of picking one. Agreement never raises a tier: two readers can make the same mistake. No LLM key means Brain 2 doesn't run, which counts as no objection, not agreement. Gate B can also lower the leader's score, by up to 0.4 log-odds, when more than half of the matching confirmed cases disagree; it never raises one.</a:t>
             </a:r>
             <a:endParaRPr lang="en-US" dirty="0"/>
           </a:p>
@@ -2284,6 +2286,182 @@
             <a:fld id="{F7021451-1387-4CA6-816F-3879F97B5CBC}" type="slidenum">
               <a:rPr lang="en-US"/>
               <a:t>14</a:t>
+            </a:fld>
+            <a:endParaRPr lang="en-US"/>
+          </a:p>
+        </p:txBody>
+      </p:sp>
+    </p:spTree>
+    <p:extLst>
+      <p:ext uri="{BB962C8B-B14F-4D97-AF65-F5344CB8AC3E}">
+        <p14:creationId xmlns:p14="http://schemas.microsoft.com/office/powerpoint/2010/main" val="1024086991"/>
+      </p:ext>
+    </p:extLst>
+  </p:cSld>
+  <p:clrMapOvr>
+    <a:masterClrMapping/>
+  </p:clrMapOvr>
+</p:notes>
+</file>
+
+<file path=ppt/notesSlides/notesSlide15.xml><?xml version="1.0" encoding="utf-8"?>
+<p:notes xmlns:a="http://schemas.openxmlformats.org/drawingml/2006/main" xmlns:r="http://schemas.openxmlformats.org/officeDocument/2006/relationships" xmlns:p="http://schemas.openxmlformats.org/presentationml/2006/main">
+  <p:cSld>
+    <p:spTree>
+      <p:nvGrpSpPr>
+        <p:cNvPr id="1" name=""/>
+        <p:cNvGrpSpPr/>
+        <p:nvPr/>
+      </p:nvGrpSpPr>
+      <p:grpSpPr>
+        <a:xfrm>
+          <a:off x="0" y="0"/>
+          <a:ext cx="0" cy="0"/>
+          <a:chOff x="0" y="0"/>
+          <a:chExt cx="0" cy="0"/>
+        </a:xfrm>
+      </p:grpSpPr>
+      <p:sp>
+        <p:nvSpPr>
+          <p:cNvPr id="2" name="Slide Image Placeholder 1"/>
+          <p:cNvSpPr>
+            <a:spLocks noGrp="1" noRot="1" noChangeAspect="1"/>
+          </p:cNvSpPr>
+          <p:nvPr>
+            <p:ph type="sldImg"/>
+          </p:nvPr>
+        </p:nvSpPr>
+        <p:spPr/>
+      </p:sp>
+      <p:sp>
+        <p:nvSpPr>
+          <p:cNvPr id="3" name="Notes Placeholder 2"/>
+          <p:cNvSpPr>
+            <a:spLocks noGrp="1"/>
+          </p:cNvSpPr>
+          <p:nvPr>
+            <p:ph type="body" idx="1"/>
+          </p:nvPr>
+        </p:nvSpPr>
+        <p:spPr/>
+        <p:txBody>
+          <a:bodyPr/>
+          <a:lstStyle/>
+          <a:p>
+            <a:r>
+              <a:rPr lang="en-US" dirty="0"/>
+              <a:t>Backup for 'is that score how sure it is?' and 'what's the difference between the score, the tier and the verdict?'. Three different questions. The quality score rates the dots in the photo. The tier says how far to trust the ranking. The verdict says whether the fix was proved when the case closed. None is computed from another, and T1 is not CONFIRMED.</a:t>
+            </a:r>
+            <a:endParaRPr lang="en-US" dirty="0"/>
+          </a:p>
+        </p:txBody>
+      </p:sp>
+      <p:sp>
+        <p:nvSpPr>
+          <p:cNvPr id="4" name="Slide Number Placeholder 3"/>
+          <p:cNvSpPr>
+            <a:spLocks noGrp="1"/>
+          </p:cNvSpPr>
+          <p:nvPr>
+            <p:ph type="sldNum" sz="quarter" idx="10"/>
+          </p:nvPr>
+        </p:nvSpPr>
+        <p:spPr/>
+        <p:txBody>
+          <a:bodyPr/>
+          <a:lstStyle/>
+          <a:p>
+            <a:fld id="{F7021451-1387-4CA6-816F-3879F97B5CBC}" type="slidenum">
+              <a:rPr lang="en-US"/>
+              <a:t>15</a:t>
+            </a:fld>
+            <a:endParaRPr lang="en-US"/>
+          </a:p>
+        </p:txBody>
+      </p:sp>
+    </p:spTree>
+    <p:extLst>
+      <p:ext uri="{BB962C8B-B14F-4D97-AF65-F5344CB8AC3E}">
+        <p14:creationId xmlns:p14="http://schemas.microsoft.com/office/powerpoint/2010/main" val="1024086991"/>
+      </p:ext>
+    </p:extLst>
+  </p:cSld>
+  <p:clrMapOvr>
+    <a:masterClrMapping/>
+  </p:clrMapOvr>
+</p:notes>
+</file>
+
+<file path=ppt/notesSlides/notesSlide16.xml><?xml version="1.0" encoding="utf-8"?>
+<p:notes xmlns:a="http://schemas.openxmlformats.org/drawingml/2006/main" xmlns:r="http://schemas.openxmlformats.org/officeDocument/2006/relationships" xmlns:p="http://schemas.openxmlformats.org/presentationml/2006/main">
+  <p:cSld>
+    <p:spTree>
+      <p:nvGrpSpPr>
+        <p:cNvPr id="1" name=""/>
+        <p:cNvGrpSpPr/>
+        <p:nvPr/>
+      </p:nvGrpSpPr>
+      <p:grpSpPr>
+        <a:xfrm>
+          <a:off x="0" y="0"/>
+          <a:ext cx="0" cy="0"/>
+          <a:chOff x="0" y="0"/>
+          <a:chExt cx="0" cy="0"/>
+        </a:xfrm>
+      </p:grpSpPr>
+      <p:sp>
+        <p:nvSpPr>
+          <p:cNvPr id="2" name="Slide Image Placeholder 1"/>
+          <p:cNvSpPr>
+            <a:spLocks noGrp="1" noRot="1" noChangeAspect="1"/>
+          </p:cNvSpPr>
+          <p:nvPr>
+            <p:ph type="sldImg"/>
+          </p:nvPr>
+        </p:nvSpPr>
+        <p:spPr/>
+      </p:sp>
+      <p:sp>
+        <p:nvSpPr>
+          <p:cNvPr id="3" name="Notes Placeholder 2"/>
+          <p:cNvSpPr>
+            <a:spLocks noGrp="1"/>
+          </p:cNvSpPr>
+          <p:nvPr>
+            <p:ph type="body" idx="1"/>
+          </p:nvPr>
+        </p:nvSpPr>
+        <p:spPr/>
+        <p:txBody>
+          <a:bodyPr/>
+          <a:lstStyle/>
+          <a:p>
+            <a:r>
+              <a:rPr lang="en-US" dirty="0"/>
+              <a:t>Backup for Bonus 2 and 'why don't I see the quality score?'. It rates the dots in the photo on four things: present, right size, round, in the right place. Each gets stars, and a single failure always costs a star. The overall score is the share of dots that pass all four: here 3 of 15, so 20 out of 100. Every number is a count you can check on the annotated photo: count the green rings. It rates the dispensing, not the diagnosis; how far to trust the diagnosis is the tier's job. It only shows when the photo passes the quality check and the job has a recipe.</a:t>
+            </a:r>
+            <a:endParaRPr lang="en-US" dirty="0"/>
+          </a:p>
+        </p:txBody>
+      </p:sp>
+      <p:sp>
+        <p:nvSpPr>
+          <p:cNvPr id="4" name="Slide Number Placeholder 3"/>
+          <p:cNvSpPr>
+            <a:spLocks noGrp="1"/>
+          </p:cNvSpPr>
+          <p:nvPr>
+            <p:ph type="sldNum" sz="quarter" idx="10"/>
+          </p:nvPr>
+        </p:nvSpPr>
+        <p:spPr/>
+        <p:txBody>
+          <a:bodyPr/>
+          <a:lstStyle/>
+          <a:p>
+            <a:fld id="{F7021451-1387-4CA6-816F-3879F97B5CBC}" type="slidenum">
+              <a:rPr lang="en-US"/>
+              <a:t>16</a:t>
             </a:fld>
             <a:endParaRPr lang="en-US"/>
           </a:p>
@@ -4556,7 +4734,7 @@
                 <a:ea typeface="Cambria" pitchFamily="34" charset="-122"/>
                 <a:cs typeface="Cambria" pitchFamily="34" charset="-120"/>
               </a:rPr>
-              <a:t>Precedent can lower confidence, never raise it — so the system can't talk itself into being right.</a:t>
+              <a:t>T1 says how sure the ranking is. CONFIRMED says the fix was proved.</a:t>
             </a:r>
             <a:endParaRPr lang="en-US" sz="1800" dirty="0"/>
           </a:p>
@@ -4674,1077 +4852,528 @@
           </a:p>
         </p:txBody>
       </p:sp>
-      <p:graphicFrame>
-        <p:nvGraphicFramePr>
-          <p:cNvPr id="12" name="Table 0"/>
-          <p:cNvGraphicFramePr>
-            <a:graphicFrameLocks noGrp="1"/>
-          </p:cNvGraphicFramePr>
-          <p:nvPr>
-            <p:extLst>
-              <p:ext uri="{D42A27DB-BD31-4B8C-83A1-F6EECF244321}">
-                <p14:modId xmlns:p14="http://schemas.microsoft.com/office/powerpoint/2010/main" val="1579011935"/>
-              </p:ext>
-            </p:extLst>
-          </p:nvPr>
-        </p:nvGraphicFramePr>
-        <p:xfrm>
-          <a:off x="548640" y="1691640"/>
-          <a:ext cx="11094415" cy="914400"/>
-        </p:xfrm>
-        <a:graphic>
-          <a:graphicData uri="http://schemas.openxmlformats.org/drawingml/2006/table">
-            <a:tbl>
-              <a:tblPr/>
-              <a:tblGrid>
-                <a:gridCol w="822960"/>
-                <a:gridCol w="5486400"/>
-                <a:gridCol w="4785055"/>
-              </a:tblGrid>
-              <a:tr h="566928">
-                <a:tc>
-                  <a:txBody>
-                    <a:bodyPr/>
-                    <a:lstStyle/>
-                    <a:p>
-                      <a:pPr indent="0" marL="0">
-                        <a:buNone/>
-                      </a:pPr>
-                      <a:r>
-                        <a:rPr lang="en-US" sz="1350" b="1" dirty="0">
-                          <a:solidFill>
-                            <a:srgbClr val="FFFFFF"/>
-                          </a:solidFill>
-                          <a:latin typeface="Calibri" pitchFamily="34" charset="0"/>
-                          <a:ea typeface="Calibri" pitchFamily="34" charset="-122"/>
-                          <a:cs typeface="Calibri" pitchFamily="34" charset="-120"/>
-                        </a:rPr>
-                        <a:t>Tier</a:t>
-                      </a:r>
-                      <a:endParaRPr lang="en-US" sz="1350" dirty="0">
-                        <a:latin typeface="Calibri" charset="0"/>
-                        <a:ea typeface="Calibri" charset="0"/>
-                        <a:cs typeface="Calibri" charset="0"/>
-                      </a:endParaRPr>
-                    </a:p>
-                  </a:txBody>
-                  <a:tcPr marL="109728" marR="109728" marT="73152" marB="73152" anchor="ctr">
-                    <a:lnL w="9525" cap="flat" cmpd="sng" algn="ctr">
-                      <a:solidFill>
-                        <a:srgbClr val="D7E3DC"/>
-                      </a:solidFill>
-                      <a:prstDash val="solid"/>
-                      <a:round/>
-                      <a:headEnd type="none" w="med" len="med"/>
-                      <a:tailEnd type="none" w="med" len="med"/>
-                    </a:lnL>
-                    <a:lnR w="9525" cap="flat" cmpd="sng" algn="ctr">
-                      <a:solidFill>
-                        <a:srgbClr val="D7E3DC"/>
-                      </a:solidFill>
-                      <a:prstDash val="solid"/>
-                      <a:round/>
-                      <a:headEnd type="none" w="med" len="med"/>
-                      <a:tailEnd type="none" w="med" len="med"/>
-                    </a:lnR>
-                    <a:lnT w="9525" cap="flat" cmpd="sng" algn="ctr">
-                      <a:solidFill>
-                        <a:srgbClr val="D7E3DC"/>
-                      </a:solidFill>
-                      <a:prstDash val="solid"/>
-                      <a:round/>
-                      <a:headEnd type="none" w="med" len="med"/>
-                      <a:tailEnd type="none" w="med" len="med"/>
-                    </a:lnT>
-                    <a:lnB w="9525" cap="flat" cmpd="sng" algn="ctr">
-                      <a:solidFill>
-                        <a:srgbClr val="D7E3DC"/>
-                      </a:solidFill>
-                      <a:prstDash val="solid"/>
-                      <a:round/>
-                      <a:headEnd type="none" w="med" len="med"/>
-                      <a:tailEnd type="none" w="med" len="med"/>
-                    </a:lnB>
-                    <a:solidFill>
-                      <a:srgbClr val="1F7A4D"/>
-                    </a:solidFill>
-                  </a:tcPr>
-                </a:tc>
-                <a:tc>
-                  <a:txBody>
-                    <a:bodyPr/>
-                    <a:lstStyle/>
-                    <a:p>
-                      <a:pPr indent="0" marL="0">
-                        <a:buNone/>
-                      </a:pPr>
-                      <a:r>
-                        <a:rPr lang="en-US" sz="1350" b="1" dirty="0">
-                          <a:solidFill>
-                            <a:srgbClr val="FFFFFF"/>
-                          </a:solidFill>
-                          <a:latin typeface="Calibri" pitchFamily="34" charset="0"/>
-                          <a:ea typeface="Calibri" pitchFamily="34" charset="-122"/>
-                          <a:cs typeface="Calibri" pitchFamily="34" charset="-120"/>
-                        </a:rPr>
-                        <a:t>Reached when</a:t>
-                      </a:r>
-                      <a:endParaRPr lang="en-US" sz="1350" dirty="0">
-                        <a:latin typeface="Calibri" charset="0"/>
-                        <a:ea typeface="Calibri" charset="0"/>
-                        <a:cs typeface="Calibri" charset="0"/>
-                      </a:endParaRPr>
-                    </a:p>
-                  </a:txBody>
-                  <a:tcPr marL="109728" marR="109728" marT="73152" marB="73152" anchor="ctr">
-                    <a:lnL w="9525" cap="flat" cmpd="sng" algn="ctr">
-                      <a:solidFill>
-                        <a:srgbClr val="D7E3DC"/>
-                      </a:solidFill>
-                      <a:prstDash val="solid"/>
-                      <a:round/>
-                      <a:headEnd type="none" w="med" len="med"/>
-                      <a:tailEnd type="none" w="med" len="med"/>
-                    </a:lnL>
-                    <a:lnR w="9525" cap="flat" cmpd="sng" algn="ctr">
-                      <a:solidFill>
-                        <a:srgbClr val="D7E3DC"/>
-                      </a:solidFill>
-                      <a:prstDash val="solid"/>
-                      <a:round/>
-                      <a:headEnd type="none" w="med" len="med"/>
-                      <a:tailEnd type="none" w="med" len="med"/>
-                    </a:lnR>
-                    <a:lnT w="9525" cap="flat" cmpd="sng" algn="ctr">
-                      <a:solidFill>
-                        <a:srgbClr val="D7E3DC"/>
-                      </a:solidFill>
-                      <a:prstDash val="solid"/>
-                      <a:round/>
-                      <a:headEnd type="none" w="med" len="med"/>
-                      <a:tailEnd type="none" w="med" len="med"/>
-                    </a:lnT>
-                    <a:lnB w="9525" cap="flat" cmpd="sng" algn="ctr">
-                      <a:solidFill>
-                        <a:srgbClr val="D7E3DC"/>
-                      </a:solidFill>
-                      <a:prstDash val="solid"/>
-                      <a:round/>
-                      <a:headEnd type="none" w="med" len="med"/>
-                      <a:tailEnd type="none" w="med" len="med"/>
-                    </a:lnB>
-                    <a:solidFill>
-                      <a:srgbClr val="1F7A4D"/>
-                    </a:solidFill>
-                  </a:tcPr>
-                </a:tc>
-                <a:tc>
-                  <a:txBody>
-                    <a:bodyPr/>
-                    <a:lstStyle/>
-                    <a:p>
-                      <a:pPr indent="0" marL="0">
-                        <a:buNone/>
-                      </a:pPr>
-                      <a:r>
-                        <a:rPr lang="en-US" sz="1350" b="1" dirty="0">
-                          <a:solidFill>
-                            <a:srgbClr val="FFFFFF"/>
-                          </a:solidFill>
-                          <a:latin typeface="Calibri" pitchFamily="34" charset="0"/>
-                          <a:ea typeface="Calibri" pitchFamily="34" charset="-122"/>
-                          <a:cs typeface="Calibri" pitchFamily="34" charset="-120"/>
-                        </a:rPr>
-                        <a:t>What the operator sees</a:t>
-                      </a:r>
-                      <a:endParaRPr lang="en-US" sz="1350" dirty="0">
-                        <a:latin typeface="Calibri" charset="0"/>
-                        <a:ea typeface="Calibri" charset="0"/>
-                        <a:cs typeface="Calibri" charset="0"/>
-                      </a:endParaRPr>
-                    </a:p>
-                  </a:txBody>
-                  <a:tcPr marL="109728" marR="109728" marT="73152" marB="73152" anchor="ctr">
-                    <a:lnL w="9525" cap="flat" cmpd="sng" algn="ctr">
-                      <a:solidFill>
-                        <a:srgbClr val="D7E3DC"/>
-                      </a:solidFill>
-                      <a:prstDash val="solid"/>
-                      <a:round/>
-                      <a:headEnd type="none" w="med" len="med"/>
-                      <a:tailEnd type="none" w="med" len="med"/>
-                    </a:lnL>
-                    <a:lnR w="9525" cap="flat" cmpd="sng" algn="ctr">
-                      <a:solidFill>
-                        <a:srgbClr val="D7E3DC"/>
-                      </a:solidFill>
-                      <a:prstDash val="solid"/>
-                      <a:round/>
-                      <a:headEnd type="none" w="med" len="med"/>
-                      <a:tailEnd type="none" w="med" len="med"/>
-                    </a:lnR>
-                    <a:lnT w="9525" cap="flat" cmpd="sng" algn="ctr">
-                      <a:solidFill>
-                        <a:srgbClr val="D7E3DC"/>
-                      </a:solidFill>
-                      <a:prstDash val="solid"/>
-                      <a:round/>
-                      <a:headEnd type="none" w="med" len="med"/>
-                      <a:tailEnd type="none" w="med" len="med"/>
-                    </a:lnT>
-                    <a:lnB w="9525" cap="flat" cmpd="sng" algn="ctr">
-                      <a:solidFill>
-                        <a:srgbClr val="D7E3DC"/>
-                      </a:solidFill>
-                      <a:prstDash val="solid"/>
-                      <a:round/>
-                      <a:headEnd type="none" w="med" len="med"/>
-                      <a:tailEnd type="none" w="med" len="med"/>
-                    </a:lnB>
-                    <a:solidFill>
-                      <a:srgbClr val="1F7A4D"/>
-                    </a:solidFill>
-                  </a:tcPr>
-                </a:tc>
-              </a:tr>
-              <a:tr h="566928">
-                <a:tc>
-                  <a:txBody>
-                    <a:bodyPr/>
-                    <a:lstStyle/>
-                    <a:p>
-                      <a:pPr indent="0" marL="0">
-                        <a:buNone/>
-                      </a:pPr>
-                      <a:r>
-                        <a:rPr lang="en-US" sz="1350" b="1" dirty="0">
-                          <a:solidFill>
-                            <a:srgbClr val="14201B"/>
-                          </a:solidFill>
-                          <a:latin typeface="Calibri" pitchFamily="34" charset="0"/>
-                          <a:ea typeface="Calibri" pitchFamily="34" charset="-122"/>
-                          <a:cs typeface="Calibri" pitchFamily="34" charset="-120"/>
-                        </a:rPr>
-                        <a:t>T1</a:t>
-                      </a:r>
-                      <a:endParaRPr lang="en-US" sz="1350" dirty="0">
-                        <a:latin typeface="Calibri" charset="0"/>
-                        <a:ea typeface="Calibri" charset="0"/>
-                        <a:cs typeface="Calibri" charset="0"/>
-                      </a:endParaRPr>
-                    </a:p>
-                  </a:txBody>
-                  <a:tcPr marL="109728" marR="109728" marT="73152" marB="73152" anchor="ctr">
-                    <a:lnL w="9525" cap="flat" cmpd="sng" algn="ctr">
-                      <a:solidFill>
-                        <a:srgbClr val="D7E3DC"/>
-                      </a:solidFill>
-                      <a:prstDash val="solid"/>
-                      <a:round/>
-                      <a:headEnd type="none" w="med" len="med"/>
-                      <a:tailEnd type="none" w="med" len="med"/>
-                    </a:lnL>
-                    <a:lnR w="9525" cap="flat" cmpd="sng" algn="ctr">
-                      <a:solidFill>
-                        <a:srgbClr val="D7E3DC"/>
-                      </a:solidFill>
-                      <a:prstDash val="solid"/>
-                      <a:round/>
-                      <a:headEnd type="none" w="med" len="med"/>
-                      <a:tailEnd type="none" w="med" len="med"/>
-                    </a:lnR>
-                    <a:lnT w="9525" cap="flat" cmpd="sng" algn="ctr">
-                      <a:solidFill>
-                        <a:srgbClr val="D7E3DC"/>
-                      </a:solidFill>
-                      <a:prstDash val="solid"/>
-                      <a:round/>
-                      <a:headEnd type="none" w="med" len="med"/>
-                      <a:tailEnd type="none" w="med" len="med"/>
-                    </a:lnT>
-                    <a:lnB w="9525" cap="flat" cmpd="sng" algn="ctr">
-                      <a:solidFill>
-                        <a:srgbClr val="D7E3DC"/>
-                      </a:solidFill>
-                      <a:prstDash val="solid"/>
-                      <a:round/>
-                      <a:headEnd type="none" w="med" len="med"/>
-                      <a:tailEnd type="none" w="med" len="med"/>
-                    </a:lnB>
-                    <a:solidFill>
-                      <a:srgbClr val="EEF5F1"/>
-                    </a:solidFill>
-                  </a:tcPr>
-                </a:tc>
-                <a:tc>
-                  <a:txBody>
-                    <a:bodyPr/>
-                    <a:lstStyle/>
-                    <a:p>
-                      <a:pPr indent="0" marL="0">
-                        <a:buNone/>
-                      </a:pPr>
-                      <a:r>
-                        <a:rPr lang="en-US" sz="1350" dirty="0">
-                          <a:solidFill>
-                            <a:srgbClr val="14201B"/>
-                          </a:solidFill>
-                          <a:latin typeface="Calibri" pitchFamily="34" charset="0"/>
-                          <a:ea typeface="Calibri" pitchFamily="34" charset="-122"/>
-                          <a:cs typeface="Calibri" pitchFamily="34" charset="-120"/>
-                        </a:rPr>
-                        <a:t>A check on this case confirmed the top cause — or: rule engine and critic agree · deciding measurement beats chance · ≥3 similar confirmed cases, none contradicting</a:t>
-                      </a:r>
-                      <a:endParaRPr lang="en-US" sz="1350" dirty="0">
-                        <a:latin typeface="Calibri" charset="0"/>
-                        <a:ea typeface="Calibri" charset="0"/>
-                        <a:cs typeface="Calibri" charset="0"/>
-                      </a:endParaRPr>
-                    </a:p>
-                  </a:txBody>
-                  <a:tcPr marL="109728" marR="109728" marT="73152" marB="73152" anchor="ctr">
-                    <a:lnL w="9525" cap="flat" cmpd="sng" algn="ctr">
-                      <a:solidFill>
-                        <a:srgbClr val="D7E3DC"/>
-                      </a:solidFill>
-                      <a:prstDash val="solid"/>
-                      <a:round/>
-                      <a:headEnd type="none" w="med" len="med"/>
-                      <a:tailEnd type="none" w="med" len="med"/>
-                    </a:lnL>
-                    <a:lnR w="9525" cap="flat" cmpd="sng" algn="ctr">
-                      <a:solidFill>
-                        <a:srgbClr val="D7E3DC"/>
-                      </a:solidFill>
-                      <a:prstDash val="solid"/>
-                      <a:round/>
-                      <a:headEnd type="none" w="med" len="med"/>
-                      <a:tailEnd type="none" w="med" len="med"/>
-                    </a:lnR>
-                    <a:lnT w="9525" cap="flat" cmpd="sng" algn="ctr">
-                      <a:solidFill>
-                        <a:srgbClr val="D7E3DC"/>
-                      </a:solidFill>
-                      <a:prstDash val="solid"/>
-                      <a:round/>
-                      <a:headEnd type="none" w="med" len="med"/>
-                      <a:tailEnd type="none" w="med" len="med"/>
-                    </a:lnT>
-                    <a:lnB w="9525" cap="flat" cmpd="sng" algn="ctr">
-                      <a:solidFill>
-                        <a:srgbClr val="D7E3DC"/>
-                      </a:solidFill>
-                      <a:prstDash val="solid"/>
-                      <a:round/>
-                      <a:headEnd type="none" w="med" len="med"/>
-                      <a:tailEnd type="none" w="med" len="med"/>
-                    </a:lnB>
-                    <a:solidFill>
-                      <a:srgbClr val="EEF5F1"/>
-                    </a:solidFill>
-                  </a:tcPr>
-                </a:tc>
-                <a:tc>
-                  <a:txBody>
-                    <a:bodyPr/>
-                    <a:lstStyle/>
-                    <a:p>
-                      <a:pPr indent="0" marL="0">
-                        <a:buNone/>
-                      </a:pPr>
-                      <a:r>
-                        <a:rPr lang="en-US" sz="1350" dirty="0">
-                          <a:solidFill>
-                            <a:srgbClr val="14201B"/>
-                          </a:solidFill>
-                          <a:latin typeface="Calibri" pitchFamily="34" charset="0"/>
-                          <a:ea typeface="Calibri" pitchFamily="34" charset="-122"/>
-                          <a:cs typeface="Calibri" pitchFamily="34" charset="-120"/>
-                        </a:rPr>
-                        <a:t>One lead cause, with evidence and matching past cases</a:t>
-                      </a:r>
-                      <a:endParaRPr lang="en-US" sz="1350" dirty="0">
-                        <a:latin typeface="Calibri" charset="0"/>
-                        <a:ea typeface="Calibri" charset="0"/>
-                        <a:cs typeface="Calibri" charset="0"/>
-                      </a:endParaRPr>
-                    </a:p>
-                  </a:txBody>
-                  <a:tcPr marL="109728" marR="109728" marT="73152" marB="73152" anchor="ctr">
-                    <a:lnL w="9525" cap="flat" cmpd="sng" algn="ctr">
-                      <a:solidFill>
-                        <a:srgbClr val="D7E3DC"/>
-                      </a:solidFill>
-                      <a:prstDash val="solid"/>
-                      <a:round/>
-                      <a:headEnd type="none" w="med" len="med"/>
-                      <a:tailEnd type="none" w="med" len="med"/>
-                    </a:lnL>
-                    <a:lnR w="9525" cap="flat" cmpd="sng" algn="ctr">
-                      <a:solidFill>
-                        <a:srgbClr val="D7E3DC"/>
-                      </a:solidFill>
-                      <a:prstDash val="solid"/>
-                      <a:round/>
-                      <a:headEnd type="none" w="med" len="med"/>
-                      <a:tailEnd type="none" w="med" len="med"/>
-                    </a:lnR>
-                    <a:lnT w="9525" cap="flat" cmpd="sng" algn="ctr">
-                      <a:solidFill>
-                        <a:srgbClr val="D7E3DC"/>
-                      </a:solidFill>
-                      <a:prstDash val="solid"/>
-                      <a:round/>
-                      <a:headEnd type="none" w="med" len="med"/>
-                      <a:tailEnd type="none" w="med" len="med"/>
-                    </a:lnT>
-                    <a:lnB w="9525" cap="flat" cmpd="sng" algn="ctr">
-                      <a:solidFill>
-                        <a:srgbClr val="D7E3DC"/>
-                      </a:solidFill>
-                      <a:prstDash val="solid"/>
-                      <a:round/>
-                      <a:headEnd type="none" w="med" len="med"/>
-                      <a:tailEnd type="none" w="med" len="med"/>
-                    </a:lnB>
-                    <a:solidFill>
-                      <a:srgbClr val="EEF5F1"/>
-                    </a:solidFill>
-                  </a:tcPr>
-                </a:tc>
-              </a:tr>
-              <a:tr h="566928">
-                <a:tc>
-                  <a:txBody>
-                    <a:bodyPr/>
-                    <a:lstStyle/>
-                    <a:p>
-                      <a:pPr indent="0" marL="0">
-                        <a:buNone/>
-                      </a:pPr>
-                      <a:r>
-                        <a:rPr lang="en-US" sz="1350" b="1" dirty="0">
-                          <a:solidFill>
-                            <a:srgbClr val="14201B"/>
-                          </a:solidFill>
-                          <a:latin typeface="Calibri" pitchFamily="34" charset="0"/>
-                          <a:ea typeface="Calibri" pitchFamily="34" charset="-122"/>
-                          <a:cs typeface="Calibri" pitchFamily="34" charset="-120"/>
-                        </a:rPr>
-                        <a:t>T2</a:t>
-                      </a:r>
-                      <a:endParaRPr lang="en-US" sz="1350" dirty="0">
-                        <a:latin typeface="Calibri" charset="0"/>
-                        <a:ea typeface="Calibri" charset="0"/>
-                        <a:cs typeface="Calibri" charset="0"/>
-                      </a:endParaRPr>
-                    </a:p>
-                  </a:txBody>
-                  <a:tcPr marL="109728" marR="109728" marT="73152" marB="73152" anchor="ctr">
-                    <a:lnL w="9525" cap="flat" cmpd="sng" algn="ctr">
-                      <a:solidFill>
-                        <a:srgbClr val="D7E3DC"/>
-                      </a:solidFill>
-                      <a:prstDash val="solid"/>
-                      <a:round/>
-                      <a:headEnd type="none" w="med" len="med"/>
-                      <a:tailEnd type="none" w="med" len="med"/>
-                    </a:lnL>
-                    <a:lnR w="9525" cap="flat" cmpd="sng" algn="ctr">
-                      <a:solidFill>
-                        <a:srgbClr val="D7E3DC"/>
-                      </a:solidFill>
-                      <a:prstDash val="solid"/>
-                      <a:round/>
-                      <a:headEnd type="none" w="med" len="med"/>
-                      <a:tailEnd type="none" w="med" len="med"/>
-                    </a:lnR>
-                    <a:lnT w="9525" cap="flat" cmpd="sng" algn="ctr">
-                      <a:solidFill>
-                        <a:srgbClr val="D7E3DC"/>
-                      </a:solidFill>
-                      <a:prstDash val="solid"/>
-                      <a:round/>
-                      <a:headEnd type="none" w="med" len="med"/>
-                      <a:tailEnd type="none" w="med" len="med"/>
-                    </a:lnT>
-                    <a:lnB w="9525" cap="flat" cmpd="sng" algn="ctr">
-                      <a:solidFill>
-                        <a:srgbClr val="D7E3DC"/>
-                      </a:solidFill>
-                      <a:prstDash val="solid"/>
-                      <a:round/>
-                      <a:headEnd type="none" w="med" len="med"/>
-                      <a:tailEnd type="none" w="med" len="med"/>
-                    </a:lnB>
-                    <a:solidFill>
-                      <a:srgbClr val="FFFFFF"/>
-                    </a:solidFill>
-                  </a:tcPr>
-                </a:tc>
-                <a:tc>
-                  <a:txBody>
-                    <a:bodyPr/>
-                    <a:lstStyle/>
-                    <a:p>
-                      <a:pPr indent="0" marL="0">
-                        <a:buNone/>
-                      </a:pPr>
-                      <a:r>
-                        <a:rPr lang="en-US" sz="1350" dirty="0">
-                          <a:solidFill>
-                            <a:srgbClr val="14201B"/>
-                          </a:solidFill>
-                          <a:latin typeface="Calibri" pitchFamily="34" charset="0"/>
-                          <a:ea typeface="Calibri" pitchFamily="34" charset="-122"/>
-                          <a:cs typeface="Calibri" pitchFamily="34" charset="-120"/>
-                        </a:rPr>
-                        <a:t>They agree, but no precedent or the measurement isn't decisive</a:t>
-                      </a:r>
-                      <a:endParaRPr lang="en-US" sz="1350" dirty="0">
-                        <a:latin typeface="Calibri" charset="0"/>
-                        <a:ea typeface="Calibri" charset="0"/>
-                        <a:cs typeface="Calibri" charset="0"/>
-                      </a:endParaRPr>
-                    </a:p>
-                  </a:txBody>
-                  <a:tcPr marL="109728" marR="109728" marT="73152" marB="73152" anchor="ctr">
-                    <a:lnL w="9525" cap="flat" cmpd="sng" algn="ctr">
-                      <a:solidFill>
-                        <a:srgbClr val="D7E3DC"/>
-                      </a:solidFill>
-                      <a:prstDash val="solid"/>
-                      <a:round/>
-                      <a:headEnd type="none" w="med" len="med"/>
-                      <a:tailEnd type="none" w="med" len="med"/>
-                    </a:lnL>
-                    <a:lnR w="9525" cap="flat" cmpd="sng" algn="ctr">
-                      <a:solidFill>
-                        <a:srgbClr val="D7E3DC"/>
-                      </a:solidFill>
-                      <a:prstDash val="solid"/>
-                      <a:round/>
-                      <a:headEnd type="none" w="med" len="med"/>
-                      <a:tailEnd type="none" w="med" len="med"/>
-                    </a:lnR>
-                    <a:lnT w="9525" cap="flat" cmpd="sng" algn="ctr">
-                      <a:solidFill>
-                        <a:srgbClr val="D7E3DC"/>
-                      </a:solidFill>
-                      <a:prstDash val="solid"/>
-                      <a:round/>
-                      <a:headEnd type="none" w="med" len="med"/>
-                      <a:tailEnd type="none" w="med" len="med"/>
-                    </a:lnT>
-                    <a:lnB w="9525" cap="flat" cmpd="sng" algn="ctr">
-                      <a:solidFill>
-                        <a:srgbClr val="D7E3DC"/>
-                      </a:solidFill>
-                      <a:prstDash val="solid"/>
-                      <a:round/>
-                      <a:headEnd type="none" w="med" len="med"/>
-                      <a:tailEnd type="none" w="med" len="med"/>
-                    </a:lnB>
-                    <a:solidFill>
-                      <a:srgbClr val="FFFFFF"/>
-                    </a:solidFill>
-                  </a:tcPr>
-                </a:tc>
-                <a:tc>
-                  <a:txBody>
-                    <a:bodyPr/>
-                    <a:lstStyle/>
-                    <a:p>
-                      <a:pPr indent="0" marL="0">
-                        <a:buNone/>
-                      </a:pPr>
-                      <a:r>
-                        <a:rPr lang="en-US" sz="1350" dirty="0">
-                          <a:solidFill>
-                            <a:srgbClr val="14201B"/>
-                          </a:solidFill>
-                          <a:latin typeface="Calibri" pitchFamily="34" charset="0"/>
-                          <a:ea typeface="Calibri" pitchFamily="34" charset="-122"/>
-                          <a:cs typeface="Calibri" pitchFamily="34" charset="-120"/>
-                        </a:rPr>
-                        <a:t>One lead cause, marked provisional, with what would confirm it</a:t>
-                      </a:r>
-                      <a:endParaRPr lang="en-US" sz="1350" dirty="0">
-                        <a:latin typeface="Calibri" charset="0"/>
-                        <a:ea typeface="Calibri" charset="0"/>
-                        <a:cs typeface="Calibri" charset="0"/>
-                      </a:endParaRPr>
-                    </a:p>
-                  </a:txBody>
-                  <a:tcPr marL="109728" marR="109728" marT="73152" marB="73152" anchor="ctr">
-                    <a:lnL w="9525" cap="flat" cmpd="sng" algn="ctr">
-                      <a:solidFill>
-                        <a:srgbClr val="D7E3DC"/>
-                      </a:solidFill>
-                      <a:prstDash val="solid"/>
-                      <a:round/>
-                      <a:headEnd type="none" w="med" len="med"/>
-                      <a:tailEnd type="none" w="med" len="med"/>
-                    </a:lnL>
-                    <a:lnR w="9525" cap="flat" cmpd="sng" algn="ctr">
-                      <a:solidFill>
-                        <a:srgbClr val="D7E3DC"/>
-                      </a:solidFill>
-                      <a:prstDash val="solid"/>
-                      <a:round/>
-                      <a:headEnd type="none" w="med" len="med"/>
-                      <a:tailEnd type="none" w="med" len="med"/>
-                    </a:lnR>
-                    <a:lnT w="9525" cap="flat" cmpd="sng" algn="ctr">
-                      <a:solidFill>
-                        <a:srgbClr val="D7E3DC"/>
-                      </a:solidFill>
-                      <a:prstDash val="solid"/>
-                      <a:round/>
-                      <a:headEnd type="none" w="med" len="med"/>
-                      <a:tailEnd type="none" w="med" len="med"/>
-                    </a:lnT>
-                    <a:lnB w="9525" cap="flat" cmpd="sng" algn="ctr">
-                      <a:solidFill>
-                        <a:srgbClr val="D7E3DC"/>
-                      </a:solidFill>
-                      <a:prstDash val="solid"/>
-                      <a:round/>
-                      <a:headEnd type="none" w="med" len="med"/>
-                      <a:tailEnd type="none" w="med" len="med"/>
-                    </a:lnB>
-                    <a:solidFill>
-                      <a:srgbClr val="FFFFFF"/>
-                    </a:solidFill>
-                  </a:tcPr>
-                </a:tc>
-              </a:tr>
-              <a:tr h="566928">
-                <a:tc>
-                  <a:txBody>
-                    <a:bodyPr/>
-                    <a:lstStyle/>
-                    <a:p>
-                      <a:pPr indent="0" marL="0">
-                        <a:buNone/>
-                      </a:pPr>
-                      <a:r>
-                        <a:rPr lang="en-US" sz="1350" b="1" dirty="0">
-                          <a:solidFill>
-                            <a:srgbClr val="14201B"/>
-                          </a:solidFill>
-                          <a:latin typeface="Calibri" pitchFamily="34" charset="0"/>
-                          <a:ea typeface="Calibri" pitchFamily="34" charset="-122"/>
-                          <a:cs typeface="Calibri" pitchFamily="34" charset="-120"/>
-                        </a:rPr>
-                        <a:t>T3</a:t>
-                      </a:r>
-                      <a:endParaRPr lang="en-US" sz="1350" dirty="0">
-                        <a:latin typeface="Calibri" charset="0"/>
-                        <a:ea typeface="Calibri" charset="0"/>
-                        <a:cs typeface="Calibri" charset="0"/>
-                      </a:endParaRPr>
-                    </a:p>
-                  </a:txBody>
-                  <a:tcPr marL="109728" marR="109728" marT="73152" marB="73152" anchor="ctr">
-                    <a:lnL w="9525" cap="flat" cmpd="sng" algn="ctr">
-                      <a:solidFill>
-                        <a:srgbClr val="D7E3DC"/>
-                      </a:solidFill>
-                      <a:prstDash val="solid"/>
-                      <a:round/>
-                      <a:headEnd type="none" w="med" len="med"/>
-                      <a:tailEnd type="none" w="med" len="med"/>
-                    </a:lnL>
-                    <a:lnR w="9525" cap="flat" cmpd="sng" algn="ctr">
-                      <a:solidFill>
-                        <a:srgbClr val="D7E3DC"/>
-                      </a:solidFill>
-                      <a:prstDash val="solid"/>
-                      <a:round/>
-                      <a:headEnd type="none" w="med" len="med"/>
-                      <a:tailEnd type="none" w="med" len="med"/>
-                    </a:lnR>
-                    <a:lnT w="9525" cap="flat" cmpd="sng" algn="ctr">
-                      <a:solidFill>
-                        <a:srgbClr val="D7E3DC"/>
-                      </a:solidFill>
-                      <a:prstDash val="solid"/>
-                      <a:round/>
-                      <a:headEnd type="none" w="med" len="med"/>
-                      <a:tailEnd type="none" w="med" len="med"/>
-                    </a:lnT>
-                    <a:lnB w="9525" cap="flat" cmpd="sng" algn="ctr">
-                      <a:solidFill>
-                        <a:srgbClr val="D7E3DC"/>
-                      </a:solidFill>
-                      <a:prstDash val="solid"/>
-                      <a:round/>
-                      <a:headEnd type="none" w="med" len="med"/>
-                      <a:tailEnd type="none" w="med" len="med"/>
-                    </a:lnB>
-                    <a:solidFill>
-                      <a:srgbClr val="EEF5F1"/>
-                    </a:solidFill>
-                  </a:tcPr>
-                </a:tc>
-                <a:tc>
-                  <a:txBody>
-                    <a:bodyPr/>
-                    <a:lstStyle/>
-                    <a:p>
-                      <a:pPr indent="0" marL="0">
-                        <a:buNone/>
-                      </a:pPr>
-                      <a:r>
-                        <a:rPr lang="en-US" sz="1350" dirty="0">
-                          <a:solidFill>
-                            <a:srgbClr val="14201B"/>
-                          </a:solidFill>
-                          <a:latin typeface="Calibri" pitchFamily="34" charset="0"/>
-                          <a:ea typeface="Calibri" pitchFamily="34" charset="-122"/>
-                          <a:cs typeface="Calibri" pitchFamily="34" charset="-120"/>
-                        </a:rPr>
-                        <a:t>They disagree · the measurement beats chance</a:t>
-                      </a:r>
-                      <a:endParaRPr lang="en-US" sz="1350" dirty="0">
-                        <a:latin typeface="Calibri" charset="0"/>
-                        <a:ea typeface="Calibri" charset="0"/>
-                        <a:cs typeface="Calibri" charset="0"/>
-                      </a:endParaRPr>
-                    </a:p>
-                  </a:txBody>
-                  <a:tcPr marL="109728" marR="109728" marT="73152" marB="73152" anchor="ctr">
-                    <a:lnL w="9525" cap="flat" cmpd="sng" algn="ctr">
-                      <a:solidFill>
-                        <a:srgbClr val="D7E3DC"/>
-                      </a:solidFill>
-                      <a:prstDash val="solid"/>
-                      <a:round/>
-                      <a:headEnd type="none" w="med" len="med"/>
-                      <a:tailEnd type="none" w="med" len="med"/>
-                    </a:lnL>
-                    <a:lnR w="9525" cap="flat" cmpd="sng" algn="ctr">
-                      <a:solidFill>
-                        <a:srgbClr val="D7E3DC"/>
-                      </a:solidFill>
-                      <a:prstDash val="solid"/>
-                      <a:round/>
-                      <a:headEnd type="none" w="med" len="med"/>
-                      <a:tailEnd type="none" w="med" len="med"/>
-                    </a:lnR>
-                    <a:lnT w="9525" cap="flat" cmpd="sng" algn="ctr">
-                      <a:solidFill>
-                        <a:srgbClr val="D7E3DC"/>
-                      </a:solidFill>
-                      <a:prstDash val="solid"/>
-                      <a:round/>
-                      <a:headEnd type="none" w="med" len="med"/>
-                      <a:tailEnd type="none" w="med" len="med"/>
-                    </a:lnT>
-                    <a:lnB w="9525" cap="flat" cmpd="sng" algn="ctr">
-                      <a:solidFill>
-                        <a:srgbClr val="D7E3DC"/>
-                      </a:solidFill>
-                      <a:prstDash val="solid"/>
-                      <a:round/>
-                      <a:headEnd type="none" w="med" len="med"/>
-                      <a:tailEnd type="none" w="med" len="med"/>
-                    </a:lnB>
-                    <a:solidFill>
-                      <a:srgbClr val="EEF5F1"/>
-                    </a:solidFill>
-                  </a:tcPr>
-                </a:tc>
-                <a:tc>
-                  <a:txBody>
-                    <a:bodyPr/>
-                    <a:lstStyle/>
-                    <a:p>
-                      <a:pPr indent="0" marL="0">
-                        <a:buNone/>
-                      </a:pPr>
-                      <a:r>
-                        <a:rPr lang="en-US" sz="1350" dirty="0">
-                          <a:solidFill>
-                            <a:srgbClr val="14201B"/>
-                          </a:solidFill>
-                          <a:latin typeface="Calibri" pitchFamily="34" charset="0"/>
-                          <a:ea typeface="Calibri" pitchFamily="34" charset="-122"/>
-                          <a:cs typeface="Calibri" pitchFamily="34" charset="-120"/>
-                        </a:rPr>
-                        <a:t>Both candidates; the measurement holds the top slot</a:t>
-                      </a:r>
-                      <a:endParaRPr lang="en-US" sz="1350" dirty="0">
-                        <a:latin typeface="Calibri" charset="0"/>
-                        <a:ea typeface="Calibri" charset="0"/>
-                        <a:cs typeface="Calibri" charset="0"/>
-                      </a:endParaRPr>
-                    </a:p>
-                  </a:txBody>
-                  <a:tcPr marL="109728" marR="109728" marT="73152" marB="73152" anchor="ctr">
-                    <a:lnL w="9525" cap="flat" cmpd="sng" algn="ctr">
-                      <a:solidFill>
-                        <a:srgbClr val="D7E3DC"/>
-                      </a:solidFill>
-                      <a:prstDash val="solid"/>
-                      <a:round/>
-                      <a:headEnd type="none" w="med" len="med"/>
-                      <a:tailEnd type="none" w="med" len="med"/>
-                    </a:lnL>
-                    <a:lnR w="9525" cap="flat" cmpd="sng" algn="ctr">
-                      <a:solidFill>
-                        <a:srgbClr val="D7E3DC"/>
-                      </a:solidFill>
-                      <a:prstDash val="solid"/>
-                      <a:round/>
-                      <a:headEnd type="none" w="med" len="med"/>
-                      <a:tailEnd type="none" w="med" len="med"/>
-                    </a:lnR>
-                    <a:lnT w="9525" cap="flat" cmpd="sng" algn="ctr">
-                      <a:solidFill>
-                        <a:srgbClr val="D7E3DC"/>
-                      </a:solidFill>
-                      <a:prstDash val="solid"/>
-                      <a:round/>
-                      <a:headEnd type="none" w="med" len="med"/>
-                      <a:tailEnd type="none" w="med" len="med"/>
-                    </a:lnT>
-                    <a:lnB w="9525" cap="flat" cmpd="sng" algn="ctr">
-                      <a:solidFill>
-                        <a:srgbClr val="D7E3DC"/>
-                      </a:solidFill>
-                      <a:prstDash val="solid"/>
-                      <a:round/>
-                      <a:headEnd type="none" w="med" len="med"/>
-                      <a:tailEnd type="none" w="med" len="med"/>
-                    </a:lnB>
-                    <a:solidFill>
-                      <a:srgbClr val="EEF5F1"/>
-                    </a:solidFill>
-                  </a:tcPr>
-                </a:tc>
-              </a:tr>
-              <a:tr h="566928">
-                <a:tc>
-                  <a:txBody>
-                    <a:bodyPr/>
-                    <a:lstStyle/>
-                    <a:p>
-                      <a:pPr indent="0" marL="0">
-                        <a:buNone/>
-                      </a:pPr>
-                      <a:r>
-                        <a:rPr lang="en-US" sz="1350" b="1" dirty="0">
-                          <a:solidFill>
-                            <a:srgbClr val="14201B"/>
-                          </a:solidFill>
-                          <a:latin typeface="Calibri" pitchFamily="34" charset="0"/>
-                          <a:ea typeface="Calibri" pitchFamily="34" charset="-122"/>
-                          <a:cs typeface="Calibri" pitchFamily="34" charset="-120"/>
-                        </a:rPr>
-                        <a:t>T4</a:t>
-                      </a:r>
-                      <a:endParaRPr lang="en-US" sz="1350" dirty="0">
-                        <a:latin typeface="Calibri" charset="0"/>
-                        <a:ea typeface="Calibri" charset="0"/>
-                        <a:cs typeface="Calibri" charset="0"/>
-                      </a:endParaRPr>
-                    </a:p>
-                  </a:txBody>
-                  <a:tcPr marL="109728" marR="109728" marT="73152" marB="73152" anchor="ctr">
-                    <a:lnL w="9525" cap="flat" cmpd="sng" algn="ctr">
-                      <a:solidFill>
-                        <a:srgbClr val="D7E3DC"/>
-                      </a:solidFill>
-                      <a:prstDash val="solid"/>
-                      <a:round/>
-                      <a:headEnd type="none" w="med" len="med"/>
-                      <a:tailEnd type="none" w="med" len="med"/>
-                    </a:lnL>
-                    <a:lnR w="9525" cap="flat" cmpd="sng" algn="ctr">
-                      <a:solidFill>
-                        <a:srgbClr val="D7E3DC"/>
-                      </a:solidFill>
-                      <a:prstDash val="solid"/>
-                      <a:round/>
-                      <a:headEnd type="none" w="med" len="med"/>
-                      <a:tailEnd type="none" w="med" len="med"/>
-                    </a:lnR>
-                    <a:lnT w="9525" cap="flat" cmpd="sng" algn="ctr">
-                      <a:solidFill>
-                        <a:srgbClr val="D7E3DC"/>
-                      </a:solidFill>
-                      <a:prstDash val="solid"/>
-                      <a:round/>
-                      <a:headEnd type="none" w="med" len="med"/>
-                      <a:tailEnd type="none" w="med" len="med"/>
-                    </a:lnT>
-                    <a:lnB w="9525" cap="flat" cmpd="sng" algn="ctr">
-                      <a:solidFill>
-                        <a:srgbClr val="D7E3DC"/>
-                      </a:solidFill>
-                      <a:prstDash val="solid"/>
-                      <a:round/>
-                      <a:headEnd type="none" w="med" len="med"/>
-                      <a:tailEnd type="none" w="med" len="med"/>
-                    </a:lnB>
-                    <a:solidFill>
-                      <a:srgbClr val="FFFFFF"/>
-                    </a:solidFill>
-                  </a:tcPr>
-                </a:tc>
-                <a:tc>
-                  <a:txBody>
-                    <a:bodyPr/>
-                    <a:lstStyle/>
-                    <a:p>
-                      <a:pPr indent="0" marL="0">
-                        <a:buNone/>
-                      </a:pPr>
-                      <a:r>
-                        <a:rPr lang="en-US" sz="1350" dirty="0">
-                          <a:solidFill>
-                            <a:srgbClr val="14201B"/>
-                          </a:solidFill>
-                          <a:latin typeface="Calibri" pitchFamily="34" charset="0"/>
-                          <a:ea typeface="Calibri" pitchFamily="34" charset="-122"/>
-                          <a:cs typeface="Calibri" pitchFamily="34" charset="-120"/>
-                        </a:rPr>
-                        <a:t>They disagree · the measurement can't separate them</a:t>
-                      </a:r>
-                      <a:endParaRPr lang="en-US" sz="1350" dirty="0">
-                        <a:latin typeface="Calibri" charset="0"/>
-                        <a:ea typeface="Calibri" charset="0"/>
-                        <a:cs typeface="Calibri" charset="0"/>
-                      </a:endParaRPr>
-                    </a:p>
-                  </a:txBody>
-                  <a:tcPr marL="109728" marR="109728" marT="73152" marB="73152" anchor="ctr">
-                    <a:lnL w="9525" cap="flat" cmpd="sng" algn="ctr">
-                      <a:solidFill>
-                        <a:srgbClr val="D7E3DC"/>
-                      </a:solidFill>
-                      <a:prstDash val="solid"/>
-                      <a:round/>
-                      <a:headEnd type="none" w="med" len="med"/>
-                      <a:tailEnd type="none" w="med" len="med"/>
-                    </a:lnL>
-                    <a:lnR w="9525" cap="flat" cmpd="sng" algn="ctr">
-                      <a:solidFill>
-                        <a:srgbClr val="D7E3DC"/>
-                      </a:solidFill>
-                      <a:prstDash val="solid"/>
-                      <a:round/>
-                      <a:headEnd type="none" w="med" len="med"/>
-                      <a:tailEnd type="none" w="med" len="med"/>
-                    </a:lnR>
-                    <a:lnT w="9525" cap="flat" cmpd="sng" algn="ctr">
-                      <a:solidFill>
-                        <a:srgbClr val="D7E3DC"/>
-                      </a:solidFill>
-                      <a:prstDash val="solid"/>
-                      <a:round/>
-                      <a:headEnd type="none" w="med" len="med"/>
-                      <a:tailEnd type="none" w="med" len="med"/>
-                    </a:lnT>
-                    <a:lnB w="9525" cap="flat" cmpd="sng" algn="ctr">
-                      <a:solidFill>
-                        <a:srgbClr val="D7E3DC"/>
-                      </a:solidFill>
-                      <a:prstDash val="solid"/>
-                      <a:round/>
-                      <a:headEnd type="none" w="med" len="med"/>
-                      <a:tailEnd type="none" w="med" len="med"/>
-                    </a:lnB>
-                    <a:solidFill>
-                      <a:srgbClr val="FFFFFF"/>
-                    </a:solidFill>
-                  </a:tcPr>
-                </a:tc>
-                <a:tc>
-                  <a:txBody>
-                    <a:bodyPr/>
-                    <a:lstStyle/>
-                    <a:p>
-                      <a:pPr indent="0" marL="0">
-                        <a:buNone/>
-                      </a:pPr>
-                      <a:r>
-                        <a:rPr lang="en-US" sz="1350" dirty="0">
-                          <a:solidFill>
-                            <a:srgbClr val="14201B"/>
-                          </a:solidFill>
-                          <a:latin typeface="Calibri" pitchFamily="34" charset="0"/>
-                          <a:ea typeface="Calibri" pitchFamily="34" charset="-122"/>
-                          <a:cs typeface="Calibri" pitchFamily="34" charset="-120"/>
-                        </a:rPr>
-                        <a:t>No lead cause — the check that would separate them</a:t>
-                      </a:r>
-                      <a:endParaRPr lang="en-US" sz="1350" dirty="0">
-                        <a:latin typeface="Calibri" charset="0"/>
-                        <a:ea typeface="Calibri" charset="0"/>
-                        <a:cs typeface="Calibri" charset="0"/>
-                      </a:endParaRPr>
-                    </a:p>
-                  </a:txBody>
-                  <a:tcPr marL="109728" marR="109728" marT="73152" marB="73152" anchor="ctr">
-                    <a:lnL w="9525" cap="flat" cmpd="sng" algn="ctr">
-                      <a:solidFill>
-                        <a:srgbClr val="D7E3DC"/>
-                      </a:solidFill>
-                      <a:prstDash val="solid"/>
-                      <a:round/>
-                      <a:headEnd type="none" w="med" len="med"/>
-                      <a:tailEnd type="none" w="med" len="med"/>
-                    </a:lnL>
-                    <a:lnR w="9525" cap="flat" cmpd="sng" algn="ctr">
-                      <a:solidFill>
-                        <a:srgbClr val="D7E3DC"/>
-                      </a:solidFill>
-                      <a:prstDash val="solid"/>
-                      <a:round/>
-                      <a:headEnd type="none" w="med" len="med"/>
-                      <a:tailEnd type="none" w="med" len="med"/>
-                    </a:lnR>
-                    <a:lnT w="9525" cap="flat" cmpd="sng" algn="ctr">
-                      <a:solidFill>
-                        <a:srgbClr val="D7E3DC"/>
-                      </a:solidFill>
-                      <a:prstDash val="solid"/>
-                      <a:round/>
-                      <a:headEnd type="none" w="med" len="med"/>
-                      <a:tailEnd type="none" w="med" len="med"/>
-                    </a:lnT>
-                    <a:lnB w="9525" cap="flat" cmpd="sng" algn="ctr">
-                      <a:solidFill>
-                        <a:srgbClr val="D7E3DC"/>
-                      </a:solidFill>
-                      <a:prstDash val="solid"/>
-                      <a:round/>
-                      <a:headEnd type="none" w="med" len="med"/>
-                      <a:tailEnd type="none" w="med" len="med"/>
-                    </a:lnB>
-                    <a:solidFill>
-                      <a:srgbClr val="FFFFFF"/>
-                    </a:solidFill>
-                  </a:tcPr>
-                </a:tc>
-              </a:tr>
-            </a:tbl>
-          </a:graphicData>
-        </a:graphic>
-      </p:graphicFrame>
-      <p:sp>
-        <p:nvSpPr>
-          <p:cNvPr id="5" name="Text 2"/>
-          <p:cNvSpPr txBox="1"/>
-          <p:nvPr/>
-        </p:nvSpPr>
-        <p:spPr>
-          <a:xfrm>
-            <a:off x="548640" y="4983480"/>
-            <a:ext cx="11094415" cy="1188720"/>
+      <p:sp>
+        <p:nvSpPr>
+          <p:cNvPr id="4" name="Shape 2"/>
+          <p:cNvSpPr/>
+          <p:nvPr/>
+        </p:nvSpPr>
+        <p:spPr>
+          <a:xfrm>
+            <a:off x="548640" y="1600200"/>
+            <a:ext cx="11094415" cy="566928"/>
+          </a:xfrm>
+          <a:prstGeom prst="roundRect">
+            <a:avLst>
+              <a:gd name="adj" fmla="val 16129"/>
+            </a:avLst>
+          </a:prstGeom>
+          <a:solidFill>
+            <a:srgbClr val="EEF5F1"/>
+          </a:solidFill>
+          <a:ln w="12700">
+            <a:solidFill>
+              <a:srgbClr val="EEF5F1"/>
+            </a:solidFill>
+            <a:prstDash val="solid"/>
+          </a:ln>
+        </p:spPr>
+      </p:sp>
+      <p:sp>
+        <p:nvSpPr>
+          <p:cNvPr id="5" name="Shape 3"/>
+          <p:cNvSpPr/>
+          <p:nvPr/>
+        </p:nvSpPr>
+        <p:spPr>
+          <a:xfrm>
+            <a:off x="749808" y="1673352"/>
+            <a:ext cx="420624" cy="420624"/>
+          </a:xfrm>
+          <a:prstGeom prst="ellipse">
+            <a:avLst/>
+          </a:prstGeom>
+          <a:solidFill>
+            <a:srgbClr val="1F7A4D"/>
+          </a:solidFill>
+          <a:ln w="12700">
+            <a:solidFill>
+              <a:srgbClr val="1F7A4D"/>
+            </a:solidFill>
+            <a:prstDash val="solid"/>
+          </a:ln>
+        </p:spPr>
+      </p:sp>
+      <p:pic>
+        <p:nvPicPr>
+          <p:cNvPr id="6" name="Image 0" descr="preencoded.png">    </p:cNvPr>
+          <p:cNvPicPr>
+            <a:picLocks noChangeAspect="1"/>
+          </p:cNvPicPr>
+          <p:nvPr/>
+        </p:nvPicPr>
+        <p:blipFill>
+          <a:blip r:embed="rId1"/>
+          <a:stretch>
+            <a:fillRect/>
+          </a:stretch>
+        </p:blipFill>
+        <p:spPr>
+          <a:xfrm>
+            <a:off x="846552" y="1770096"/>
+            <a:ext cx="227137" cy="227137"/>
+          </a:xfrm>
+          <a:prstGeom prst="rect">
+            <a:avLst/>
+          </a:prstGeom>
+        </p:spPr>
+      </p:pic>
+      <p:sp>
+        <p:nvSpPr>
+          <p:cNvPr id="7" name="Text 4"/>
+          <p:cNvSpPr txBox="1"/>
+          <p:nvPr/>
+        </p:nvSpPr>
+        <p:spPr>
+          <a:xfrm>
+            <a:off x="1371600" y="1600200"/>
+            <a:ext cx="8991295" cy="566928"/>
+          </a:xfrm>
+          <a:prstGeom prst="rect">
+            <a:avLst/>
+          </a:prstGeom>
+          <a:noFill/>
+          <a:ln/>
+        </p:spPr>
+        <p:txBody>
+          <a:bodyPr wrap="square" lIns="0" tIns="0" rIns="0" bIns="0" rtlCol="0" anchor="ctr"/>
+          <a:lstStyle/>
+          <a:p>
+            <a:pPr indent="0" marL="0">
+              <a:buNone/>
+            </a:pPr>
+            <a:r>
+              <a:rPr lang="en-US" sz="1400" b="1" dirty="0">
+                <a:solidFill>
+                  <a:srgbClr val="14201B"/>
+                </a:solidFill>
+                <a:latin typeface="Calibri" pitchFamily="34" charset="0"/>
+                <a:ea typeface="Calibri" pitchFamily="34" charset="-122"/>
+                <a:cs typeface="Calibri" pitchFamily="34" charset="-120"/>
+              </a:rPr>
+              <a:t>First: did a check on the machine confirm the top cause? </a:t>
+            </a:r>
+            <a:pPr indent="0" marL="0">
+              <a:buNone/>
+            </a:pPr>
+            <a:r>
+              <a:rPr lang="en-US" sz="1400" dirty="0">
+                <a:solidFill>
+                  <a:srgbClr val="4A5751"/>
+                </a:solidFill>
+                <a:latin typeface="Calibri" pitchFamily="34" charset="0"/>
+                <a:ea typeface="Calibri" pitchFamily="34" charset="-122"/>
+                <a:cs typeface="Calibri" pitchFamily="34" charset="-120"/>
+              </a:rPr>
+              <a:t>Then it's T1, whatever the brains or gates say.</a:t>
+            </a:r>
+            <a:endParaRPr lang="en-US" sz="1400" dirty="0"/>
+          </a:p>
+        </p:txBody>
+      </p:sp>
+      <p:sp>
+        <p:nvSpPr>
+          <p:cNvPr id="8" name="Shape 5"/>
+          <p:cNvSpPr/>
+          <p:nvPr/>
+        </p:nvSpPr>
+        <p:spPr>
+          <a:xfrm>
+            <a:off x="10545775" y="1700784"/>
+            <a:ext cx="868680" cy="365760"/>
+          </a:xfrm>
+          <a:prstGeom prst="roundRect">
+            <a:avLst>
+              <a:gd name="adj" fmla="val 50000"/>
+            </a:avLst>
+          </a:prstGeom>
+          <a:solidFill>
+            <a:srgbClr val="1F7A4D"/>
+          </a:solidFill>
+          <a:ln w="12700">
+            <a:solidFill>
+              <a:srgbClr val="1F7A4D"/>
+            </a:solidFill>
+            <a:prstDash val="solid"/>
+          </a:ln>
+        </p:spPr>
+      </p:sp>
+      <p:sp>
+        <p:nvSpPr>
+          <p:cNvPr id="9" name="Text 6"/>
+          <p:cNvSpPr txBox="1"/>
+          <p:nvPr/>
+        </p:nvSpPr>
+        <p:spPr>
+          <a:xfrm>
+            <a:off x="10545775" y="1700784"/>
+            <a:ext cx="868680" cy="365760"/>
+          </a:xfrm>
+          <a:prstGeom prst="rect">
+            <a:avLst/>
+          </a:prstGeom>
+          <a:noFill/>
+          <a:ln/>
+        </p:spPr>
+        <p:txBody>
+          <a:bodyPr wrap="square" lIns="0" tIns="0" rIns="0" bIns="0" rtlCol="0" anchor="ctr"/>
+          <a:lstStyle/>
+          <a:p>
+            <a:pPr algn="ctr" indent="0" marL="0">
+              <a:buNone/>
+            </a:pPr>
+            <a:r>
+              <a:rPr lang="en-US" sz="1400" b="1" dirty="0">
+                <a:solidFill>
+                  <a:srgbClr val="FFFFFF"/>
+                </a:solidFill>
+                <a:latin typeface="Calibri" pitchFamily="34" charset="0"/>
+                <a:ea typeface="Calibri" pitchFamily="34" charset="-122"/>
+                <a:cs typeface="Calibri" pitchFamily="34" charset="-120"/>
+              </a:rPr>
+              <a:t>→ T1</a:t>
+            </a:r>
+            <a:endParaRPr lang="en-US" sz="1400" dirty="0"/>
+          </a:p>
+        </p:txBody>
+      </p:sp>
+      <p:sp>
+        <p:nvSpPr>
+          <p:cNvPr id="10" name="Text 7"/>
+          <p:cNvSpPr txBox="1"/>
+          <p:nvPr/>
+        </p:nvSpPr>
+        <p:spPr>
+          <a:xfrm>
+            <a:off x="2788920" y="2286000"/>
+            <a:ext cx="4358488" cy="548640"/>
+          </a:xfrm>
+          <a:prstGeom prst="rect">
+            <a:avLst/>
+          </a:prstGeom>
+          <a:noFill/>
+          <a:ln/>
+        </p:spPr>
+        <p:txBody>
+          <a:bodyPr wrap="square" lIns="0" tIns="0" rIns="0" bIns="0" rtlCol="0" anchor="b"/>
+          <a:lstStyle/>
+          <a:p>
+            <a:pPr algn="ctr" indent="0" marL="0">
+              <a:buNone/>
+            </a:pPr>
+            <a:r>
+              <a:rPr lang="en-US" sz="1500" b="1" dirty="0">
+                <a:solidFill>
+                  <a:srgbClr val="14201B"/>
+                </a:solidFill>
+                <a:latin typeface="Calibri" pitchFamily="34" charset="0"/>
+                <a:ea typeface="Calibri" pitchFamily="34" charset="-122"/>
+                <a:cs typeface="Calibri" pitchFamily="34" charset="-120"/>
+              </a:rPr>
+              <a:t>Measured pattern beats chance</a:t>
+            </a:r>
+            <a:endParaRPr lang="en-US" sz="1500" dirty="0"/>
+          </a:p>
+          <a:p>
+            <a:pPr algn="ctr" indent="0" marL="0">
+              <a:buNone/>
+            </a:pPr>
+            <a:r>
+              <a:rPr lang="en-US" sz="1150" dirty="0">
+                <a:solidFill>
+                  <a:srgbClr val="7B8781"/>
+                </a:solidFill>
+                <a:latin typeface="Calibri" pitchFamily="34" charset="0"/>
+                <a:ea typeface="Calibri" pitchFamily="34" charset="-122"/>
+                <a:cs typeface="Calibri" pitchFamily="34" charset="-120"/>
+              </a:rPr>
+              <a:t>Gate A · small-then-big pattern, p &lt; 0.05</a:t>
+            </a:r>
+            <a:endParaRPr lang="en-US" sz="1500" dirty="0"/>
+          </a:p>
+        </p:txBody>
+      </p:sp>
+      <p:sp>
+        <p:nvSpPr>
+          <p:cNvPr id="11" name="Text 8"/>
+          <p:cNvSpPr txBox="1"/>
+          <p:nvPr/>
+        </p:nvSpPr>
+        <p:spPr>
+          <a:xfrm>
+            <a:off x="7284568" y="2286000"/>
+            <a:ext cx="4358488" cy="548640"/>
+          </a:xfrm>
+          <a:prstGeom prst="rect">
+            <a:avLst/>
+          </a:prstGeom>
+          <a:noFill/>
+          <a:ln/>
+        </p:spPr>
+        <p:txBody>
+          <a:bodyPr wrap="square" lIns="0" tIns="0" rIns="0" bIns="0" rtlCol="0" anchor="b"/>
+          <a:lstStyle/>
+          <a:p>
+            <a:pPr algn="ctr" indent="0" marL="0">
+              <a:buNone/>
+            </a:pPr>
+            <a:r>
+              <a:rPr lang="en-US" sz="1500" b="1" dirty="0">
+                <a:solidFill>
+                  <a:srgbClr val="14201B"/>
+                </a:solidFill>
+                <a:latin typeface="Calibri" pitchFamily="34" charset="0"/>
+                <a:ea typeface="Calibri" pitchFamily="34" charset="-122"/>
+                <a:cs typeface="Calibri" pitchFamily="34" charset="-120"/>
+              </a:rPr>
+              <a:t>Nothing measured decides</a:t>
+            </a:r>
+            <a:endParaRPr lang="en-US" sz="1500" dirty="0"/>
+          </a:p>
+          <a:p>
+            <a:pPr algn="ctr" indent="0" marL="0">
+              <a:buNone/>
+            </a:pPr>
+            <a:r>
+              <a:rPr lang="en-US" sz="1150" dirty="0">
+                <a:solidFill>
+                  <a:srgbClr val="7B8781"/>
+                </a:solidFill>
+                <a:latin typeface="Calibri" pitchFamily="34" charset="0"/>
+                <a:ea typeface="Calibri" pitchFamily="34" charset="-122"/>
+                <a:cs typeface="Calibri" pitchFamily="34" charset="-120"/>
+              </a:rPr>
+              <a:t>a size spread alone is shared by several causes</a:t>
+            </a:r>
+            <a:endParaRPr lang="en-US" sz="1500" dirty="0"/>
+          </a:p>
+        </p:txBody>
+      </p:sp>
+      <p:sp>
+        <p:nvSpPr>
+          <p:cNvPr id="12" name="Text 9"/>
+          <p:cNvSpPr txBox="1"/>
+          <p:nvPr/>
+        </p:nvSpPr>
+        <p:spPr>
+          <a:xfrm>
+            <a:off x="548640" y="2926080"/>
+            <a:ext cx="2103120" cy="1463040"/>
+          </a:xfrm>
+          <a:prstGeom prst="rect">
+            <a:avLst/>
+          </a:prstGeom>
+          <a:noFill/>
+          <a:ln/>
+        </p:spPr>
+        <p:txBody>
+          <a:bodyPr wrap="square" lIns="0" tIns="0" rIns="0" bIns="0" rtlCol="0" anchor="ctr"/>
+          <a:lstStyle/>
+          <a:p>
+            <a:pPr indent="0" marL="0">
+              <a:buNone/>
+            </a:pPr>
+            <a:r>
+              <a:rPr lang="en-US" sz="1500" b="1" dirty="0">
+                <a:solidFill>
+                  <a:srgbClr val="14201B"/>
+                </a:solidFill>
+                <a:latin typeface="Calibri" pitchFamily="34" charset="0"/>
+                <a:ea typeface="Calibri" pitchFamily="34" charset="-122"/>
+                <a:cs typeface="Calibri" pitchFamily="34" charset="-120"/>
+              </a:rPr>
+              <a:t>Brain 2: no objection</a:t>
+            </a:r>
+            <a:endParaRPr lang="en-US" sz="1500" dirty="0"/>
+          </a:p>
+          <a:p>
+            <a:pPr indent="0" marL="0">
+              <a:buNone/>
+            </a:pPr>
+            <a:r>
+              <a:rPr lang="en-US" sz="1150" dirty="0">
+                <a:solidFill>
+                  <a:srgbClr val="7B8781"/>
+                </a:solidFill>
+                <a:latin typeface="Calibri" pitchFamily="34" charset="0"/>
+                <a:ea typeface="Calibri" pitchFamily="34" charset="-122"/>
+                <a:cs typeface="Calibri" pitchFamily="34" charset="-120"/>
+              </a:rPr>
+              <a:t>agrees, isn't sure,</a:t>
+            </a:r>
+            <a:endParaRPr lang="en-US" sz="1500" dirty="0"/>
+          </a:p>
+          <a:p>
+            <a:pPr indent="0" marL="0">
+              <a:buNone/>
+            </a:pPr>
+            <a:r>
+              <a:rPr lang="en-US" sz="1150" dirty="0">
+                <a:solidFill>
+                  <a:srgbClr val="7B8781"/>
+                </a:solidFill>
+                <a:latin typeface="Calibri" pitchFamily="34" charset="0"/>
+                <a:ea typeface="Calibri" pitchFamily="34" charset="-122"/>
+                <a:cs typeface="Calibri" pitchFamily="34" charset="-120"/>
+              </a:rPr>
+              <a:t>or has no LLM key</a:t>
+            </a:r>
+            <a:endParaRPr lang="en-US" sz="1500" dirty="0"/>
+          </a:p>
+        </p:txBody>
+      </p:sp>
+      <p:sp>
+        <p:nvSpPr>
+          <p:cNvPr id="13" name="Shape 10"/>
+          <p:cNvSpPr/>
+          <p:nvPr/>
+        </p:nvSpPr>
+        <p:spPr>
+          <a:xfrm>
+            <a:off x="2788920" y="2926080"/>
+            <a:ext cx="4358488" cy="1463040"/>
+          </a:xfrm>
+          <a:prstGeom prst="roundRect">
+            <a:avLst>
+              <a:gd name="adj" fmla="val 6250"/>
+            </a:avLst>
+          </a:prstGeom>
+          <a:solidFill>
+            <a:srgbClr val="E4F1E9"/>
+          </a:solidFill>
+          <a:ln w="12700">
+            <a:solidFill>
+              <a:srgbClr val="E4F1E9"/>
+            </a:solidFill>
+            <a:prstDash val="solid"/>
+          </a:ln>
+        </p:spPr>
+      </p:sp>
+      <p:sp>
+        <p:nvSpPr>
+          <p:cNvPr id="14" name="Shape 11"/>
+          <p:cNvSpPr/>
+          <p:nvPr/>
+        </p:nvSpPr>
+        <p:spPr>
+          <a:xfrm>
+            <a:off x="3017520" y="3108960"/>
+            <a:ext cx="658368" cy="384048"/>
+          </a:xfrm>
+          <a:prstGeom prst="roundRect">
+            <a:avLst>
+              <a:gd name="adj" fmla="val 50000"/>
+            </a:avLst>
+          </a:prstGeom>
+          <a:solidFill>
+            <a:srgbClr val="1F7A4D"/>
+          </a:solidFill>
+          <a:ln w="12700">
+            <a:solidFill>
+              <a:srgbClr val="1F7A4D"/>
+            </a:solidFill>
+            <a:prstDash val="solid"/>
+          </a:ln>
+        </p:spPr>
+      </p:sp>
+      <p:sp>
+        <p:nvSpPr>
+          <p:cNvPr id="15" name="Text 12"/>
+          <p:cNvSpPr txBox="1"/>
+          <p:nvPr/>
+        </p:nvSpPr>
+        <p:spPr>
+          <a:xfrm>
+            <a:off x="3017520" y="3108960"/>
+            <a:ext cx="658368" cy="384048"/>
+          </a:xfrm>
+          <a:prstGeom prst="rect">
+            <a:avLst/>
+          </a:prstGeom>
+          <a:noFill/>
+          <a:ln/>
+        </p:spPr>
+        <p:txBody>
+          <a:bodyPr wrap="square" lIns="0" tIns="0" rIns="0" bIns="0" rtlCol="0" anchor="ctr"/>
+          <a:lstStyle/>
+          <a:p>
+            <a:pPr algn="ctr" indent="0" marL="0">
+              <a:buNone/>
+            </a:pPr>
+            <a:r>
+              <a:rPr lang="en-US" sz="1500" b="1" dirty="0">
+                <a:solidFill>
+                  <a:srgbClr val="FFFFFF"/>
+                </a:solidFill>
+                <a:latin typeface="Calibri" pitchFamily="34" charset="0"/>
+                <a:ea typeface="Calibri" pitchFamily="34" charset="-122"/>
+                <a:cs typeface="Calibri" pitchFamily="34" charset="-120"/>
+              </a:rPr>
+              <a:t>T1</a:t>
+            </a:r>
+            <a:endParaRPr lang="en-US" sz="1500" dirty="0"/>
+          </a:p>
+        </p:txBody>
+      </p:sp>
+      <p:sp>
+        <p:nvSpPr>
+          <p:cNvPr id="16" name="Text 13"/>
+          <p:cNvSpPr txBox="1"/>
+          <p:nvPr/>
+        </p:nvSpPr>
+        <p:spPr>
+          <a:xfrm>
+            <a:off x="3813048" y="3108960"/>
+            <a:ext cx="3078328" cy="384048"/>
+          </a:xfrm>
+          <a:prstGeom prst="rect">
+            <a:avLst/>
+          </a:prstGeom>
+          <a:noFill/>
+          <a:ln/>
+        </p:spPr>
+        <p:txBody>
+          <a:bodyPr wrap="square" lIns="0" tIns="0" rIns="0" bIns="0" rtlCol="0" anchor="ctr"/>
+          <a:lstStyle/>
+          <a:p>
+            <a:pPr indent="0" marL="0">
+              <a:buNone/>
+            </a:pPr>
+            <a:r>
+              <a:rPr lang="en-US" sz="1800" b="1" dirty="0">
+                <a:solidFill>
+                  <a:srgbClr val="14201B"/>
+                </a:solidFill>
+                <a:latin typeface="Calibri" pitchFamily="34" charset="0"/>
+                <a:ea typeface="Calibri" pitchFamily="34" charset="-122"/>
+                <a:cs typeface="Calibri" pitchFamily="34" charset="-120"/>
+              </a:rPr>
+              <a:t>Strong</a:t>
+            </a:r>
+            <a:endParaRPr lang="en-US" sz="1800" dirty="0"/>
+          </a:p>
+        </p:txBody>
+      </p:sp>
+      <p:sp>
+        <p:nvSpPr>
+          <p:cNvPr id="17" name="Text 14"/>
+          <p:cNvSpPr txBox="1"/>
+          <p:nvPr/>
+        </p:nvSpPr>
+        <p:spPr>
+          <a:xfrm>
+            <a:off x="3017520" y="3602736"/>
+            <a:ext cx="3901288" cy="676656"/>
           </a:xfrm>
           <a:prstGeom prst="rect">
             <a:avLst/>
@@ -5758,12 +5387,12 @@
           <a:p>
             <a:pPr indent="0" marL="0">
               <a:spcAft>
-                <a:spcPts val="600"/>
+                <a:spcPts val="400"/>
               </a:spcAft>
               <a:buNone/>
             </a:pPr>
             <a:r>
-              <a:rPr lang="en-US" sz="1400" b="1" dirty="0">
+              <a:rPr lang="en-US" sz="1300" dirty="0">
                 <a:solidFill>
                   <a:srgbClr val="4A5751"/>
                 </a:solidFill>
@@ -5771,16 +5400,36 @@
                 <a:ea typeface="Calibri" pitchFamily="34" charset="-122"/>
                 <a:cs typeface="Calibri" pitchFamily="34" charset="-120"/>
               </a:rPr>
-              <a:t>Gate A — chance. </a:t>
-            </a:r>
+              <a:t>Plus 3+ matching confirmed cases, none disagreeing (Gate B). Otherwise T2.</a:t>
+            </a:r>
+            <a:endParaRPr lang="en-US" sz="1300" dirty="0"/>
+          </a:p>
+          <a:p>
             <a:pPr indent="0" marL="0">
               <a:spcAft>
-                <a:spcPts val="600"/>
+                <a:spcPts val="400"/>
               </a:spcAft>
               <a:buNone/>
             </a:pPr>
             <a:r>
-              <a:rPr lang="en-US" sz="1400" dirty="0">
+              <a:rPr lang="en-US" sz="1300" b="1" dirty="0">
+                <a:solidFill>
+                  <a:srgbClr val="14201B"/>
+                </a:solidFill>
+                <a:latin typeface="Calibri" pitchFamily="34" charset="0"/>
+                <a:ea typeface="Calibri" pitchFamily="34" charset="-122"/>
+                <a:cs typeface="Calibri" pitchFamily="34" charset="-120"/>
+              </a:rPr>
+              <a:t>Shows: </a:t>
+            </a:r>
+            <a:pPr indent="0" marL="0">
+              <a:spcAft>
+                <a:spcPts val="400"/>
+              </a:spcAft>
+              <a:buNone/>
+            </a:pPr>
+            <a:r>
+              <a:rPr lang="en-US" sz="1300" dirty="0">
                 <a:solidFill>
                   <a:srgbClr val="4A5751"/>
                 </a:solidFill>
@@ -5788,19 +5437,173 @@
                 <a:ea typeface="Calibri" pitchFamily="34" charset="-122"/>
                 <a:cs typeface="Calibri" pitchFamily="34" charset="-120"/>
               </a:rPr>
-              <a:t>Only a signal that separates causes counts: the dispense-order pattern (binomial test, p &lt; 0.05). A size spread is real but shared by several causes, so it can't decide.</a:t>
-            </a:r>
-            <a:endParaRPr lang="en-US" sz="1400" dirty="0"/>
-          </a:p>
+              <a:t>one lead cause, with its evidence</a:t>
+            </a:r>
+            <a:endParaRPr lang="en-US" sz="1300" dirty="0"/>
+          </a:p>
+        </p:txBody>
+      </p:sp>
+      <p:sp>
+        <p:nvSpPr>
+          <p:cNvPr id="18" name="Shape 15"/>
+          <p:cNvSpPr/>
+          <p:nvPr/>
+        </p:nvSpPr>
+        <p:spPr>
+          <a:xfrm>
+            <a:off x="7284568" y="2926080"/>
+            <a:ext cx="4358488" cy="1463040"/>
+          </a:xfrm>
+          <a:prstGeom prst="roundRect">
+            <a:avLst>
+              <a:gd name="adj" fmla="val 6250"/>
+            </a:avLst>
+          </a:prstGeom>
+          <a:solidFill>
+            <a:srgbClr val="FBF0D9"/>
+          </a:solidFill>
+          <a:ln w="12700">
+            <a:solidFill>
+              <a:srgbClr val="FBF0D9"/>
+            </a:solidFill>
+            <a:prstDash val="solid"/>
+          </a:ln>
+        </p:spPr>
+      </p:sp>
+      <p:sp>
+        <p:nvSpPr>
+          <p:cNvPr id="19" name="Shape 16"/>
+          <p:cNvSpPr/>
+          <p:nvPr/>
+        </p:nvSpPr>
+        <p:spPr>
+          <a:xfrm>
+            <a:off x="7513168" y="3108960"/>
+            <a:ext cx="658368" cy="384048"/>
+          </a:xfrm>
+          <a:prstGeom prst="roundRect">
+            <a:avLst>
+              <a:gd name="adj" fmla="val 50000"/>
+            </a:avLst>
+          </a:prstGeom>
+          <a:solidFill>
+            <a:srgbClr val="D08A00"/>
+          </a:solidFill>
+          <a:ln w="12700">
+            <a:solidFill>
+              <a:srgbClr val="D08A00"/>
+            </a:solidFill>
+            <a:prstDash val="solid"/>
+          </a:ln>
+        </p:spPr>
+      </p:sp>
+      <p:sp>
+        <p:nvSpPr>
+          <p:cNvPr id="20" name="Text 17"/>
+          <p:cNvSpPr txBox="1"/>
+          <p:nvPr/>
+        </p:nvSpPr>
+        <p:spPr>
+          <a:xfrm>
+            <a:off x="7513168" y="3108960"/>
+            <a:ext cx="658368" cy="384048"/>
+          </a:xfrm>
+          <a:prstGeom prst="rect">
+            <a:avLst/>
+          </a:prstGeom>
+          <a:noFill/>
+          <a:ln/>
+        </p:spPr>
+        <p:txBody>
+          <a:bodyPr wrap="square" lIns="0" tIns="0" rIns="0" bIns="0" rtlCol="0" anchor="ctr"/>
+          <a:lstStyle/>
+          <a:p>
+            <a:pPr algn="ctr" indent="0" marL="0">
+              <a:buNone/>
+            </a:pPr>
+            <a:r>
+              <a:rPr lang="en-US" sz="1500" b="1" dirty="0">
+                <a:solidFill>
+                  <a:srgbClr val="FFFFFF"/>
+                </a:solidFill>
+                <a:latin typeface="Calibri" pitchFamily="34" charset="0"/>
+                <a:ea typeface="Calibri" pitchFamily="34" charset="-122"/>
+                <a:cs typeface="Calibri" pitchFamily="34" charset="-120"/>
+              </a:rPr>
+              <a:t>T2</a:t>
+            </a:r>
+            <a:endParaRPr lang="en-US" sz="1500" dirty="0"/>
+          </a:p>
+        </p:txBody>
+      </p:sp>
+      <p:sp>
+        <p:nvSpPr>
+          <p:cNvPr id="21" name="Text 18"/>
+          <p:cNvSpPr txBox="1"/>
+          <p:nvPr/>
+        </p:nvSpPr>
+        <p:spPr>
+          <a:xfrm>
+            <a:off x="8308696" y="3108960"/>
+            <a:ext cx="3078328" cy="384048"/>
+          </a:xfrm>
+          <a:prstGeom prst="rect">
+            <a:avLst/>
+          </a:prstGeom>
+          <a:noFill/>
+          <a:ln/>
+        </p:spPr>
+        <p:txBody>
+          <a:bodyPr wrap="square" lIns="0" tIns="0" rIns="0" bIns="0" rtlCol="0" anchor="ctr"/>
+          <a:lstStyle/>
+          <a:p>
+            <a:pPr indent="0" marL="0">
+              <a:buNone/>
+            </a:pPr>
+            <a:r>
+              <a:rPr lang="en-US" sz="1800" b="1" dirty="0">
+                <a:solidFill>
+                  <a:srgbClr val="14201B"/>
+                </a:solidFill>
+                <a:latin typeface="Calibri" pitchFamily="34" charset="0"/>
+                <a:ea typeface="Calibri" pitchFamily="34" charset="-122"/>
+                <a:cs typeface="Calibri" pitchFamily="34" charset="-120"/>
+              </a:rPr>
+              <a:t>Provisional</a:t>
+            </a:r>
+            <a:endParaRPr lang="en-US" sz="1800" dirty="0"/>
+          </a:p>
+        </p:txBody>
+      </p:sp>
+      <p:sp>
+        <p:nvSpPr>
+          <p:cNvPr id="22" name="Text 19"/>
+          <p:cNvSpPr txBox="1"/>
+          <p:nvPr/>
+        </p:nvSpPr>
+        <p:spPr>
+          <a:xfrm>
+            <a:off x="7513168" y="3602736"/>
+            <a:ext cx="3901288" cy="676656"/>
+          </a:xfrm>
+          <a:prstGeom prst="rect">
+            <a:avLst/>
+          </a:prstGeom>
+          <a:noFill/>
+          <a:ln/>
+        </p:spPr>
+        <p:txBody>
+          <a:bodyPr wrap="square" lIns="0" tIns="0" rIns="0" bIns="0" rtlCol="0" anchor="t"/>
+          <a:lstStyle/>
           <a:p>
             <a:pPr indent="0" marL="0">
               <a:spcAft>
-                <a:spcPts val="600"/>
+                <a:spcPts val="400"/>
               </a:spcAft>
               <a:buNone/>
             </a:pPr>
             <a:r>
-              <a:rPr lang="en-US" sz="1400" b="1" dirty="0">
+              <a:rPr lang="en-US" sz="1300" dirty="0">
                 <a:solidFill>
                   <a:srgbClr val="4A5751"/>
                 </a:solidFill>
@@ -5808,16 +5611,36 @@
                 <a:ea typeface="Calibri" pitchFamily="34" charset="-122"/>
                 <a:cs typeface="Calibri" pitchFamily="34" charset="-120"/>
               </a:rPr>
-              <a:t>Gate B — precedent. </a:t>
-            </a:r>
+              <a:t>No measurement singles the lead out.</a:t>
+            </a:r>
+            <a:endParaRPr lang="en-US" sz="1300" dirty="0"/>
+          </a:p>
+          <a:p>
             <a:pPr indent="0" marL="0">
               <a:spcAft>
-                <a:spcPts val="600"/>
+                <a:spcPts val="400"/>
               </a:spcAft>
               <a:buNone/>
             </a:pPr>
             <a:r>
-              <a:rPr lang="en-US" sz="1400" dirty="0">
+              <a:rPr lang="en-US" sz="1300" b="1" dirty="0">
+                <a:solidFill>
+                  <a:srgbClr val="14201B"/>
+                </a:solidFill>
+                <a:latin typeface="Calibri" pitchFamily="34" charset="0"/>
+                <a:ea typeface="Calibri" pitchFamily="34" charset="-122"/>
+                <a:cs typeface="Calibri" pitchFamily="34" charset="-120"/>
+              </a:rPr>
+              <a:t>Shows: </a:t>
+            </a:r>
+            <a:pPr indent="0" marL="0">
+              <a:spcAft>
+                <a:spcPts val="400"/>
+              </a:spcAft>
+              <a:buNone/>
+            </a:pPr>
+            <a:r>
+              <a:rPr lang="en-US" sz="1300" dirty="0">
                 <a:solidFill>
                   <a:srgbClr val="4A5751"/>
                 </a:solidFill>
@@ -5825,9 +5648,540 @@
                 <a:ea typeface="Calibri" pitchFamily="34" charset="-122"/>
                 <a:cs typeface="Calibri" pitchFamily="34" charset="-120"/>
               </a:rPr>
-              <a:t>Similar confirmed cases (same material and dispenser, signals within one spread) can demote the lead by up to 0.4 log-odds — never promote it.</a:t>
-            </a:r>
-            <a:endParaRPr lang="en-US" sz="1400" dirty="0"/>
+              <a:t>the lead, marked provisional, and the check to confirm it</a:t>
+            </a:r>
+            <a:endParaRPr lang="en-US" sz="1300" dirty="0"/>
+          </a:p>
+        </p:txBody>
+      </p:sp>
+      <p:sp>
+        <p:nvSpPr>
+          <p:cNvPr id="23" name="Text 20"/>
+          <p:cNvSpPr txBox="1"/>
+          <p:nvPr/>
+        </p:nvSpPr>
+        <p:spPr>
+          <a:xfrm>
+            <a:off x="548640" y="4526280"/>
+            <a:ext cx="2103120" cy="1463040"/>
+          </a:xfrm>
+          <a:prstGeom prst="rect">
+            <a:avLst/>
+          </a:prstGeom>
+          <a:noFill/>
+          <a:ln/>
+        </p:spPr>
+        <p:txBody>
+          <a:bodyPr wrap="square" lIns="0" tIns="0" rIns="0" bIns="0" rtlCol="0" anchor="ctr"/>
+          <a:lstStyle/>
+          <a:p>
+            <a:pPr indent="0" marL="0">
+              <a:buNone/>
+            </a:pPr>
+            <a:r>
+              <a:rPr lang="en-US" sz="1500" b="1" dirty="0">
+                <a:solidFill>
+                  <a:srgbClr val="14201B"/>
+                </a:solidFill>
+                <a:latin typeface="Calibri" pitchFamily="34" charset="0"/>
+                <a:ea typeface="Calibri" pitchFamily="34" charset="-122"/>
+                <a:cs typeface="Calibri" pitchFamily="34" charset="-120"/>
+              </a:rPr>
+              <a:t>Brain 2 objects</a:t>
+            </a:r>
+            <a:endParaRPr lang="en-US" sz="1500" dirty="0"/>
+          </a:p>
+          <a:p>
+            <a:pPr indent="0" marL="0">
+              <a:buNone/>
+            </a:pPr>
+            <a:r>
+              <a:rPr lang="en-US" sz="1150" dirty="0">
+                <a:solidFill>
+                  <a:srgbClr val="7B8781"/>
+                </a:solidFill>
+                <a:latin typeface="Calibri" pitchFamily="34" charset="0"/>
+                <a:ea typeface="Calibri" pitchFamily="34" charset="-122"/>
+                <a:cs typeface="Calibri" pitchFamily="34" charset="-120"/>
+              </a:rPr>
+              <a:t>a clear, different top pick</a:t>
+            </a:r>
+            <a:endParaRPr lang="en-US" sz="1500" dirty="0"/>
+          </a:p>
+        </p:txBody>
+      </p:sp>
+      <p:sp>
+        <p:nvSpPr>
+          <p:cNvPr id="24" name="Shape 21"/>
+          <p:cNvSpPr/>
+          <p:nvPr/>
+        </p:nvSpPr>
+        <p:spPr>
+          <a:xfrm>
+            <a:off x="2788920" y="4526280"/>
+            <a:ext cx="4358488" cy="1463040"/>
+          </a:xfrm>
+          <a:prstGeom prst="roundRect">
+            <a:avLst>
+              <a:gd name="adj" fmla="val 6250"/>
+            </a:avLst>
+          </a:prstGeom>
+          <a:solidFill>
+            <a:srgbClr val="FCE8DC"/>
+          </a:solidFill>
+          <a:ln w="12700">
+            <a:solidFill>
+              <a:srgbClr val="FCE8DC"/>
+            </a:solidFill>
+            <a:prstDash val="solid"/>
+          </a:ln>
+        </p:spPr>
+      </p:sp>
+      <p:sp>
+        <p:nvSpPr>
+          <p:cNvPr id="25" name="Shape 22"/>
+          <p:cNvSpPr/>
+          <p:nvPr/>
+        </p:nvSpPr>
+        <p:spPr>
+          <a:xfrm>
+            <a:off x="3017520" y="4709160"/>
+            <a:ext cx="658368" cy="384048"/>
+          </a:xfrm>
+          <a:prstGeom prst="roundRect">
+            <a:avLst>
+              <a:gd name="adj" fmla="val 50000"/>
+            </a:avLst>
+          </a:prstGeom>
+          <a:solidFill>
+            <a:srgbClr val="E0662B"/>
+          </a:solidFill>
+          <a:ln w="12700">
+            <a:solidFill>
+              <a:srgbClr val="E0662B"/>
+            </a:solidFill>
+            <a:prstDash val="solid"/>
+          </a:ln>
+        </p:spPr>
+      </p:sp>
+      <p:sp>
+        <p:nvSpPr>
+          <p:cNvPr id="26" name="Text 23"/>
+          <p:cNvSpPr txBox="1"/>
+          <p:nvPr/>
+        </p:nvSpPr>
+        <p:spPr>
+          <a:xfrm>
+            <a:off x="3017520" y="4709160"/>
+            <a:ext cx="658368" cy="384048"/>
+          </a:xfrm>
+          <a:prstGeom prst="rect">
+            <a:avLst/>
+          </a:prstGeom>
+          <a:noFill/>
+          <a:ln/>
+        </p:spPr>
+        <p:txBody>
+          <a:bodyPr wrap="square" lIns="0" tIns="0" rIns="0" bIns="0" rtlCol="0" anchor="ctr"/>
+          <a:lstStyle/>
+          <a:p>
+            <a:pPr algn="ctr" indent="0" marL="0">
+              <a:buNone/>
+            </a:pPr>
+            <a:r>
+              <a:rPr lang="en-US" sz="1500" b="1" dirty="0">
+                <a:solidFill>
+                  <a:srgbClr val="FFFFFF"/>
+                </a:solidFill>
+                <a:latin typeface="Calibri" pitchFamily="34" charset="0"/>
+                <a:ea typeface="Calibri" pitchFamily="34" charset="-122"/>
+                <a:cs typeface="Calibri" pitchFamily="34" charset="-120"/>
+              </a:rPr>
+              <a:t>T3</a:t>
+            </a:r>
+            <a:endParaRPr lang="en-US" sz="1500" dirty="0"/>
+          </a:p>
+        </p:txBody>
+      </p:sp>
+      <p:sp>
+        <p:nvSpPr>
+          <p:cNvPr id="27" name="Text 24"/>
+          <p:cNvSpPr txBox="1"/>
+          <p:nvPr/>
+        </p:nvSpPr>
+        <p:spPr>
+          <a:xfrm>
+            <a:off x="3813048" y="4709160"/>
+            <a:ext cx="3078328" cy="384048"/>
+          </a:xfrm>
+          <a:prstGeom prst="rect">
+            <a:avLst/>
+          </a:prstGeom>
+          <a:noFill/>
+          <a:ln/>
+        </p:spPr>
+        <p:txBody>
+          <a:bodyPr wrap="square" lIns="0" tIns="0" rIns="0" bIns="0" rtlCol="0" anchor="ctr"/>
+          <a:lstStyle/>
+          <a:p>
+            <a:pPr indent="0" marL="0">
+              <a:buNone/>
+            </a:pPr>
+            <a:r>
+              <a:rPr lang="en-US" sz="1800" b="1" dirty="0">
+                <a:solidFill>
+                  <a:srgbClr val="14201B"/>
+                </a:solidFill>
+                <a:latin typeface="Calibri" pitchFamily="34" charset="0"/>
+                <a:ea typeface="Calibri" pitchFamily="34" charset="-122"/>
+                <a:cs typeface="Calibri" pitchFamily="34" charset="-120"/>
+              </a:rPr>
+              <a:t>Disagreement</a:t>
+            </a:r>
+            <a:endParaRPr lang="en-US" sz="1800" dirty="0"/>
+          </a:p>
+        </p:txBody>
+      </p:sp>
+      <p:sp>
+        <p:nvSpPr>
+          <p:cNvPr id="28" name="Text 25"/>
+          <p:cNvSpPr txBox="1"/>
+          <p:nvPr/>
+        </p:nvSpPr>
+        <p:spPr>
+          <a:xfrm>
+            <a:off x="3017520" y="5202936"/>
+            <a:ext cx="3901288" cy="676656"/>
+          </a:xfrm>
+          <a:prstGeom prst="rect">
+            <a:avLst/>
+          </a:prstGeom>
+          <a:noFill/>
+          <a:ln/>
+        </p:spPr>
+        <p:txBody>
+          <a:bodyPr wrap="square" lIns="0" tIns="0" rIns="0" bIns="0" rtlCol="0" anchor="t"/>
+          <a:lstStyle/>
+          <a:p>
+            <a:pPr indent="0" marL="0">
+              <a:spcAft>
+                <a:spcPts val="400"/>
+              </a:spcAft>
+              <a:buNone/>
+            </a:pPr>
+            <a:r>
+              <a:rPr lang="en-US" sz="1300" dirty="0">
+                <a:solidFill>
+                  <a:srgbClr val="4A5751"/>
+                </a:solidFill>
+                <a:latin typeface="Calibri" pitchFamily="34" charset="0"/>
+                <a:ea typeface="Calibri" pitchFamily="34" charset="-122"/>
+                <a:cs typeface="Calibri" pitchFamily="34" charset="-120"/>
+              </a:rPr>
+              <a:t>The measurement still backs Brain 1's cause.</a:t>
+            </a:r>
+            <a:endParaRPr lang="en-US" sz="1300" dirty="0"/>
+          </a:p>
+          <a:p>
+            <a:pPr indent="0" marL="0">
+              <a:spcAft>
+                <a:spcPts val="400"/>
+              </a:spcAft>
+              <a:buNone/>
+            </a:pPr>
+            <a:r>
+              <a:rPr lang="en-US" sz="1300" b="1" dirty="0">
+                <a:solidFill>
+                  <a:srgbClr val="14201B"/>
+                </a:solidFill>
+                <a:latin typeface="Calibri" pitchFamily="34" charset="0"/>
+                <a:ea typeface="Calibri" pitchFamily="34" charset="-122"/>
+                <a:cs typeface="Calibri" pitchFamily="34" charset="-120"/>
+              </a:rPr>
+              <a:t>Shows: </a:t>
+            </a:r>
+            <a:pPr indent="0" marL="0">
+              <a:spcAft>
+                <a:spcPts val="400"/>
+              </a:spcAft>
+              <a:buNone/>
+            </a:pPr>
+            <a:r>
+              <a:rPr lang="en-US" sz="1300" dirty="0">
+                <a:solidFill>
+                  <a:srgbClr val="4A5751"/>
+                </a:solidFill>
+                <a:latin typeface="Calibri" pitchFamily="34" charset="0"/>
+                <a:ea typeface="Calibri" pitchFamily="34" charset="-122"/>
+                <a:cs typeface="Calibri" pitchFamily="34" charset="-120"/>
+              </a:rPr>
+              <a:t>both candidates, Brain 1's on top</a:t>
+            </a:r>
+            <a:endParaRPr lang="en-US" sz="1300" dirty="0"/>
+          </a:p>
+        </p:txBody>
+      </p:sp>
+      <p:sp>
+        <p:nvSpPr>
+          <p:cNvPr id="29" name="Shape 26"/>
+          <p:cNvSpPr/>
+          <p:nvPr/>
+        </p:nvSpPr>
+        <p:spPr>
+          <a:xfrm>
+            <a:off x="7284568" y="4526280"/>
+            <a:ext cx="4358488" cy="1463040"/>
+          </a:xfrm>
+          <a:prstGeom prst="roundRect">
+            <a:avLst>
+              <a:gd name="adj" fmla="val 6250"/>
+            </a:avLst>
+          </a:prstGeom>
+          <a:solidFill>
+            <a:srgbClr val="FAE3E3"/>
+          </a:solidFill>
+          <a:ln w="12700">
+            <a:solidFill>
+              <a:srgbClr val="FAE3E3"/>
+            </a:solidFill>
+            <a:prstDash val="solid"/>
+          </a:ln>
+        </p:spPr>
+      </p:sp>
+      <p:sp>
+        <p:nvSpPr>
+          <p:cNvPr id="30" name="Shape 27"/>
+          <p:cNvSpPr/>
+          <p:nvPr/>
+        </p:nvSpPr>
+        <p:spPr>
+          <a:xfrm>
+            <a:off x="7513168" y="4709160"/>
+            <a:ext cx="658368" cy="384048"/>
+          </a:xfrm>
+          <a:prstGeom prst="roundRect">
+            <a:avLst>
+              <a:gd name="adj" fmla="val 50000"/>
+            </a:avLst>
+          </a:prstGeom>
+          <a:solidFill>
+            <a:srgbClr val="D03B3B"/>
+          </a:solidFill>
+          <a:ln w="12700">
+            <a:solidFill>
+              <a:srgbClr val="D03B3B"/>
+            </a:solidFill>
+            <a:prstDash val="solid"/>
+          </a:ln>
+        </p:spPr>
+      </p:sp>
+      <p:sp>
+        <p:nvSpPr>
+          <p:cNvPr id="31" name="Text 28"/>
+          <p:cNvSpPr txBox="1"/>
+          <p:nvPr/>
+        </p:nvSpPr>
+        <p:spPr>
+          <a:xfrm>
+            <a:off x="7513168" y="4709160"/>
+            <a:ext cx="658368" cy="384048"/>
+          </a:xfrm>
+          <a:prstGeom prst="rect">
+            <a:avLst/>
+          </a:prstGeom>
+          <a:noFill/>
+          <a:ln/>
+        </p:spPr>
+        <p:txBody>
+          <a:bodyPr wrap="square" lIns="0" tIns="0" rIns="0" bIns="0" rtlCol="0" anchor="ctr"/>
+          <a:lstStyle/>
+          <a:p>
+            <a:pPr algn="ctr" indent="0" marL="0">
+              <a:buNone/>
+            </a:pPr>
+            <a:r>
+              <a:rPr lang="en-US" sz="1500" b="1" dirty="0">
+                <a:solidFill>
+                  <a:srgbClr val="FFFFFF"/>
+                </a:solidFill>
+                <a:latin typeface="Calibri" pitchFamily="34" charset="0"/>
+                <a:ea typeface="Calibri" pitchFamily="34" charset="-122"/>
+                <a:cs typeface="Calibri" pitchFamily="34" charset="-120"/>
+              </a:rPr>
+              <a:t>T4</a:t>
+            </a:r>
+            <a:endParaRPr lang="en-US" sz="1500" dirty="0"/>
+          </a:p>
+        </p:txBody>
+      </p:sp>
+      <p:sp>
+        <p:nvSpPr>
+          <p:cNvPr id="32" name="Text 29"/>
+          <p:cNvSpPr txBox="1"/>
+          <p:nvPr/>
+        </p:nvSpPr>
+        <p:spPr>
+          <a:xfrm>
+            <a:off x="8308696" y="4709160"/>
+            <a:ext cx="3078328" cy="384048"/>
+          </a:xfrm>
+          <a:prstGeom prst="rect">
+            <a:avLst/>
+          </a:prstGeom>
+          <a:noFill/>
+          <a:ln/>
+        </p:spPr>
+        <p:txBody>
+          <a:bodyPr wrap="square" lIns="0" tIns="0" rIns="0" bIns="0" rtlCol="0" anchor="ctr"/>
+          <a:lstStyle/>
+          <a:p>
+            <a:pPr indent="0" marL="0">
+              <a:buNone/>
+            </a:pPr>
+            <a:r>
+              <a:rPr lang="en-US" sz="1800" b="1" dirty="0">
+                <a:solidFill>
+                  <a:srgbClr val="14201B"/>
+                </a:solidFill>
+                <a:latin typeface="Calibri" pitchFamily="34" charset="0"/>
+                <a:ea typeface="Calibri" pitchFamily="34" charset="-122"/>
+                <a:cs typeface="Calibri" pitchFamily="34" charset="-120"/>
+              </a:rPr>
+              <a:t>Don't force it</a:t>
+            </a:r>
+            <a:endParaRPr lang="en-US" sz="1800" dirty="0"/>
+          </a:p>
+        </p:txBody>
+      </p:sp>
+      <p:sp>
+        <p:nvSpPr>
+          <p:cNvPr id="33" name="Text 30"/>
+          <p:cNvSpPr txBox="1"/>
+          <p:nvPr/>
+        </p:nvSpPr>
+        <p:spPr>
+          <a:xfrm>
+            <a:off x="7513168" y="5202936"/>
+            <a:ext cx="3901288" cy="676656"/>
+          </a:xfrm>
+          <a:prstGeom prst="rect">
+            <a:avLst/>
+          </a:prstGeom>
+          <a:noFill/>
+          <a:ln/>
+        </p:spPr>
+        <p:txBody>
+          <a:bodyPr wrap="square" lIns="0" tIns="0" rIns="0" bIns="0" rtlCol="0" anchor="t"/>
+          <a:lstStyle/>
+          <a:p>
+            <a:pPr indent="0" marL="0">
+              <a:spcAft>
+                <a:spcPts val="400"/>
+              </a:spcAft>
+              <a:buNone/>
+            </a:pPr>
+            <a:r>
+              <a:rPr lang="en-US" sz="1300" dirty="0">
+                <a:solidFill>
+                  <a:srgbClr val="4A5751"/>
+                </a:solidFill>
+                <a:latin typeface="Calibri" pitchFamily="34" charset="0"/>
+                <a:ea typeface="Calibri" pitchFamily="34" charset="-122"/>
+                <a:cs typeface="Calibri" pitchFamily="34" charset="-120"/>
+              </a:rPr>
+              <a:t>Nothing measured separates the two causes.</a:t>
+            </a:r>
+            <a:endParaRPr lang="en-US" sz="1300" dirty="0"/>
+          </a:p>
+          <a:p>
+            <a:pPr indent="0" marL="0">
+              <a:spcAft>
+                <a:spcPts val="400"/>
+              </a:spcAft>
+              <a:buNone/>
+            </a:pPr>
+            <a:r>
+              <a:rPr lang="en-US" sz="1300" b="1" dirty="0">
+                <a:solidFill>
+                  <a:srgbClr val="14201B"/>
+                </a:solidFill>
+                <a:latin typeface="Calibri" pitchFamily="34" charset="0"/>
+                <a:ea typeface="Calibri" pitchFamily="34" charset="-122"/>
+                <a:cs typeface="Calibri" pitchFamily="34" charset="-120"/>
+              </a:rPr>
+              <a:t>Shows: </a:t>
+            </a:r>
+            <a:pPr indent="0" marL="0">
+              <a:spcAft>
+                <a:spcPts val="400"/>
+              </a:spcAft>
+              <a:buNone/>
+            </a:pPr>
+            <a:r>
+              <a:rPr lang="en-US" sz="1300" dirty="0">
+                <a:solidFill>
+                  <a:srgbClr val="4A5751"/>
+                </a:solidFill>
+                <a:latin typeface="Calibri" pitchFamily="34" charset="0"/>
+                <a:ea typeface="Calibri" pitchFamily="34" charset="-122"/>
+                <a:cs typeface="Calibri" pitchFamily="34" charset="-120"/>
+              </a:rPr>
+              <a:t>no lead cause, just the check that settles it</a:t>
+            </a:r>
+            <a:endParaRPr lang="en-US" sz="1300" dirty="0"/>
+          </a:p>
+        </p:txBody>
+      </p:sp>
+      <p:sp>
+        <p:nvSpPr>
+          <p:cNvPr id="34" name="Text 31"/>
+          <p:cNvSpPr txBox="1"/>
+          <p:nvPr/>
+        </p:nvSpPr>
+        <p:spPr>
+          <a:xfrm>
+            <a:off x="548640" y="6117336"/>
+            <a:ext cx="11094415" cy="411480"/>
+          </a:xfrm>
+          <a:prstGeom prst="rect">
+            <a:avLst/>
+          </a:prstGeom>
+          <a:noFill/>
+          <a:ln/>
+        </p:spPr>
+        <p:txBody>
+          <a:bodyPr wrap="square" lIns="0" tIns="0" rIns="0" bIns="0" rtlCol="0" anchor="t"/>
+          <a:lstStyle/>
+          <a:p>
+            <a:pPr indent="0" marL="0">
+              <a:buNone/>
+            </a:pPr>
+            <a:r>
+              <a:rPr lang="en-US" sz="1350" b="1" dirty="0">
+                <a:solidFill>
+                  <a:srgbClr val="1F7A4D"/>
+                </a:solidFill>
+                <a:latin typeface="Calibri" pitchFamily="34" charset="0"/>
+                <a:ea typeface="Calibri" pitchFamily="34" charset="-122"/>
+                <a:cs typeface="Calibri" pitchFamily="34" charset="-120"/>
+              </a:rPr>
+              <a:t>Every tier says why on screen: </a:t>
+            </a:r>
+            <a:pPr indent="0" marL="0">
+              <a:buNone/>
+            </a:pPr>
+            <a:r>
+              <a:rPr lang="en-US" sz="1350" i="1" dirty="0">
+                <a:solidFill>
+                  <a:srgbClr val="1F7A4D"/>
+                </a:solidFill>
+                <a:latin typeface="Calibri" pitchFamily="34" charset="0"/>
+                <a:ea typeface="Calibri" pitchFamily="34" charset="-122"/>
+                <a:cs typeface="Calibri" pitchFamily="34" charset="-120"/>
+              </a:rPr>
+              <a:t>“Provisional: fewer than 3 matching confirmed cases back it. A check that confirms it would settle it.”</a:t>
+            </a:r>
+            <a:endParaRPr lang="en-US" sz="1350" dirty="0"/>
           </a:p>
         </p:txBody>
       </p:sp>
@@ -7297,6 +7651,3049 @@
               <a:t>Predict: open a case automatically when a line's size spread starts drifting</a:t>
             </a:r>
             <a:endParaRPr lang="en-US" sz="1500" dirty="0"/>
+          </a:p>
+        </p:txBody>
+      </p:sp>
+    </p:spTree>
+  </p:cSld>
+  <p:clrMapOvr>
+    <a:masterClrMapping/>
+  </p:clrMapOvr>
+</p:sld>
+</file>
+
+<file path=ppt/slides/slide15.xml><?xml version="1.0" encoding="utf-8"?>
+<p:sld xmlns:a="http://schemas.openxmlformats.org/drawingml/2006/main" xmlns:r="http://schemas.openxmlformats.org/officeDocument/2006/relationships" xmlns:p="http://schemas.openxmlformats.org/presentationml/2006/main">
+  <p:cSld name="Slide 15">
+    <p:bg>
+      <p:bgPr>
+        <a:solidFill>
+          <a:srgbClr val="FFFFFF"/>
+        </a:solidFill>
+      </p:bgPr>
+    </p:bg>
+    <p:spTree>
+      <p:nvGrpSpPr>
+        <p:cNvPr id="1" name=""/>
+        <p:cNvGrpSpPr/>
+        <p:nvPr/>
+      </p:nvGrpSpPr>
+      <p:grpSpPr>
+        <a:xfrm>
+          <a:off x="0" y="0"/>
+          <a:ext cx="0" cy="0"/>
+          <a:chOff x="0" y="0"/>
+          <a:chExt cx="0" cy="0"/>
+        </a:xfrm>
+      </p:grpSpPr>
+      <p:sp>
+        <p:nvSpPr>
+          <p:cNvPr id="2" name="Text 0"/>
+          <p:cNvSpPr txBox="1"/>
+          <p:nvPr/>
+        </p:nvSpPr>
+        <p:spPr>
+          <a:xfrm>
+            <a:off x="548640" y="384048"/>
+            <a:ext cx="8229600" cy="274320"/>
+          </a:xfrm>
+          <a:prstGeom prst="rect">
+            <a:avLst/>
+          </a:prstGeom>
+          <a:noFill/>
+          <a:ln/>
+        </p:spPr>
+        <p:txBody>
+          <a:bodyPr wrap="square" lIns="0" tIns="0" rIns="0" bIns="0" rtlCol="0" anchor="ctr"/>
+          <a:lstStyle/>
+          <a:p>
+            <a:pPr indent="0" marL="0">
+              <a:buNone/>
+            </a:pPr>
+            <a:r>
+              <a:rPr lang="en-US" sz="1200" b="1" spc="300" kern="0" dirty="0">
+                <a:solidFill>
+                  <a:srgbClr val="7B8781"/>
+                </a:solidFill>
+                <a:latin typeface="Calibri" pitchFamily="34" charset="0"/>
+                <a:ea typeface="Calibri" pitchFamily="34" charset="-122"/>
+                <a:cs typeface="Calibri" pitchFamily="34" charset="-120"/>
+              </a:rPr>
+              <a:t>BACKUP · WHAT THE NUMBERS MEAN</a:t>
+            </a:r>
+            <a:endParaRPr lang="en-US" sz="1200" dirty="0"/>
+          </a:p>
+        </p:txBody>
+      </p:sp>
+      <p:sp>
+        <p:nvSpPr>
+          <p:cNvPr id="3" name="Text 1"/>
+          <p:cNvSpPr txBox="1"/>
+          <p:nvPr/>
+        </p:nvSpPr>
+        <p:spPr>
+          <a:xfrm>
+            <a:off x="548640" y="658368"/>
+            <a:ext cx="11094415" cy="1005840"/>
+          </a:xfrm>
+          <a:prstGeom prst="rect">
+            <a:avLst/>
+          </a:prstGeom>
+          <a:noFill/>
+          <a:ln/>
+        </p:spPr>
+        <p:txBody>
+          <a:bodyPr wrap="square" lIns="0" tIns="0" rIns="0" bIns="0" rtlCol="0" anchor="t">
+            <a:normAutofit/>
+          </a:bodyPr>
+          <a:lstStyle/>
+          <a:p>
+            <a:pPr indent="0" marL="0">
+              <a:buNone/>
+            </a:pPr>
+            <a:r>
+              <a:rPr lang="en-US" sz="3000" b="1" dirty="0">
+                <a:solidFill>
+                  <a:srgbClr val="14201B"/>
+                </a:solidFill>
+                <a:latin typeface="Cambria" pitchFamily="34" charset="0"/>
+                <a:ea typeface="Cambria" pitchFamily="34" charset="-122"/>
+                <a:cs typeface="Cambria" pitchFamily="34" charset="-120"/>
+              </a:rPr>
+              <a:t>Score, tier, verdict: three different questions</a:t>
+            </a:r>
+            <a:endParaRPr lang="en-US" sz="3000" dirty="0"/>
+          </a:p>
+        </p:txBody>
+      </p:sp>
+      <p:sp>
+        <p:nvSpPr>
+          <p:cNvPr id="4" name="Shape 2"/>
+          <p:cNvSpPr/>
+          <p:nvPr/>
+        </p:nvSpPr>
+        <p:spPr>
+          <a:xfrm>
+            <a:off x="548640" y="1783080"/>
+            <a:ext cx="3362858" cy="4023360"/>
+          </a:xfrm>
+          <a:prstGeom prst="roundRect">
+            <a:avLst>
+              <a:gd name="adj" fmla="val 3263"/>
+            </a:avLst>
+          </a:prstGeom>
+          <a:solidFill>
+            <a:srgbClr val="EEF5F1"/>
+          </a:solidFill>
+          <a:ln w="12700">
+            <a:solidFill>
+              <a:srgbClr val="EEF5F1"/>
+            </a:solidFill>
+            <a:prstDash val="solid"/>
+          </a:ln>
+        </p:spPr>
+      </p:sp>
+      <p:sp>
+        <p:nvSpPr>
+          <p:cNvPr id="5" name="Shape 3"/>
+          <p:cNvSpPr/>
+          <p:nvPr/>
+        </p:nvSpPr>
+        <p:spPr>
+          <a:xfrm>
+            <a:off x="4002938" y="3611880"/>
+            <a:ext cx="320040" cy="365760"/>
+          </a:xfrm>
+          <a:prstGeom prst="rightArrow">
+            <a:avLst/>
+          </a:prstGeom>
+          <a:solidFill>
+            <a:srgbClr val="6FB08C"/>
+          </a:solidFill>
+          <a:ln w="12700">
+            <a:solidFill>
+              <a:srgbClr val="6FB08C"/>
+            </a:solidFill>
+            <a:prstDash val="solid"/>
+          </a:ln>
+        </p:spPr>
+      </p:sp>
+      <p:sp>
+        <p:nvSpPr>
+          <p:cNvPr id="6" name="Text 4"/>
+          <p:cNvSpPr txBox="1"/>
+          <p:nvPr/>
+        </p:nvSpPr>
+        <p:spPr>
+          <a:xfrm>
+            <a:off x="868680" y="2057400"/>
+            <a:ext cx="2722778" cy="274320"/>
+          </a:xfrm>
+          <a:prstGeom prst="rect">
+            <a:avLst/>
+          </a:prstGeom>
+          <a:noFill/>
+          <a:ln/>
+        </p:spPr>
+        <p:txBody>
+          <a:bodyPr wrap="square" lIns="0" tIns="0" rIns="0" bIns="0" rtlCol="0" anchor="ctr"/>
+          <a:lstStyle/>
+          <a:p>
+            <a:pPr indent="0" marL="0">
+              <a:buNone/>
+            </a:pPr>
+            <a:r>
+              <a:rPr lang="en-US" sz="1100" b="1" spc="200" kern="0" dirty="0">
+                <a:solidFill>
+                  <a:srgbClr val="C8742B"/>
+                </a:solidFill>
+                <a:latin typeface="Calibri" pitchFamily="34" charset="0"/>
+                <a:ea typeface="Calibri" pitchFamily="34" charset="-122"/>
+                <a:cs typeface="Calibri" pitchFamily="34" charset="-120"/>
+              </a:rPr>
+              <a:t>AFTER THE PHOTO</a:t>
+            </a:r>
+            <a:endParaRPr lang="en-US" sz="1100" dirty="0"/>
+          </a:p>
+        </p:txBody>
+      </p:sp>
+      <p:sp>
+        <p:nvSpPr>
+          <p:cNvPr id="7" name="Text 5"/>
+          <p:cNvSpPr txBox="1"/>
+          <p:nvPr/>
+        </p:nvSpPr>
+        <p:spPr>
+          <a:xfrm>
+            <a:off x="868680" y="2350008"/>
+            <a:ext cx="2722778" cy="384048"/>
+          </a:xfrm>
+          <a:prstGeom prst="rect">
+            <a:avLst/>
+          </a:prstGeom>
+          <a:noFill/>
+          <a:ln/>
+        </p:spPr>
+        <p:txBody>
+          <a:bodyPr wrap="square" lIns="0" tIns="0" rIns="0" bIns="0" rtlCol="0" anchor="ctr"/>
+          <a:lstStyle/>
+          <a:p>
+            <a:pPr indent="0" marL="0">
+              <a:buNone/>
+            </a:pPr>
+            <a:r>
+              <a:rPr lang="en-US" sz="1900" b="1" dirty="0">
+                <a:solidFill>
+                  <a:srgbClr val="14201B"/>
+                </a:solidFill>
+                <a:latin typeface="Calibri" pitchFamily="34" charset="0"/>
+                <a:ea typeface="Calibri" pitchFamily="34" charset="-122"/>
+                <a:cs typeface="Calibri" pitchFamily="34" charset="-120"/>
+              </a:rPr>
+              <a:t>Quality score</a:t>
+            </a:r>
+            <a:endParaRPr lang="en-US" sz="1900" dirty="0"/>
+          </a:p>
+        </p:txBody>
+      </p:sp>
+      <p:sp>
+        <p:nvSpPr>
+          <p:cNvPr id="8" name="Text 6"/>
+          <p:cNvSpPr txBox="1"/>
+          <p:nvPr/>
+        </p:nvSpPr>
+        <p:spPr>
+          <a:xfrm>
+            <a:off x="868680" y="2788920"/>
+            <a:ext cx="2722778" cy="731520"/>
+          </a:xfrm>
+          <a:prstGeom prst="rect">
+            <a:avLst/>
+          </a:prstGeom>
+          <a:noFill/>
+          <a:ln/>
+        </p:spPr>
+        <p:txBody>
+          <a:bodyPr wrap="square" lIns="0" tIns="0" rIns="0" bIns="0" rtlCol="0" anchor="t"/>
+          <a:lstStyle/>
+          <a:p>
+            <a:pPr indent="0" marL="0">
+              <a:buNone/>
+            </a:pPr>
+            <a:r>
+              <a:rPr lang="en-US" sz="2000" i="1" dirty="0">
+                <a:solidFill>
+                  <a:srgbClr val="1F7A4D"/>
+                </a:solidFill>
+                <a:latin typeface="Cambria" pitchFamily="34" charset="0"/>
+                <a:ea typeface="Cambria" pitchFamily="34" charset="-122"/>
+                <a:cs typeface="Cambria" pitchFamily="34" charset="-120"/>
+              </a:rPr>
+              <a:t>How good are the dots?</a:t>
+            </a:r>
+            <a:endParaRPr lang="en-US" sz="2000" dirty="0"/>
+          </a:p>
+        </p:txBody>
+      </p:sp>
+      <p:sp>
+        <p:nvSpPr>
+          <p:cNvPr id="9" name="Text 7"/>
+          <p:cNvSpPr txBox="1"/>
+          <p:nvPr/>
+        </p:nvSpPr>
+        <p:spPr>
+          <a:xfrm>
+            <a:off x="868680" y="3611880"/>
+            <a:ext cx="2722778" cy="502920"/>
+          </a:xfrm>
+          <a:prstGeom prst="rect">
+            <a:avLst/>
+          </a:prstGeom>
+          <a:noFill/>
+          <a:ln/>
+        </p:spPr>
+        <p:txBody>
+          <a:bodyPr wrap="square" lIns="0" tIns="0" rIns="0" bIns="0" rtlCol="0" anchor="b"/>
+          <a:lstStyle/>
+          <a:p>
+            <a:pPr indent="0" marL="0">
+              <a:buNone/>
+            </a:pPr>
+            <a:r>
+              <a:rPr lang="en-US" sz="3000" b="1" dirty="0">
+                <a:solidFill>
+                  <a:srgbClr val="C8742B"/>
+                </a:solidFill>
+                <a:latin typeface="Calibri" pitchFamily="34" charset="0"/>
+                <a:ea typeface="Calibri" pitchFamily="34" charset="-122"/>
+                <a:cs typeface="Calibri" pitchFamily="34" charset="-120"/>
+              </a:rPr>
+              <a:t>20</a:t>
+            </a:r>
+            <a:pPr indent="0" marL="0">
+              <a:buNone/>
+            </a:pPr>
+            <a:r>
+              <a:rPr lang="en-US" sz="1500" dirty="0">
+                <a:solidFill>
+                  <a:srgbClr val="7B8781"/>
+                </a:solidFill>
+                <a:latin typeface="Calibri" pitchFamily="34" charset="0"/>
+                <a:ea typeface="Calibri" pitchFamily="34" charset="-122"/>
+                <a:cs typeface="Calibri" pitchFamily="34" charset="-120"/>
+              </a:rPr>
+              <a:t>/100</a:t>
+            </a:r>
+            <a:endParaRPr lang="en-US" sz="3000" dirty="0"/>
+          </a:p>
+        </p:txBody>
+      </p:sp>
+      <p:sp>
+        <p:nvSpPr>
+          <p:cNvPr id="10" name="Shape 8"/>
+          <p:cNvSpPr/>
+          <p:nvPr/>
+        </p:nvSpPr>
+        <p:spPr>
+          <a:xfrm>
+            <a:off x="868680" y="4224528"/>
+            <a:ext cx="182880" cy="182880"/>
+          </a:xfrm>
+          <a:prstGeom prst="star5">
+            <a:avLst/>
+          </a:prstGeom>
+          <a:solidFill>
+            <a:srgbClr val="F2A71B"/>
+          </a:solidFill>
+          <a:ln w="12700">
+            <a:solidFill>
+              <a:srgbClr val="F2A71B"/>
+            </a:solidFill>
+            <a:prstDash val="solid"/>
+          </a:ln>
+        </p:spPr>
+      </p:sp>
+      <p:sp>
+        <p:nvSpPr>
+          <p:cNvPr id="11" name="Shape 9"/>
+          <p:cNvSpPr/>
+          <p:nvPr/>
+        </p:nvSpPr>
+        <p:spPr>
+          <a:xfrm>
+            <a:off x="1097280" y="4224528"/>
+            <a:ext cx="182880" cy="182880"/>
+          </a:xfrm>
+          <a:prstGeom prst="star5">
+            <a:avLst/>
+          </a:prstGeom>
+          <a:solidFill>
+            <a:srgbClr val="D3DAD6"/>
+          </a:solidFill>
+          <a:ln w="12700">
+            <a:solidFill>
+              <a:srgbClr val="D3DAD6"/>
+            </a:solidFill>
+            <a:prstDash val="solid"/>
+          </a:ln>
+        </p:spPr>
+      </p:sp>
+      <p:sp>
+        <p:nvSpPr>
+          <p:cNvPr id="12" name="Shape 10"/>
+          <p:cNvSpPr/>
+          <p:nvPr/>
+        </p:nvSpPr>
+        <p:spPr>
+          <a:xfrm>
+            <a:off x="1325880" y="4224528"/>
+            <a:ext cx="182880" cy="182880"/>
+          </a:xfrm>
+          <a:prstGeom prst="star5">
+            <a:avLst/>
+          </a:prstGeom>
+          <a:solidFill>
+            <a:srgbClr val="D3DAD6"/>
+          </a:solidFill>
+          <a:ln w="12700">
+            <a:solidFill>
+              <a:srgbClr val="D3DAD6"/>
+            </a:solidFill>
+            <a:prstDash val="solid"/>
+          </a:ln>
+        </p:spPr>
+      </p:sp>
+      <p:sp>
+        <p:nvSpPr>
+          <p:cNvPr id="13" name="Shape 11"/>
+          <p:cNvSpPr/>
+          <p:nvPr/>
+        </p:nvSpPr>
+        <p:spPr>
+          <a:xfrm>
+            <a:off x="1554480" y="4224528"/>
+            <a:ext cx="182880" cy="182880"/>
+          </a:xfrm>
+          <a:prstGeom prst="star5">
+            <a:avLst/>
+          </a:prstGeom>
+          <a:solidFill>
+            <a:srgbClr val="D3DAD6"/>
+          </a:solidFill>
+          <a:ln w="12700">
+            <a:solidFill>
+              <a:srgbClr val="D3DAD6"/>
+            </a:solidFill>
+            <a:prstDash val="solid"/>
+          </a:ln>
+        </p:spPr>
+      </p:sp>
+      <p:sp>
+        <p:nvSpPr>
+          <p:cNvPr id="14" name="Shape 12"/>
+          <p:cNvSpPr/>
+          <p:nvPr/>
+        </p:nvSpPr>
+        <p:spPr>
+          <a:xfrm>
+            <a:off x="1783080" y="4224528"/>
+            <a:ext cx="182880" cy="182880"/>
+          </a:xfrm>
+          <a:prstGeom prst="star5">
+            <a:avLst/>
+          </a:prstGeom>
+          <a:solidFill>
+            <a:srgbClr val="D3DAD6"/>
+          </a:solidFill>
+          <a:ln w="12700">
+            <a:solidFill>
+              <a:srgbClr val="D3DAD6"/>
+            </a:solidFill>
+            <a:prstDash val="solid"/>
+          </a:ln>
+        </p:spPr>
+      </p:sp>
+      <p:sp>
+        <p:nvSpPr>
+          <p:cNvPr id="15" name="Text 13"/>
+          <p:cNvSpPr txBox="1"/>
+          <p:nvPr/>
+        </p:nvSpPr>
+        <p:spPr>
+          <a:xfrm>
+            <a:off x="2103120" y="4178808"/>
+            <a:ext cx="1488338" cy="274320"/>
+          </a:xfrm>
+          <a:prstGeom prst="rect">
+            <a:avLst/>
+          </a:prstGeom>
+          <a:noFill/>
+          <a:ln/>
+        </p:spPr>
+        <p:txBody>
+          <a:bodyPr wrap="square" lIns="0" tIns="0" rIns="0" bIns="0" rtlCol="0" anchor="ctr"/>
+          <a:lstStyle/>
+          <a:p>
+            <a:pPr indent="0" marL="0">
+              <a:buNone/>
+            </a:pPr>
+            <a:r>
+              <a:rPr lang="en-US" sz="1100" dirty="0">
+                <a:solidFill>
+                  <a:srgbClr val="7B8781"/>
+                </a:solidFill>
+                <a:latin typeface="Calibri" pitchFamily="34" charset="0"/>
+                <a:ea typeface="Calibri" pitchFamily="34" charset="-122"/>
+                <a:cs typeface="Calibri" pitchFamily="34" charset="-120"/>
+              </a:rPr>
+              <a:t>size, 3 of 15</a:t>
+            </a:r>
+            <a:endParaRPr lang="en-US" sz="1100" dirty="0"/>
+          </a:p>
+        </p:txBody>
+      </p:sp>
+      <p:sp>
+        <p:nvSpPr>
+          <p:cNvPr id="16" name="Text 14"/>
+          <p:cNvSpPr txBox="1"/>
+          <p:nvPr/>
+        </p:nvSpPr>
+        <p:spPr>
+          <a:xfrm>
+            <a:off x="868680" y="4572000"/>
+            <a:ext cx="2722778" cy="777240"/>
+          </a:xfrm>
+          <a:prstGeom prst="rect">
+            <a:avLst/>
+          </a:prstGeom>
+          <a:noFill/>
+          <a:ln/>
+        </p:spPr>
+        <p:txBody>
+          <a:bodyPr wrap="square" lIns="0" tIns="0" rIns="0" bIns="0" rtlCol="0" anchor="t"/>
+          <a:lstStyle/>
+          <a:p>
+            <a:pPr indent="0" marL="0">
+              <a:buNone/>
+            </a:pPr>
+            <a:r>
+              <a:rPr lang="en-US" sz="1300" b="1" dirty="0">
+                <a:solidFill>
+                  <a:srgbClr val="14201B"/>
+                </a:solidFill>
+                <a:latin typeface="Calibri" pitchFamily="34" charset="0"/>
+                <a:ea typeface="Calibri" pitchFamily="34" charset="-122"/>
+                <a:cs typeface="Calibri" pitchFamily="34" charset="-120"/>
+              </a:rPr>
+              <a:t>Decided by: </a:t>
+            </a:r>
+            <a:pPr indent="0" marL="0">
+              <a:buNone/>
+            </a:pPr>
+            <a:r>
+              <a:rPr lang="en-US" sz="1300" dirty="0">
+                <a:solidFill>
+                  <a:srgbClr val="4A5751"/>
+                </a:solidFill>
+                <a:latin typeface="Calibri" pitchFamily="34" charset="0"/>
+                <a:ea typeface="Calibri" pitchFamily="34" charset="-122"/>
+                <a:cs typeface="Calibri" pitchFamily="34" charset="-120"/>
+              </a:rPr>
+              <a:t>Counts of dots that pass four checks: present, size, shape, position</a:t>
+            </a:r>
+            <a:endParaRPr lang="en-US" sz="1300" dirty="0"/>
+          </a:p>
+        </p:txBody>
+      </p:sp>
+      <p:sp>
+        <p:nvSpPr>
+          <p:cNvPr id="17" name="Text 15"/>
+          <p:cNvSpPr txBox="1"/>
+          <p:nvPr/>
+        </p:nvSpPr>
+        <p:spPr>
+          <a:xfrm>
+            <a:off x="868680" y="5394960"/>
+            <a:ext cx="2722778" cy="256032"/>
+          </a:xfrm>
+          <a:prstGeom prst="rect">
+            <a:avLst/>
+          </a:prstGeom>
+          <a:noFill/>
+          <a:ln/>
+        </p:spPr>
+        <p:txBody>
+          <a:bodyPr wrap="square" lIns="0" tIns="0" rIns="0" bIns="0" rtlCol="0" anchor="ctr"/>
+          <a:lstStyle/>
+          <a:p>
+            <a:pPr indent="0" marL="0">
+              <a:buNone/>
+            </a:pPr>
+            <a:r>
+              <a:rPr lang="en-US" sz="1100" dirty="0">
+                <a:solidFill>
+                  <a:srgbClr val="7B8781"/>
+                </a:solidFill>
+                <a:latin typeface="Calibri" pitchFamily="34" charset="0"/>
+                <a:ea typeface="Calibri" pitchFamily="34" charset="-122"/>
+                <a:cs typeface="Calibri" pitchFamily="34" charset="-120"/>
+              </a:rPr>
+              <a:t>Detail: B9</a:t>
+            </a:r>
+            <a:endParaRPr lang="en-US" sz="1100" dirty="0"/>
+          </a:p>
+        </p:txBody>
+      </p:sp>
+      <p:sp>
+        <p:nvSpPr>
+          <p:cNvPr id="18" name="Shape 16"/>
+          <p:cNvSpPr/>
+          <p:nvPr/>
+        </p:nvSpPr>
+        <p:spPr>
+          <a:xfrm>
+            <a:off x="4414418" y="1783080"/>
+            <a:ext cx="3362858" cy="4023360"/>
+          </a:xfrm>
+          <a:prstGeom prst="roundRect">
+            <a:avLst>
+              <a:gd name="adj" fmla="val 3263"/>
+            </a:avLst>
+          </a:prstGeom>
+          <a:solidFill>
+            <a:srgbClr val="EEF5F1"/>
+          </a:solidFill>
+          <a:ln w="12700">
+            <a:solidFill>
+              <a:srgbClr val="EEF5F1"/>
+            </a:solidFill>
+            <a:prstDash val="solid"/>
+          </a:ln>
+        </p:spPr>
+      </p:sp>
+      <p:sp>
+        <p:nvSpPr>
+          <p:cNvPr id="19" name="Shape 17"/>
+          <p:cNvSpPr/>
+          <p:nvPr/>
+        </p:nvSpPr>
+        <p:spPr>
+          <a:xfrm>
+            <a:off x="7868717" y="3611880"/>
+            <a:ext cx="320040" cy="365760"/>
+          </a:xfrm>
+          <a:prstGeom prst="rightArrow">
+            <a:avLst/>
+          </a:prstGeom>
+          <a:solidFill>
+            <a:srgbClr val="6FB08C"/>
+          </a:solidFill>
+          <a:ln w="12700">
+            <a:solidFill>
+              <a:srgbClr val="6FB08C"/>
+            </a:solidFill>
+            <a:prstDash val="solid"/>
+          </a:ln>
+        </p:spPr>
+      </p:sp>
+      <p:sp>
+        <p:nvSpPr>
+          <p:cNvPr id="20" name="Text 18"/>
+          <p:cNvSpPr txBox="1"/>
+          <p:nvPr/>
+        </p:nvSpPr>
+        <p:spPr>
+          <a:xfrm>
+            <a:off x="4734458" y="2057400"/>
+            <a:ext cx="2722778" cy="274320"/>
+          </a:xfrm>
+          <a:prstGeom prst="rect">
+            <a:avLst/>
+          </a:prstGeom>
+          <a:noFill/>
+          <a:ln/>
+        </p:spPr>
+        <p:txBody>
+          <a:bodyPr wrap="square" lIns="0" tIns="0" rIns="0" bIns="0" rtlCol="0" anchor="ctr"/>
+          <a:lstStyle/>
+          <a:p>
+            <a:pPr indent="0" marL="0">
+              <a:buNone/>
+            </a:pPr>
+            <a:r>
+              <a:rPr lang="en-US" sz="1100" b="1" spc="200" kern="0" dirty="0">
+                <a:solidFill>
+                  <a:srgbClr val="C8742B"/>
+                </a:solidFill>
+                <a:latin typeface="Calibri" pitchFamily="34" charset="0"/>
+                <a:ea typeface="Calibri" pitchFamily="34" charset="-122"/>
+                <a:cs typeface="Calibri" pitchFamily="34" charset="-120"/>
+              </a:rPr>
+              <a:t>AFTER EVERY RANKING</a:t>
+            </a:r>
+            <a:endParaRPr lang="en-US" sz="1100" dirty="0"/>
+          </a:p>
+        </p:txBody>
+      </p:sp>
+      <p:sp>
+        <p:nvSpPr>
+          <p:cNvPr id="21" name="Text 19"/>
+          <p:cNvSpPr txBox="1"/>
+          <p:nvPr/>
+        </p:nvSpPr>
+        <p:spPr>
+          <a:xfrm>
+            <a:off x="4734458" y="2350008"/>
+            <a:ext cx="2722778" cy="384048"/>
+          </a:xfrm>
+          <a:prstGeom prst="rect">
+            <a:avLst/>
+          </a:prstGeom>
+          <a:noFill/>
+          <a:ln/>
+        </p:spPr>
+        <p:txBody>
+          <a:bodyPr wrap="square" lIns="0" tIns="0" rIns="0" bIns="0" rtlCol="0" anchor="ctr"/>
+          <a:lstStyle/>
+          <a:p>
+            <a:pPr indent="0" marL="0">
+              <a:buNone/>
+            </a:pPr>
+            <a:r>
+              <a:rPr lang="en-US" sz="1900" b="1" dirty="0">
+                <a:solidFill>
+                  <a:srgbClr val="14201B"/>
+                </a:solidFill>
+                <a:latin typeface="Calibri" pitchFamily="34" charset="0"/>
+                <a:ea typeface="Calibri" pitchFamily="34" charset="-122"/>
+                <a:cs typeface="Calibri" pitchFamily="34" charset="-120"/>
+              </a:rPr>
+              <a:t>Confidence tier</a:t>
+            </a:r>
+            <a:endParaRPr lang="en-US" sz="1900" dirty="0"/>
+          </a:p>
+        </p:txBody>
+      </p:sp>
+      <p:sp>
+        <p:nvSpPr>
+          <p:cNvPr id="22" name="Text 20"/>
+          <p:cNvSpPr txBox="1"/>
+          <p:nvPr/>
+        </p:nvSpPr>
+        <p:spPr>
+          <a:xfrm>
+            <a:off x="4734458" y="2788920"/>
+            <a:ext cx="2722778" cy="731520"/>
+          </a:xfrm>
+          <a:prstGeom prst="rect">
+            <a:avLst/>
+          </a:prstGeom>
+          <a:noFill/>
+          <a:ln/>
+        </p:spPr>
+        <p:txBody>
+          <a:bodyPr wrap="square" lIns="0" tIns="0" rIns="0" bIns="0" rtlCol="0" anchor="t"/>
+          <a:lstStyle/>
+          <a:p>
+            <a:pPr indent="0" marL="0">
+              <a:buNone/>
+            </a:pPr>
+            <a:r>
+              <a:rPr lang="en-US" sz="2000" i="1" dirty="0">
+                <a:solidFill>
+                  <a:srgbClr val="1F7A4D"/>
+                </a:solidFill>
+                <a:latin typeface="Cambria" pitchFamily="34" charset="0"/>
+                <a:ea typeface="Cambria" pitchFamily="34" charset="-122"/>
+                <a:cs typeface="Cambria" pitchFamily="34" charset="-120"/>
+              </a:rPr>
+              <a:t>How far can I trust the ranking?</a:t>
+            </a:r>
+            <a:endParaRPr lang="en-US" sz="2000" dirty="0"/>
+          </a:p>
+        </p:txBody>
+      </p:sp>
+      <p:sp>
+        <p:nvSpPr>
+          <p:cNvPr id="23" name="Shape 21"/>
+          <p:cNvSpPr/>
+          <p:nvPr/>
+        </p:nvSpPr>
+        <p:spPr>
+          <a:xfrm>
+            <a:off x="4734458" y="3794760"/>
+            <a:ext cx="566928" cy="384048"/>
+          </a:xfrm>
+          <a:prstGeom prst="roundRect">
+            <a:avLst>
+              <a:gd name="adj" fmla="val 50000"/>
+            </a:avLst>
+          </a:prstGeom>
+          <a:solidFill>
+            <a:srgbClr val="1F7A4D"/>
+          </a:solidFill>
+          <a:ln w="12700">
+            <a:solidFill>
+              <a:srgbClr val="1F7A4D"/>
+            </a:solidFill>
+            <a:prstDash val="solid"/>
+          </a:ln>
+        </p:spPr>
+      </p:sp>
+      <p:sp>
+        <p:nvSpPr>
+          <p:cNvPr id="24" name="Text 22"/>
+          <p:cNvSpPr txBox="1"/>
+          <p:nvPr/>
+        </p:nvSpPr>
+        <p:spPr>
+          <a:xfrm>
+            <a:off x="4734458" y="3794760"/>
+            <a:ext cx="566928" cy="384048"/>
+          </a:xfrm>
+          <a:prstGeom prst="rect">
+            <a:avLst/>
+          </a:prstGeom>
+          <a:noFill/>
+          <a:ln/>
+        </p:spPr>
+        <p:txBody>
+          <a:bodyPr wrap="square" lIns="0" tIns="0" rIns="0" bIns="0" rtlCol="0" anchor="ctr"/>
+          <a:lstStyle/>
+          <a:p>
+            <a:pPr algn="ctr" indent="0" marL="0">
+              <a:buNone/>
+            </a:pPr>
+            <a:r>
+              <a:rPr lang="en-US" sz="1400" b="1" dirty="0">
+                <a:solidFill>
+                  <a:srgbClr val="FFFFFF"/>
+                </a:solidFill>
+                <a:latin typeface="Calibri" pitchFamily="34" charset="0"/>
+                <a:ea typeface="Calibri" pitchFamily="34" charset="-122"/>
+                <a:cs typeface="Calibri" pitchFamily="34" charset="-120"/>
+              </a:rPr>
+              <a:t>T1</a:t>
+            </a:r>
+            <a:endParaRPr lang="en-US" sz="1400" dirty="0"/>
+          </a:p>
+        </p:txBody>
+      </p:sp>
+      <p:sp>
+        <p:nvSpPr>
+          <p:cNvPr id="25" name="Shape 23"/>
+          <p:cNvSpPr/>
+          <p:nvPr/>
+        </p:nvSpPr>
+        <p:spPr>
+          <a:xfrm>
+            <a:off x="5411114" y="3794760"/>
+            <a:ext cx="566928" cy="384048"/>
+          </a:xfrm>
+          <a:prstGeom prst="roundRect">
+            <a:avLst>
+              <a:gd name="adj" fmla="val 50000"/>
+            </a:avLst>
+          </a:prstGeom>
+          <a:solidFill>
+            <a:srgbClr val="D08A00"/>
+          </a:solidFill>
+          <a:ln w="12700">
+            <a:solidFill>
+              <a:srgbClr val="D08A00"/>
+            </a:solidFill>
+            <a:prstDash val="solid"/>
+          </a:ln>
+        </p:spPr>
+      </p:sp>
+      <p:sp>
+        <p:nvSpPr>
+          <p:cNvPr id="26" name="Text 24"/>
+          <p:cNvSpPr txBox="1"/>
+          <p:nvPr/>
+        </p:nvSpPr>
+        <p:spPr>
+          <a:xfrm>
+            <a:off x="5411114" y="3794760"/>
+            <a:ext cx="566928" cy="384048"/>
+          </a:xfrm>
+          <a:prstGeom prst="rect">
+            <a:avLst/>
+          </a:prstGeom>
+          <a:noFill/>
+          <a:ln/>
+        </p:spPr>
+        <p:txBody>
+          <a:bodyPr wrap="square" lIns="0" tIns="0" rIns="0" bIns="0" rtlCol="0" anchor="ctr"/>
+          <a:lstStyle/>
+          <a:p>
+            <a:pPr algn="ctr" indent="0" marL="0">
+              <a:buNone/>
+            </a:pPr>
+            <a:r>
+              <a:rPr lang="en-US" sz="1400" b="1" dirty="0">
+                <a:solidFill>
+                  <a:srgbClr val="FFFFFF"/>
+                </a:solidFill>
+                <a:latin typeface="Calibri" pitchFamily="34" charset="0"/>
+                <a:ea typeface="Calibri" pitchFamily="34" charset="-122"/>
+                <a:cs typeface="Calibri" pitchFamily="34" charset="-120"/>
+              </a:rPr>
+              <a:t>T2</a:t>
+            </a:r>
+            <a:endParaRPr lang="en-US" sz="1400" dirty="0"/>
+          </a:p>
+        </p:txBody>
+      </p:sp>
+      <p:sp>
+        <p:nvSpPr>
+          <p:cNvPr id="27" name="Shape 25"/>
+          <p:cNvSpPr/>
+          <p:nvPr/>
+        </p:nvSpPr>
+        <p:spPr>
+          <a:xfrm>
+            <a:off x="6087770" y="3794760"/>
+            <a:ext cx="566928" cy="384048"/>
+          </a:xfrm>
+          <a:prstGeom prst="roundRect">
+            <a:avLst>
+              <a:gd name="adj" fmla="val 50000"/>
+            </a:avLst>
+          </a:prstGeom>
+          <a:solidFill>
+            <a:srgbClr val="E0662B"/>
+          </a:solidFill>
+          <a:ln w="12700">
+            <a:solidFill>
+              <a:srgbClr val="E0662B"/>
+            </a:solidFill>
+            <a:prstDash val="solid"/>
+          </a:ln>
+        </p:spPr>
+      </p:sp>
+      <p:sp>
+        <p:nvSpPr>
+          <p:cNvPr id="28" name="Text 26"/>
+          <p:cNvSpPr txBox="1"/>
+          <p:nvPr/>
+        </p:nvSpPr>
+        <p:spPr>
+          <a:xfrm>
+            <a:off x="6087770" y="3794760"/>
+            <a:ext cx="566928" cy="384048"/>
+          </a:xfrm>
+          <a:prstGeom prst="rect">
+            <a:avLst/>
+          </a:prstGeom>
+          <a:noFill/>
+          <a:ln/>
+        </p:spPr>
+        <p:txBody>
+          <a:bodyPr wrap="square" lIns="0" tIns="0" rIns="0" bIns="0" rtlCol="0" anchor="ctr"/>
+          <a:lstStyle/>
+          <a:p>
+            <a:pPr algn="ctr" indent="0" marL="0">
+              <a:buNone/>
+            </a:pPr>
+            <a:r>
+              <a:rPr lang="en-US" sz="1400" b="1" dirty="0">
+                <a:solidFill>
+                  <a:srgbClr val="FFFFFF"/>
+                </a:solidFill>
+                <a:latin typeface="Calibri" pitchFamily="34" charset="0"/>
+                <a:ea typeface="Calibri" pitchFamily="34" charset="-122"/>
+                <a:cs typeface="Calibri" pitchFamily="34" charset="-120"/>
+              </a:rPr>
+              <a:t>T3</a:t>
+            </a:r>
+            <a:endParaRPr lang="en-US" sz="1400" dirty="0"/>
+          </a:p>
+        </p:txBody>
+      </p:sp>
+      <p:sp>
+        <p:nvSpPr>
+          <p:cNvPr id="29" name="Shape 27"/>
+          <p:cNvSpPr/>
+          <p:nvPr/>
+        </p:nvSpPr>
+        <p:spPr>
+          <a:xfrm>
+            <a:off x="6764426" y="3794760"/>
+            <a:ext cx="566928" cy="384048"/>
+          </a:xfrm>
+          <a:prstGeom prst="roundRect">
+            <a:avLst>
+              <a:gd name="adj" fmla="val 50000"/>
+            </a:avLst>
+          </a:prstGeom>
+          <a:solidFill>
+            <a:srgbClr val="D03B3B"/>
+          </a:solidFill>
+          <a:ln w="12700">
+            <a:solidFill>
+              <a:srgbClr val="D03B3B"/>
+            </a:solidFill>
+            <a:prstDash val="solid"/>
+          </a:ln>
+        </p:spPr>
+      </p:sp>
+      <p:sp>
+        <p:nvSpPr>
+          <p:cNvPr id="30" name="Text 28"/>
+          <p:cNvSpPr txBox="1"/>
+          <p:nvPr/>
+        </p:nvSpPr>
+        <p:spPr>
+          <a:xfrm>
+            <a:off x="6764426" y="3794760"/>
+            <a:ext cx="566928" cy="384048"/>
+          </a:xfrm>
+          <a:prstGeom prst="rect">
+            <a:avLst/>
+          </a:prstGeom>
+          <a:noFill/>
+          <a:ln/>
+        </p:spPr>
+        <p:txBody>
+          <a:bodyPr wrap="square" lIns="0" tIns="0" rIns="0" bIns="0" rtlCol="0" anchor="ctr"/>
+          <a:lstStyle/>
+          <a:p>
+            <a:pPr algn="ctr" indent="0" marL="0">
+              <a:buNone/>
+            </a:pPr>
+            <a:r>
+              <a:rPr lang="en-US" sz="1400" b="1" dirty="0">
+                <a:solidFill>
+                  <a:srgbClr val="FFFFFF"/>
+                </a:solidFill>
+                <a:latin typeface="Calibri" pitchFamily="34" charset="0"/>
+                <a:ea typeface="Calibri" pitchFamily="34" charset="-122"/>
+                <a:cs typeface="Calibri" pitchFamily="34" charset="-120"/>
+              </a:rPr>
+              <a:t>T4</a:t>
+            </a:r>
+            <a:endParaRPr lang="en-US" sz="1400" dirty="0"/>
+          </a:p>
+        </p:txBody>
+      </p:sp>
+      <p:sp>
+        <p:nvSpPr>
+          <p:cNvPr id="31" name="Text 29"/>
+          <p:cNvSpPr txBox="1"/>
+          <p:nvPr/>
+        </p:nvSpPr>
+        <p:spPr>
+          <a:xfrm>
+            <a:off x="4734458" y="4572000"/>
+            <a:ext cx="2722778" cy="777240"/>
+          </a:xfrm>
+          <a:prstGeom prst="rect">
+            <a:avLst/>
+          </a:prstGeom>
+          <a:noFill/>
+          <a:ln/>
+        </p:spPr>
+        <p:txBody>
+          <a:bodyPr wrap="square" lIns="0" tIns="0" rIns="0" bIns="0" rtlCol="0" anchor="t"/>
+          <a:lstStyle/>
+          <a:p>
+            <a:pPr indent="0" marL="0">
+              <a:buNone/>
+            </a:pPr>
+            <a:r>
+              <a:rPr lang="en-US" sz="1300" b="1" dirty="0">
+                <a:solidFill>
+                  <a:srgbClr val="14201B"/>
+                </a:solidFill>
+                <a:latin typeface="Calibri" pitchFamily="34" charset="0"/>
+                <a:ea typeface="Calibri" pitchFamily="34" charset="-122"/>
+                <a:cs typeface="Calibri" pitchFamily="34" charset="-120"/>
+              </a:rPr>
+              <a:t>Decided by: </a:t>
+            </a:r>
+            <a:pPr indent="0" marL="0">
+              <a:buNone/>
+            </a:pPr>
+            <a:r>
+              <a:rPr lang="en-US" sz="1300" dirty="0">
+                <a:solidFill>
+                  <a:srgbClr val="4A5751"/>
+                </a:solidFill>
+                <a:latin typeface="Calibri" pitchFamily="34" charset="0"/>
+                <a:ea typeface="Calibri" pitchFamily="34" charset="-122"/>
+                <a:cs typeface="Calibri" pitchFamily="34" charset="-120"/>
+              </a:rPr>
+              <a:t>The two brains and two gates, or a check that confirmed the cause</a:t>
+            </a:r>
+            <a:endParaRPr lang="en-US" sz="1300" dirty="0"/>
+          </a:p>
+        </p:txBody>
+      </p:sp>
+      <p:sp>
+        <p:nvSpPr>
+          <p:cNvPr id="32" name="Text 30"/>
+          <p:cNvSpPr txBox="1"/>
+          <p:nvPr/>
+        </p:nvSpPr>
+        <p:spPr>
+          <a:xfrm>
+            <a:off x="4734458" y="5394960"/>
+            <a:ext cx="2722778" cy="256032"/>
+          </a:xfrm>
+          <a:prstGeom prst="rect">
+            <a:avLst/>
+          </a:prstGeom>
+          <a:noFill/>
+          <a:ln/>
+        </p:spPr>
+        <p:txBody>
+          <a:bodyPr wrap="square" lIns="0" tIns="0" rIns="0" bIns="0" rtlCol="0" anchor="ctr"/>
+          <a:lstStyle/>
+          <a:p>
+            <a:pPr indent="0" marL="0">
+              <a:buNone/>
+            </a:pPr>
+            <a:r>
+              <a:rPr lang="en-US" sz="1100" dirty="0">
+                <a:solidFill>
+                  <a:srgbClr val="7B8781"/>
+                </a:solidFill>
+                <a:latin typeface="Calibri" pitchFamily="34" charset="0"/>
+                <a:ea typeface="Calibri" pitchFamily="34" charset="-122"/>
+                <a:cs typeface="Calibri" pitchFamily="34" charset="-120"/>
+              </a:rPr>
+              <a:t>Detail: B4</a:t>
+            </a:r>
+            <a:endParaRPr lang="en-US" sz="1100" dirty="0"/>
+          </a:p>
+        </p:txBody>
+      </p:sp>
+      <p:sp>
+        <p:nvSpPr>
+          <p:cNvPr id="33" name="Shape 31"/>
+          <p:cNvSpPr/>
+          <p:nvPr/>
+        </p:nvSpPr>
+        <p:spPr>
+          <a:xfrm>
+            <a:off x="8280197" y="1783080"/>
+            <a:ext cx="3362858" cy="4023360"/>
+          </a:xfrm>
+          <a:prstGeom prst="roundRect">
+            <a:avLst>
+              <a:gd name="adj" fmla="val 3263"/>
+            </a:avLst>
+          </a:prstGeom>
+          <a:solidFill>
+            <a:srgbClr val="EEF5F1"/>
+          </a:solidFill>
+          <a:ln w="12700">
+            <a:solidFill>
+              <a:srgbClr val="EEF5F1"/>
+            </a:solidFill>
+            <a:prstDash val="solid"/>
+          </a:ln>
+        </p:spPr>
+      </p:sp>
+      <p:sp>
+        <p:nvSpPr>
+          <p:cNvPr id="34" name="Text 32"/>
+          <p:cNvSpPr txBox="1"/>
+          <p:nvPr/>
+        </p:nvSpPr>
+        <p:spPr>
+          <a:xfrm>
+            <a:off x="8600237" y="2057400"/>
+            <a:ext cx="2722778" cy="274320"/>
+          </a:xfrm>
+          <a:prstGeom prst="rect">
+            <a:avLst/>
+          </a:prstGeom>
+          <a:noFill/>
+          <a:ln/>
+        </p:spPr>
+        <p:txBody>
+          <a:bodyPr wrap="square" lIns="0" tIns="0" rIns="0" bIns="0" rtlCol="0" anchor="ctr"/>
+          <a:lstStyle/>
+          <a:p>
+            <a:pPr indent="0" marL="0">
+              <a:buNone/>
+            </a:pPr>
+            <a:r>
+              <a:rPr lang="en-US" sz="1100" b="1" spc="200" kern="0" dirty="0">
+                <a:solidFill>
+                  <a:srgbClr val="C8742B"/>
+                </a:solidFill>
+                <a:latin typeface="Calibri" pitchFamily="34" charset="0"/>
+                <a:ea typeface="Calibri" pitchFamily="34" charset="-122"/>
+                <a:cs typeface="Calibri" pitchFamily="34" charset="-120"/>
+              </a:rPr>
+              <a:t>WHEN THE CASE CLOSES</a:t>
+            </a:r>
+            <a:endParaRPr lang="en-US" sz="1100" dirty="0"/>
+          </a:p>
+        </p:txBody>
+      </p:sp>
+      <p:sp>
+        <p:nvSpPr>
+          <p:cNvPr id="35" name="Text 33"/>
+          <p:cNvSpPr txBox="1"/>
+          <p:nvPr/>
+        </p:nvSpPr>
+        <p:spPr>
+          <a:xfrm>
+            <a:off x="8600237" y="2350008"/>
+            <a:ext cx="2722778" cy="384048"/>
+          </a:xfrm>
+          <a:prstGeom prst="rect">
+            <a:avLst/>
+          </a:prstGeom>
+          <a:noFill/>
+          <a:ln/>
+        </p:spPr>
+        <p:txBody>
+          <a:bodyPr wrap="square" lIns="0" tIns="0" rIns="0" bIns="0" rtlCol="0" anchor="ctr"/>
+          <a:lstStyle/>
+          <a:p>
+            <a:pPr indent="0" marL="0">
+              <a:buNone/>
+            </a:pPr>
+            <a:r>
+              <a:rPr lang="en-US" sz="1900" b="1" dirty="0">
+                <a:solidFill>
+                  <a:srgbClr val="14201B"/>
+                </a:solidFill>
+                <a:latin typeface="Calibri" pitchFamily="34" charset="0"/>
+                <a:ea typeface="Calibri" pitchFamily="34" charset="-122"/>
+                <a:cs typeface="Calibri" pitchFamily="34" charset="-120"/>
+              </a:rPr>
+              <a:t>Verdict</a:t>
+            </a:r>
+            <a:endParaRPr lang="en-US" sz="1900" dirty="0"/>
+          </a:p>
+        </p:txBody>
+      </p:sp>
+      <p:sp>
+        <p:nvSpPr>
+          <p:cNvPr id="36" name="Text 34"/>
+          <p:cNvSpPr txBox="1"/>
+          <p:nvPr/>
+        </p:nvSpPr>
+        <p:spPr>
+          <a:xfrm>
+            <a:off x="8600237" y="2788920"/>
+            <a:ext cx="2722778" cy="731520"/>
+          </a:xfrm>
+          <a:prstGeom prst="rect">
+            <a:avLst/>
+          </a:prstGeom>
+          <a:noFill/>
+          <a:ln/>
+        </p:spPr>
+        <p:txBody>
+          <a:bodyPr wrap="square" lIns="0" tIns="0" rIns="0" bIns="0" rtlCol="0" anchor="t"/>
+          <a:lstStyle/>
+          <a:p>
+            <a:pPr indent="0" marL="0">
+              <a:buNone/>
+            </a:pPr>
+            <a:r>
+              <a:rPr lang="en-US" sz="2000" i="1" dirty="0">
+                <a:solidFill>
+                  <a:srgbClr val="1F7A4D"/>
+                </a:solidFill>
+                <a:latin typeface="Cambria" pitchFamily="34" charset="0"/>
+                <a:ea typeface="Cambria" pitchFamily="34" charset="-122"/>
+                <a:cs typeface="Cambria" pitchFamily="34" charset="-120"/>
+              </a:rPr>
+              <a:t>Was the fix proved?</a:t>
+            </a:r>
+            <a:endParaRPr lang="en-US" sz="2000" dirty="0"/>
+          </a:p>
+        </p:txBody>
+      </p:sp>
+      <p:sp>
+        <p:nvSpPr>
+          <p:cNvPr id="37" name="Shape 35"/>
+          <p:cNvSpPr/>
+          <p:nvPr/>
+        </p:nvSpPr>
+        <p:spPr>
+          <a:xfrm>
+            <a:off x="8600237" y="3794760"/>
+            <a:ext cx="858825" cy="384048"/>
+          </a:xfrm>
+          <a:prstGeom prst="roundRect">
+            <a:avLst>
+              <a:gd name="adj" fmla="val 50000"/>
+            </a:avLst>
+          </a:prstGeom>
+          <a:solidFill>
+            <a:srgbClr val="0CA30C"/>
+          </a:solidFill>
+          <a:ln w="12700">
+            <a:solidFill>
+              <a:srgbClr val="0CA30C"/>
+            </a:solidFill>
+            <a:prstDash val="solid"/>
+          </a:ln>
+        </p:spPr>
+      </p:sp>
+      <p:sp>
+        <p:nvSpPr>
+          <p:cNvPr id="38" name="Text 36"/>
+          <p:cNvSpPr txBox="1"/>
+          <p:nvPr/>
+        </p:nvSpPr>
+        <p:spPr>
+          <a:xfrm>
+            <a:off x="8600237" y="3794760"/>
+            <a:ext cx="858825" cy="384048"/>
+          </a:xfrm>
+          <a:prstGeom prst="rect">
+            <a:avLst/>
+          </a:prstGeom>
+          <a:noFill/>
+          <a:ln/>
+        </p:spPr>
+        <p:txBody>
+          <a:bodyPr wrap="square" lIns="0" tIns="0" rIns="0" bIns="0" rtlCol="0" anchor="ctr"/>
+          <a:lstStyle/>
+          <a:p>
+            <a:pPr algn="ctr" indent="0" marL="0">
+              <a:buNone/>
+            </a:pPr>
+            <a:r>
+              <a:rPr lang="en-US" sz="950" b="1" dirty="0">
+                <a:solidFill>
+                  <a:srgbClr val="FFFFFF"/>
+                </a:solidFill>
+                <a:latin typeface="Calibri" pitchFamily="34" charset="0"/>
+                <a:ea typeface="Calibri" pitchFamily="34" charset="-122"/>
+                <a:cs typeface="Calibri" pitchFamily="34" charset="-120"/>
+              </a:rPr>
+              <a:t>CONFIRMED</a:t>
+            </a:r>
+            <a:endParaRPr lang="en-US" sz="950" dirty="0"/>
+          </a:p>
+        </p:txBody>
+      </p:sp>
+      <p:sp>
+        <p:nvSpPr>
+          <p:cNvPr id="39" name="Shape 37"/>
+          <p:cNvSpPr/>
+          <p:nvPr/>
+        </p:nvSpPr>
+        <p:spPr>
+          <a:xfrm>
+            <a:off x="9532214" y="3794760"/>
+            <a:ext cx="858825" cy="384048"/>
+          </a:xfrm>
+          <a:prstGeom prst="roundRect">
+            <a:avLst>
+              <a:gd name="adj" fmla="val 50000"/>
+            </a:avLst>
+          </a:prstGeom>
+          <a:solidFill>
+            <a:srgbClr val="D08A00"/>
+          </a:solidFill>
+          <a:ln w="12700">
+            <a:solidFill>
+              <a:srgbClr val="D08A00"/>
+            </a:solidFill>
+            <a:prstDash val="solid"/>
+          </a:ln>
+        </p:spPr>
+      </p:sp>
+      <p:sp>
+        <p:nvSpPr>
+          <p:cNvPr id="40" name="Text 38"/>
+          <p:cNvSpPr txBox="1"/>
+          <p:nvPr/>
+        </p:nvSpPr>
+        <p:spPr>
+          <a:xfrm>
+            <a:off x="9532214" y="3794760"/>
+            <a:ext cx="858825" cy="384048"/>
+          </a:xfrm>
+          <a:prstGeom prst="rect">
+            <a:avLst/>
+          </a:prstGeom>
+          <a:noFill/>
+          <a:ln/>
+        </p:spPr>
+        <p:txBody>
+          <a:bodyPr wrap="square" lIns="0" tIns="0" rIns="0" bIns="0" rtlCol="0" anchor="ctr"/>
+          <a:lstStyle/>
+          <a:p>
+            <a:pPr algn="ctr" indent="0" marL="0">
+              <a:buNone/>
+            </a:pPr>
+            <a:r>
+              <a:rPr lang="en-US" sz="950" b="1" dirty="0">
+                <a:solidFill>
+                  <a:srgbClr val="FFFFFF"/>
+                </a:solidFill>
+                <a:latin typeface="Calibri" pitchFamily="34" charset="0"/>
+                <a:ea typeface="Calibri" pitchFamily="34" charset="-122"/>
+                <a:cs typeface="Calibri" pitchFamily="34" charset="-120"/>
+              </a:rPr>
+              <a:t>PLAUSIBLE</a:t>
+            </a:r>
+            <a:endParaRPr lang="en-US" sz="950" dirty="0"/>
+          </a:p>
+        </p:txBody>
+      </p:sp>
+      <p:sp>
+        <p:nvSpPr>
+          <p:cNvPr id="41" name="Shape 39"/>
+          <p:cNvSpPr/>
+          <p:nvPr/>
+        </p:nvSpPr>
+        <p:spPr>
+          <a:xfrm>
+            <a:off x="10464190" y="3794760"/>
+            <a:ext cx="858825" cy="384048"/>
+          </a:xfrm>
+          <a:prstGeom prst="roundRect">
+            <a:avLst>
+              <a:gd name="adj" fmla="val 50000"/>
+            </a:avLst>
+          </a:prstGeom>
+          <a:solidFill>
+            <a:srgbClr val="8A8984"/>
+          </a:solidFill>
+          <a:ln w="12700">
+            <a:solidFill>
+              <a:srgbClr val="8A8984"/>
+            </a:solidFill>
+            <a:prstDash val="solid"/>
+          </a:ln>
+        </p:spPr>
+      </p:sp>
+      <p:sp>
+        <p:nvSpPr>
+          <p:cNvPr id="42" name="Text 40"/>
+          <p:cNvSpPr txBox="1"/>
+          <p:nvPr/>
+        </p:nvSpPr>
+        <p:spPr>
+          <a:xfrm>
+            <a:off x="10464190" y="3794760"/>
+            <a:ext cx="858825" cy="384048"/>
+          </a:xfrm>
+          <a:prstGeom prst="rect">
+            <a:avLst/>
+          </a:prstGeom>
+          <a:noFill/>
+          <a:ln/>
+        </p:spPr>
+        <p:txBody>
+          <a:bodyPr wrap="square" lIns="0" tIns="0" rIns="0" bIns="0" rtlCol="0" anchor="ctr"/>
+          <a:lstStyle/>
+          <a:p>
+            <a:pPr algn="ctr" indent="0" marL="0">
+              <a:buNone/>
+            </a:pPr>
+            <a:r>
+              <a:rPr lang="en-US" sz="950" b="1" dirty="0">
+                <a:solidFill>
+                  <a:srgbClr val="FFFFFF"/>
+                </a:solidFill>
+                <a:latin typeface="Calibri" pitchFamily="34" charset="0"/>
+                <a:ea typeface="Calibri" pitchFamily="34" charset="-122"/>
+                <a:cs typeface="Calibri" pitchFamily="34" charset="-120"/>
+              </a:rPr>
+              <a:t>UNVERIFIED</a:t>
+            </a:r>
+            <a:endParaRPr lang="en-US" sz="950" dirty="0"/>
+          </a:p>
+        </p:txBody>
+      </p:sp>
+      <p:sp>
+        <p:nvSpPr>
+          <p:cNvPr id="43" name="Text 41"/>
+          <p:cNvSpPr txBox="1"/>
+          <p:nvPr/>
+        </p:nvSpPr>
+        <p:spPr>
+          <a:xfrm>
+            <a:off x="8600237" y="4572000"/>
+            <a:ext cx="2722778" cy="777240"/>
+          </a:xfrm>
+          <a:prstGeom prst="rect">
+            <a:avLst/>
+          </a:prstGeom>
+          <a:noFill/>
+          <a:ln/>
+        </p:spPr>
+        <p:txBody>
+          <a:bodyPr wrap="square" lIns="0" tIns="0" rIns="0" bIns="0" rtlCol="0" anchor="t"/>
+          <a:lstStyle/>
+          <a:p>
+            <a:pPr indent="0" marL="0">
+              <a:buNone/>
+            </a:pPr>
+            <a:r>
+              <a:rPr lang="en-US" sz="1300" b="1" dirty="0">
+                <a:solidFill>
+                  <a:srgbClr val="14201B"/>
+                </a:solidFill>
+                <a:latin typeface="Calibri" pitchFamily="34" charset="0"/>
+                <a:ea typeface="Calibri" pitchFamily="34" charset="-122"/>
+                <a:cs typeface="Calibri" pitchFamily="34" charset="-120"/>
+              </a:rPr>
+              <a:t>Decided by: </a:t>
+            </a:r>
+            <a:pPr indent="0" marL="0">
+              <a:buNone/>
+            </a:pPr>
+            <a:r>
+              <a:rPr lang="en-US" sz="1300" dirty="0">
+                <a:solidFill>
+                  <a:srgbClr val="4A5751"/>
+                </a:solidFill>
+                <a:latin typeface="Calibri" pitchFamily="34" charset="0"/>
+                <a:ea typeface="Calibri" pitchFamily="34" charset="-122"/>
+                <a:cs typeface="Calibri" pitchFamily="34" charset="-120"/>
+              </a:rPr>
+              <a:t>Five conditions, read from the check log and a re-measured photo</a:t>
+            </a:r>
+            <a:endParaRPr lang="en-US" sz="1300" dirty="0"/>
+          </a:p>
+        </p:txBody>
+      </p:sp>
+      <p:sp>
+        <p:nvSpPr>
+          <p:cNvPr id="44" name="Text 42"/>
+          <p:cNvSpPr txBox="1"/>
+          <p:nvPr/>
+        </p:nvSpPr>
+        <p:spPr>
+          <a:xfrm>
+            <a:off x="8600237" y="5394960"/>
+            <a:ext cx="2722778" cy="256032"/>
+          </a:xfrm>
+          <a:prstGeom prst="rect">
+            <a:avLst/>
+          </a:prstGeom>
+          <a:noFill/>
+          <a:ln/>
+        </p:spPr>
+        <p:txBody>
+          <a:bodyPr wrap="square" lIns="0" tIns="0" rIns="0" bIns="0" rtlCol="0" anchor="ctr"/>
+          <a:lstStyle/>
+          <a:p>
+            <a:pPr indent="0" marL="0">
+              <a:buNone/>
+            </a:pPr>
+            <a:r>
+              <a:rPr lang="en-US" sz="1100" dirty="0">
+                <a:solidFill>
+                  <a:srgbClr val="7B8781"/>
+                </a:solidFill>
+                <a:latin typeface="Calibri" pitchFamily="34" charset="0"/>
+                <a:ea typeface="Calibri" pitchFamily="34" charset="-122"/>
+                <a:cs typeface="Calibri" pitchFamily="34" charset="-120"/>
+              </a:rPr>
+              <a:t>Detail: B3</a:t>
+            </a:r>
+            <a:endParaRPr lang="en-US" sz="1100" dirty="0"/>
+          </a:p>
+        </p:txBody>
+      </p:sp>
+      <p:sp>
+        <p:nvSpPr>
+          <p:cNvPr id="45" name="Text 43"/>
+          <p:cNvSpPr txBox="1"/>
+          <p:nvPr/>
+        </p:nvSpPr>
+        <p:spPr>
+          <a:xfrm>
+            <a:off x="548640" y="5989320"/>
+            <a:ext cx="11094415" cy="411480"/>
+          </a:xfrm>
+          <a:prstGeom prst="rect">
+            <a:avLst/>
+          </a:prstGeom>
+          <a:noFill/>
+          <a:ln/>
+        </p:spPr>
+        <p:txBody>
+          <a:bodyPr wrap="square" lIns="0" tIns="0" rIns="0" bIns="0" rtlCol="0" anchor="ctr"/>
+          <a:lstStyle/>
+          <a:p>
+            <a:pPr indent="0" marL="0">
+              <a:buNone/>
+            </a:pPr>
+            <a:r>
+              <a:rPr lang="en-US" sz="1800" i="1" dirty="0">
+                <a:solidFill>
+                  <a:srgbClr val="1F7A4D"/>
+                </a:solidFill>
+                <a:latin typeface="Cambria" pitchFamily="34" charset="0"/>
+                <a:ea typeface="Cambria" pitchFamily="34" charset="-122"/>
+                <a:cs typeface="Cambria" pitchFamily="34" charset="-120"/>
+              </a:rPr>
+              <a:t>Separate answers: the quality score never sets the tier, and T1 is not CONFIRMED.</a:t>
+            </a:r>
+            <a:endParaRPr lang="en-US" sz="1800" dirty="0"/>
+          </a:p>
+        </p:txBody>
+      </p:sp>
+    </p:spTree>
+  </p:cSld>
+  <p:clrMapOvr>
+    <a:masterClrMapping/>
+  </p:clrMapOvr>
+</p:sld>
+</file>
+
+<file path=ppt/slides/slide16.xml><?xml version="1.0" encoding="utf-8"?>
+<p:sld xmlns:a="http://schemas.openxmlformats.org/drawingml/2006/main" xmlns:r="http://schemas.openxmlformats.org/officeDocument/2006/relationships" xmlns:p="http://schemas.openxmlformats.org/presentationml/2006/main">
+  <p:cSld name="Slide 16">
+    <p:bg>
+      <p:bgPr>
+        <a:solidFill>
+          <a:srgbClr val="FFFFFF"/>
+        </a:solidFill>
+      </p:bgPr>
+    </p:bg>
+    <p:spTree>
+      <p:nvGrpSpPr>
+        <p:cNvPr id="1" name=""/>
+        <p:cNvGrpSpPr/>
+        <p:nvPr/>
+      </p:nvGrpSpPr>
+      <p:grpSpPr>
+        <a:xfrm>
+          <a:off x="0" y="0"/>
+          <a:ext cx="0" cy="0"/>
+          <a:chOff x="0" y="0"/>
+          <a:chExt cx="0" cy="0"/>
+        </a:xfrm>
+      </p:grpSpPr>
+      <p:sp>
+        <p:nvSpPr>
+          <p:cNvPr id="2" name="Text 0"/>
+          <p:cNvSpPr txBox="1"/>
+          <p:nvPr/>
+        </p:nvSpPr>
+        <p:spPr>
+          <a:xfrm>
+            <a:off x="548640" y="384048"/>
+            <a:ext cx="8229600" cy="274320"/>
+          </a:xfrm>
+          <a:prstGeom prst="rect">
+            <a:avLst/>
+          </a:prstGeom>
+          <a:noFill/>
+          <a:ln/>
+        </p:spPr>
+        <p:txBody>
+          <a:bodyPr wrap="square" lIns="0" tIns="0" rIns="0" bIns="0" rtlCol="0" anchor="ctr"/>
+          <a:lstStyle/>
+          <a:p>
+            <a:pPr indent="0" marL="0">
+              <a:buNone/>
+            </a:pPr>
+            <a:r>
+              <a:rPr lang="en-US" sz="1200" b="1" spc="300" kern="0" dirty="0">
+                <a:solidFill>
+                  <a:srgbClr val="7B8781"/>
+                </a:solidFill>
+                <a:latin typeface="Calibri" pitchFamily="34" charset="0"/>
+                <a:ea typeface="Calibri" pitchFamily="34" charset="-122"/>
+                <a:cs typeface="Calibri" pitchFamily="34" charset="-120"/>
+              </a:rPr>
+              <a:t>BACKUP · BONUS 2 · DISPENSING QUALITY</a:t>
+            </a:r>
+            <a:endParaRPr lang="en-US" sz="1200" dirty="0"/>
+          </a:p>
+        </p:txBody>
+      </p:sp>
+      <p:sp>
+        <p:nvSpPr>
+          <p:cNvPr id="3" name="Text 1"/>
+          <p:cNvSpPr txBox="1"/>
+          <p:nvPr/>
+        </p:nvSpPr>
+        <p:spPr>
+          <a:xfrm>
+            <a:off x="548640" y="658368"/>
+            <a:ext cx="11094415" cy="1005840"/>
+          </a:xfrm>
+          <a:prstGeom prst="rect">
+            <a:avLst/>
+          </a:prstGeom>
+          <a:noFill/>
+          <a:ln/>
+        </p:spPr>
+        <p:txBody>
+          <a:bodyPr wrap="square" lIns="0" tIns="0" rIns="0" bIns="0" rtlCol="0" anchor="t">
+            <a:normAutofit/>
+          </a:bodyPr>
+          <a:lstStyle/>
+          <a:p>
+            <a:pPr indent="0" marL="0">
+              <a:buNone/>
+            </a:pPr>
+            <a:r>
+              <a:rPr lang="en-US" sz="3000" b="1" dirty="0">
+                <a:solidFill>
+                  <a:srgbClr val="14201B"/>
+                </a:solidFill>
+                <a:latin typeface="Cambria" pitchFamily="34" charset="0"/>
+                <a:ea typeface="Cambria" pitchFamily="34" charset="-122"/>
+                <a:cs typeface="Cambria" pitchFamily="34" charset="-120"/>
+              </a:rPr>
+              <a:t>A quality score you can check by counting the dots</a:t>
+            </a:r>
+            <a:endParaRPr lang="en-US" sz="3000" dirty="0"/>
+          </a:p>
+        </p:txBody>
+      </p:sp>
+      <p:pic>
+        <p:nvPicPr>
+          <p:cNvPr id="4" name="Image 0" descr="Annotated test photo: 15 dots, 3 ringed green as within size spec, 12 ringed red as under, over or inconsistent">    </p:cNvPr>
+          <p:cNvPicPr>
+            <a:picLocks noChangeAspect="1"/>
+          </p:cNvPicPr>
+          <p:nvPr/>
+        </p:nvPicPr>
+        <p:blipFill>
+          <a:blip r:embed="rId1"/>
+          <a:stretch>
+            <a:fillRect/>
+          </a:stretch>
+        </p:blipFill>
+        <p:spPr>
+          <a:xfrm>
+            <a:off x="548640" y="1783080"/>
+            <a:ext cx="4937760" cy="3202871"/>
+          </a:xfrm>
+          <a:prstGeom prst="rect">
+            <a:avLst/>
+          </a:prstGeom>
+          <a:effectLst>
+            <a:outerShdw sx="100000" sy="100000" kx="0" ky="0" algn="bl" rotWithShape="0" blurRad="127000" dist="25400" dir="5400000">
+              <a:srgbClr val="000000">
+                <a:alpha val="16000"/>
+              </a:srgbClr>
+            </a:outerShdw>
+          </a:effectLst>
+        </p:spPr>
+      </p:pic>
+      <p:sp>
+        <p:nvSpPr>
+          <p:cNvPr id="5" name="Text 2"/>
+          <p:cNvSpPr txBox="1"/>
+          <p:nvPr/>
+        </p:nvSpPr>
+        <p:spPr>
+          <a:xfrm>
+            <a:off x="548640" y="5095679"/>
+            <a:ext cx="4937760" cy="411480"/>
+          </a:xfrm>
+          <a:prstGeom prst="rect">
+            <a:avLst/>
+          </a:prstGeom>
+          <a:noFill/>
+          <a:ln/>
+        </p:spPr>
+        <p:txBody>
+          <a:bodyPr wrap="square" lIns="0" tIns="0" rIns="0" bIns="0" rtlCol="0" anchor="t"/>
+          <a:lstStyle/>
+          <a:p>
+            <a:pPr indent="0" marL="0">
+              <a:buNone/>
+            </a:pPr>
+            <a:r>
+              <a:rPr lang="en-US" sz="1200" dirty="0">
+                <a:solidFill>
+                  <a:srgbClr val="4A5751"/>
+                </a:solidFill>
+                <a:latin typeface="Calibri" pitchFamily="34" charset="0"/>
+                <a:ea typeface="Calibri" pitchFamily="34" charset="-122"/>
+                <a:cs typeface="Calibri" pitchFamily="34" charset="-120"/>
+              </a:rPr>
+              <a:t>Real output on a test photo with scattered sizes: the 3 green rings are the only dots within 15% of the nominal size.</a:t>
+            </a:r>
+            <a:endParaRPr lang="en-US" sz="1200" dirty="0"/>
+          </a:p>
+        </p:txBody>
+      </p:sp>
+      <p:sp>
+        <p:nvSpPr>
+          <p:cNvPr id="6" name="Shape 3"/>
+          <p:cNvSpPr/>
+          <p:nvPr/>
+        </p:nvSpPr>
+        <p:spPr>
+          <a:xfrm>
+            <a:off x="5852160" y="1783080"/>
+            <a:ext cx="5790895" cy="3202871"/>
+          </a:xfrm>
+          <a:prstGeom prst="roundRect">
+            <a:avLst>
+              <a:gd name="adj" fmla="val 3426"/>
+            </a:avLst>
+          </a:prstGeom>
+          <a:solidFill>
+            <a:srgbClr val="EEF5F1"/>
+          </a:solidFill>
+          <a:ln w="12700">
+            <a:solidFill>
+              <a:srgbClr val="EEF5F1"/>
+            </a:solidFill>
+            <a:prstDash val="solid"/>
+          </a:ln>
+        </p:spPr>
+      </p:sp>
+      <p:sp>
+        <p:nvSpPr>
+          <p:cNvPr id="7" name="Text 4"/>
+          <p:cNvSpPr txBox="1"/>
+          <p:nvPr/>
+        </p:nvSpPr>
+        <p:spPr>
+          <a:xfrm>
+            <a:off x="6172200" y="2011680"/>
+            <a:ext cx="2926080" cy="384048"/>
+          </a:xfrm>
+          <a:prstGeom prst="rect">
+            <a:avLst/>
+          </a:prstGeom>
+          <a:noFill/>
+          <a:ln/>
+        </p:spPr>
+        <p:txBody>
+          <a:bodyPr wrap="square" lIns="0" tIns="0" rIns="0" bIns="0" rtlCol="0" anchor="ctr"/>
+          <a:lstStyle/>
+          <a:p>
+            <a:pPr indent="0" marL="0">
+              <a:buNone/>
+            </a:pPr>
+            <a:r>
+              <a:rPr lang="en-US" sz="1600" b="1" dirty="0">
+                <a:solidFill>
+                  <a:srgbClr val="14201B"/>
+                </a:solidFill>
+                <a:latin typeface="Calibri" pitchFamily="34" charset="0"/>
+                <a:ea typeface="Calibri" pitchFamily="34" charset="-122"/>
+                <a:cs typeface="Calibri" pitchFamily="34" charset="-120"/>
+              </a:rPr>
+              <a:t>Dispensing quality</a:t>
+            </a:r>
+            <a:endParaRPr lang="en-US" sz="1600" dirty="0"/>
+          </a:p>
+        </p:txBody>
+      </p:sp>
+      <p:sp>
+        <p:nvSpPr>
+          <p:cNvPr id="8" name="Text 5"/>
+          <p:cNvSpPr txBox="1"/>
+          <p:nvPr/>
+        </p:nvSpPr>
+        <p:spPr>
+          <a:xfrm>
+            <a:off x="9494215" y="1837944"/>
+            <a:ext cx="1828800" cy="585216"/>
+          </a:xfrm>
+          <a:prstGeom prst="rect">
+            <a:avLst/>
+          </a:prstGeom>
+          <a:noFill/>
+          <a:ln/>
+        </p:spPr>
+        <p:txBody>
+          <a:bodyPr wrap="square" lIns="0" tIns="0" rIns="0" bIns="0" rtlCol="0" anchor="b"/>
+          <a:lstStyle/>
+          <a:p>
+            <a:pPr algn="r" indent="0" marL="0">
+              <a:buNone/>
+            </a:pPr>
+            <a:r>
+              <a:rPr lang="en-US" sz="3600" b="1" dirty="0">
+                <a:solidFill>
+                  <a:srgbClr val="C8742B"/>
+                </a:solidFill>
+                <a:latin typeface="Calibri" pitchFamily="34" charset="0"/>
+                <a:ea typeface="Calibri" pitchFamily="34" charset="-122"/>
+                <a:cs typeface="Calibri" pitchFamily="34" charset="-120"/>
+              </a:rPr>
+              <a:t>20</a:t>
+            </a:r>
+            <a:pPr algn="r" indent="0" marL="0">
+              <a:buNone/>
+            </a:pPr>
+            <a:r>
+              <a:rPr lang="en-US" sz="1600" dirty="0">
+                <a:solidFill>
+                  <a:srgbClr val="7B8781"/>
+                </a:solidFill>
+                <a:latin typeface="Calibri" pitchFamily="34" charset="0"/>
+                <a:ea typeface="Calibri" pitchFamily="34" charset="-122"/>
+                <a:cs typeface="Calibri" pitchFamily="34" charset="-120"/>
+              </a:rPr>
+              <a:t>/100</a:t>
+            </a:r>
+            <a:endParaRPr lang="en-US" sz="3600" dirty="0"/>
+          </a:p>
+        </p:txBody>
+      </p:sp>
+      <p:sp>
+        <p:nvSpPr>
+          <p:cNvPr id="9" name="Text 6"/>
+          <p:cNvSpPr txBox="1"/>
+          <p:nvPr/>
+        </p:nvSpPr>
+        <p:spPr>
+          <a:xfrm>
+            <a:off x="9037015" y="2441448"/>
+            <a:ext cx="2286000" cy="219456"/>
+          </a:xfrm>
+          <a:prstGeom prst="rect">
+            <a:avLst/>
+          </a:prstGeom>
+          <a:noFill/>
+          <a:ln/>
+        </p:spPr>
+        <p:txBody>
+          <a:bodyPr wrap="square" lIns="0" tIns="0" rIns="0" bIns="0" rtlCol="0" anchor="ctr"/>
+          <a:lstStyle/>
+          <a:p>
+            <a:pPr algn="r" indent="0" marL="0">
+              <a:buNone/>
+            </a:pPr>
+            <a:r>
+              <a:rPr lang="en-US" sz="1100" dirty="0">
+                <a:solidFill>
+                  <a:srgbClr val="7B8781"/>
+                </a:solidFill>
+                <a:latin typeface="Calibri" pitchFamily="34" charset="0"/>
+                <a:ea typeface="Calibri" pitchFamily="34" charset="-122"/>
+                <a:cs typeface="Calibri" pitchFamily="34" charset="-120"/>
+              </a:rPr>
+              <a:t>3 of 15 dots pass all four</a:t>
+            </a:r>
+            <a:endParaRPr lang="en-US" sz="1100" dirty="0"/>
+          </a:p>
+        </p:txBody>
+      </p:sp>
+      <p:sp>
+        <p:nvSpPr>
+          <p:cNvPr id="10" name="Text 7"/>
+          <p:cNvSpPr txBox="1"/>
+          <p:nvPr/>
+        </p:nvSpPr>
+        <p:spPr>
+          <a:xfrm>
+            <a:off x="6172200" y="2770632"/>
+            <a:ext cx="2560320" cy="274320"/>
+          </a:xfrm>
+          <a:prstGeom prst="rect">
+            <a:avLst/>
+          </a:prstGeom>
+          <a:noFill/>
+          <a:ln/>
+        </p:spPr>
+        <p:txBody>
+          <a:bodyPr wrap="square" lIns="0" tIns="0" rIns="0" bIns="0" rtlCol="0" anchor="ctr"/>
+          <a:lstStyle/>
+          <a:p>
+            <a:pPr indent="0" marL="0">
+              <a:buNone/>
+            </a:pPr>
+            <a:r>
+              <a:rPr lang="en-US" sz="1400" b="1" dirty="0">
+                <a:solidFill>
+                  <a:srgbClr val="14201B"/>
+                </a:solidFill>
+                <a:latin typeface="Calibri" pitchFamily="34" charset="0"/>
+                <a:ea typeface="Calibri" pitchFamily="34" charset="-122"/>
+                <a:cs typeface="Calibri" pitchFamily="34" charset="-120"/>
+              </a:rPr>
+              <a:t>Completeness</a:t>
+            </a:r>
+            <a:endParaRPr lang="en-US" sz="1400" dirty="0"/>
+          </a:p>
+        </p:txBody>
+      </p:sp>
+      <p:sp>
+        <p:nvSpPr>
+          <p:cNvPr id="11" name="Shape 8"/>
+          <p:cNvSpPr/>
+          <p:nvPr/>
+        </p:nvSpPr>
+        <p:spPr>
+          <a:xfrm>
+            <a:off x="10006279" y="2798064"/>
+            <a:ext cx="219456" cy="219456"/>
+          </a:xfrm>
+          <a:prstGeom prst="star5">
+            <a:avLst/>
+          </a:prstGeom>
+          <a:solidFill>
+            <a:srgbClr val="F2A71B"/>
+          </a:solidFill>
+          <a:ln w="12700">
+            <a:solidFill>
+              <a:srgbClr val="F2A71B"/>
+            </a:solidFill>
+            <a:prstDash val="solid"/>
+          </a:ln>
+        </p:spPr>
+      </p:sp>
+      <p:sp>
+        <p:nvSpPr>
+          <p:cNvPr id="12" name="Shape 9"/>
+          <p:cNvSpPr/>
+          <p:nvPr/>
+        </p:nvSpPr>
+        <p:spPr>
+          <a:xfrm>
+            <a:off x="10280599" y="2798064"/>
+            <a:ext cx="219456" cy="219456"/>
+          </a:xfrm>
+          <a:prstGeom prst="star5">
+            <a:avLst/>
+          </a:prstGeom>
+          <a:solidFill>
+            <a:srgbClr val="F2A71B"/>
+          </a:solidFill>
+          <a:ln w="12700">
+            <a:solidFill>
+              <a:srgbClr val="F2A71B"/>
+            </a:solidFill>
+            <a:prstDash val="solid"/>
+          </a:ln>
+        </p:spPr>
+      </p:sp>
+      <p:sp>
+        <p:nvSpPr>
+          <p:cNvPr id="13" name="Shape 10"/>
+          <p:cNvSpPr/>
+          <p:nvPr/>
+        </p:nvSpPr>
+        <p:spPr>
+          <a:xfrm>
+            <a:off x="10554919" y="2798064"/>
+            <a:ext cx="219456" cy="219456"/>
+          </a:xfrm>
+          <a:prstGeom prst="star5">
+            <a:avLst/>
+          </a:prstGeom>
+          <a:solidFill>
+            <a:srgbClr val="F2A71B"/>
+          </a:solidFill>
+          <a:ln w="12700">
+            <a:solidFill>
+              <a:srgbClr val="F2A71B"/>
+            </a:solidFill>
+            <a:prstDash val="solid"/>
+          </a:ln>
+        </p:spPr>
+      </p:sp>
+      <p:sp>
+        <p:nvSpPr>
+          <p:cNvPr id="14" name="Shape 11"/>
+          <p:cNvSpPr/>
+          <p:nvPr/>
+        </p:nvSpPr>
+        <p:spPr>
+          <a:xfrm>
+            <a:off x="10829239" y="2798064"/>
+            <a:ext cx="219456" cy="219456"/>
+          </a:xfrm>
+          <a:prstGeom prst="star5">
+            <a:avLst/>
+          </a:prstGeom>
+          <a:solidFill>
+            <a:srgbClr val="F2A71B"/>
+          </a:solidFill>
+          <a:ln w="12700">
+            <a:solidFill>
+              <a:srgbClr val="F2A71B"/>
+            </a:solidFill>
+            <a:prstDash val="solid"/>
+          </a:ln>
+        </p:spPr>
+      </p:sp>
+      <p:sp>
+        <p:nvSpPr>
+          <p:cNvPr id="15" name="Shape 12"/>
+          <p:cNvSpPr/>
+          <p:nvPr/>
+        </p:nvSpPr>
+        <p:spPr>
+          <a:xfrm>
+            <a:off x="11103559" y="2798064"/>
+            <a:ext cx="219456" cy="219456"/>
+          </a:xfrm>
+          <a:prstGeom prst="star5">
+            <a:avLst/>
+          </a:prstGeom>
+          <a:solidFill>
+            <a:srgbClr val="F2A71B"/>
+          </a:solidFill>
+          <a:ln w="12700">
+            <a:solidFill>
+              <a:srgbClr val="F2A71B"/>
+            </a:solidFill>
+            <a:prstDash val="solid"/>
+          </a:ln>
+        </p:spPr>
+      </p:sp>
+      <p:sp>
+        <p:nvSpPr>
+          <p:cNvPr id="16" name="Text 13"/>
+          <p:cNvSpPr txBox="1"/>
+          <p:nvPr/>
+        </p:nvSpPr>
+        <p:spPr>
+          <a:xfrm>
+            <a:off x="6172200" y="3044952"/>
+            <a:ext cx="5150815" cy="219456"/>
+          </a:xfrm>
+          <a:prstGeom prst="rect">
+            <a:avLst/>
+          </a:prstGeom>
+          <a:noFill/>
+          <a:ln/>
+        </p:spPr>
+        <p:txBody>
+          <a:bodyPr wrap="square" lIns="0" tIns="0" rIns="0" bIns="0" rtlCol="0" anchor="t"/>
+          <a:lstStyle/>
+          <a:p>
+            <a:pPr indent="0" marL="0">
+              <a:buNone/>
+            </a:pPr>
+            <a:r>
+              <a:rPr lang="en-US" sz="1200" dirty="0">
+                <a:solidFill>
+                  <a:srgbClr val="4A5751"/>
+                </a:solidFill>
+                <a:latin typeface="Calibri" pitchFamily="34" charset="0"/>
+                <a:ea typeface="Calibri" pitchFamily="34" charset="-122"/>
+                <a:cs typeface="Calibri" pitchFamily="34" charset="-120"/>
+              </a:rPr>
+              <a:t>15 of 15 deposits present</a:t>
+            </a:r>
+            <a:endParaRPr lang="en-US" sz="1200" dirty="0"/>
+          </a:p>
+        </p:txBody>
+      </p:sp>
+      <p:sp>
+        <p:nvSpPr>
+          <p:cNvPr id="17" name="Text 14"/>
+          <p:cNvSpPr txBox="1"/>
+          <p:nvPr/>
+        </p:nvSpPr>
+        <p:spPr>
+          <a:xfrm>
+            <a:off x="6172200" y="3319272"/>
+            <a:ext cx="2560320" cy="274320"/>
+          </a:xfrm>
+          <a:prstGeom prst="rect">
+            <a:avLst/>
+          </a:prstGeom>
+          <a:noFill/>
+          <a:ln/>
+        </p:spPr>
+        <p:txBody>
+          <a:bodyPr wrap="square" lIns="0" tIns="0" rIns="0" bIns="0" rtlCol="0" anchor="ctr"/>
+          <a:lstStyle/>
+          <a:p>
+            <a:pPr indent="0" marL="0">
+              <a:buNone/>
+            </a:pPr>
+            <a:r>
+              <a:rPr lang="en-US" sz="1400" b="1" dirty="0">
+                <a:solidFill>
+                  <a:srgbClr val="14201B"/>
+                </a:solidFill>
+                <a:latin typeface="Calibri" pitchFamily="34" charset="0"/>
+                <a:ea typeface="Calibri" pitchFamily="34" charset="-122"/>
+                <a:cs typeface="Calibri" pitchFamily="34" charset="-120"/>
+              </a:rPr>
+              <a:t>Size consistency</a:t>
+            </a:r>
+            <a:endParaRPr lang="en-US" sz="1400" dirty="0"/>
+          </a:p>
+        </p:txBody>
+      </p:sp>
+      <p:sp>
+        <p:nvSpPr>
+          <p:cNvPr id="18" name="Shape 15"/>
+          <p:cNvSpPr/>
+          <p:nvPr/>
+        </p:nvSpPr>
+        <p:spPr>
+          <a:xfrm>
+            <a:off x="10006279" y="3346704"/>
+            <a:ext cx="219456" cy="219456"/>
+          </a:xfrm>
+          <a:prstGeom prst="star5">
+            <a:avLst/>
+          </a:prstGeom>
+          <a:solidFill>
+            <a:srgbClr val="F2A71B"/>
+          </a:solidFill>
+          <a:ln w="12700">
+            <a:solidFill>
+              <a:srgbClr val="F2A71B"/>
+            </a:solidFill>
+            <a:prstDash val="solid"/>
+          </a:ln>
+        </p:spPr>
+      </p:sp>
+      <p:sp>
+        <p:nvSpPr>
+          <p:cNvPr id="19" name="Shape 16"/>
+          <p:cNvSpPr/>
+          <p:nvPr/>
+        </p:nvSpPr>
+        <p:spPr>
+          <a:xfrm>
+            <a:off x="10280599" y="3346704"/>
+            <a:ext cx="219456" cy="219456"/>
+          </a:xfrm>
+          <a:prstGeom prst="star5">
+            <a:avLst/>
+          </a:prstGeom>
+          <a:solidFill>
+            <a:srgbClr val="D3DAD6"/>
+          </a:solidFill>
+          <a:ln w="12700">
+            <a:solidFill>
+              <a:srgbClr val="D3DAD6"/>
+            </a:solidFill>
+            <a:prstDash val="solid"/>
+          </a:ln>
+        </p:spPr>
+      </p:sp>
+      <p:sp>
+        <p:nvSpPr>
+          <p:cNvPr id="20" name="Shape 17"/>
+          <p:cNvSpPr/>
+          <p:nvPr/>
+        </p:nvSpPr>
+        <p:spPr>
+          <a:xfrm>
+            <a:off x="10554919" y="3346704"/>
+            <a:ext cx="219456" cy="219456"/>
+          </a:xfrm>
+          <a:prstGeom prst="star5">
+            <a:avLst/>
+          </a:prstGeom>
+          <a:solidFill>
+            <a:srgbClr val="D3DAD6"/>
+          </a:solidFill>
+          <a:ln w="12700">
+            <a:solidFill>
+              <a:srgbClr val="D3DAD6"/>
+            </a:solidFill>
+            <a:prstDash val="solid"/>
+          </a:ln>
+        </p:spPr>
+      </p:sp>
+      <p:sp>
+        <p:nvSpPr>
+          <p:cNvPr id="21" name="Shape 18"/>
+          <p:cNvSpPr/>
+          <p:nvPr/>
+        </p:nvSpPr>
+        <p:spPr>
+          <a:xfrm>
+            <a:off x="10829239" y="3346704"/>
+            <a:ext cx="219456" cy="219456"/>
+          </a:xfrm>
+          <a:prstGeom prst="star5">
+            <a:avLst/>
+          </a:prstGeom>
+          <a:solidFill>
+            <a:srgbClr val="D3DAD6"/>
+          </a:solidFill>
+          <a:ln w="12700">
+            <a:solidFill>
+              <a:srgbClr val="D3DAD6"/>
+            </a:solidFill>
+            <a:prstDash val="solid"/>
+          </a:ln>
+        </p:spPr>
+      </p:sp>
+      <p:sp>
+        <p:nvSpPr>
+          <p:cNvPr id="22" name="Shape 19"/>
+          <p:cNvSpPr/>
+          <p:nvPr/>
+        </p:nvSpPr>
+        <p:spPr>
+          <a:xfrm>
+            <a:off x="11103559" y="3346704"/>
+            <a:ext cx="219456" cy="219456"/>
+          </a:xfrm>
+          <a:prstGeom prst="star5">
+            <a:avLst/>
+          </a:prstGeom>
+          <a:solidFill>
+            <a:srgbClr val="D3DAD6"/>
+          </a:solidFill>
+          <a:ln w="12700">
+            <a:solidFill>
+              <a:srgbClr val="D3DAD6"/>
+            </a:solidFill>
+            <a:prstDash val="solid"/>
+          </a:ln>
+        </p:spPr>
+      </p:sp>
+      <p:sp>
+        <p:nvSpPr>
+          <p:cNvPr id="23" name="Text 20"/>
+          <p:cNvSpPr txBox="1"/>
+          <p:nvPr/>
+        </p:nvSpPr>
+        <p:spPr>
+          <a:xfrm>
+            <a:off x="6172200" y="3593592"/>
+            <a:ext cx="5150815" cy="219456"/>
+          </a:xfrm>
+          <a:prstGeom prst="rect">
+            <a:avLst/>
+          </a:prstGeom>
+          <a:noFill/>
+          <a:ln/>
+        </p:spPr>
+        <p:txBody>
+          <a:bodyPr wrap="square" lIns="0" tIns="0" rIns="0" bIns="0" rtlCol="0" anchor="t"/>
+          <a:lstStyle/>
+          <a:p>
+            <a:pPr indent="0" marL="0">
+              <a:buNone/>
+            </a:pPr>
+            <a:r>
+              <a:rPr lang="en-US" sz="1200" dirty="0">
+                <a:solidFill>
+                  <a:srgbClr val="4A5751"/>
+                </a:solidFill>
+                <a:latin typeface="Calibri" pitchFamily="34" charset="0"/>
+                <a:ea typeface="Calibri" pitchFamily="34" charset="-122"/>
+                <a:cs typeface="Calibri" pitchFamily="34" charset="-120"/>
+              </a:rPr>
+              <a:t>3 of 15 within 15% of the nominal size</a:t>
+            </a:r>
+            <a:endParaRPr lang="en-US" sz="1200" dirty="0"/>
+          </a:p>
+        </p:txBody>
+      </p:sp>
+      <p:sp>
+        <p:nvSpPr>
+          <p:cNvPr id="24" name="Text 21"/>
+          <p:cNvSpPr txBox="1"/>
+          <p:nvPr/>
+        </p:nvSpPr>
+        <p:spPr>
+          <a:xfrm>
+            <a:off x="6172200" y="3867912"/>
+            <a:ext cx="2560320" cy="274320"/>
+          </a:xfrm>
+          <a:prstGeom prst="rect">
+            <a:avLst/>
+          </a:prstGeom>
+          <a:noFill/>
+          <a:ln/>
+        </p:spPr>
+        <p:txBody>
+          <a:bodyPr wrap="square" lIns="0" tIns="0" rIns="0" bIns="0" rtlCol="0" anchor="ctr"/>
+          <a:lstStyle/>
+          <a:p>
+            <a:pPr indent="0" marL="0">
+              <a:buNone/>
+            </a:pPr>
+            <a:r>
+              <a:rPr lang="en-US" sz="1400" b="1" dirty="0">
+                <a:solidFill>
+                  <a:srgbClr val="14201B"/>
+                </a:solidFill>
+                <a:latin typeface="Calibri" pitchFamily="34" charset="0"/>
+                <a:ea typeface="Calibri" pitchFamily="34" charset="-122"/>
+                <a:cs typeface="Calibri" pitchFamily="34" charset="-120"/>
+              </a:rPr>
+              <a:t>Shape consistency</a:t>
+            </a:r>
+            <a:endParaRPr lang="en-US" sz="1400" dirty="0"/>
+          </a:p>
+        </p:txBody>
+      </p:sp>
+      <p:sp>
+        <p:nvSpPr>
+          <p:cNvPr id="25" name="Shape 22"/>
+          <p:cNvSpPr/>
+          <p:nvPr/>
+        </p:nvSpPr>
+        <p:spPr>
+          <a:xfrm>
+            <a:off x="10006279" y="3895344"/>
+            <a:ext cx="219456" cy="219456"/>
+          </a:xfrm>
+          <a:prstGeom prst="star5">
+            <a:avLst/>
+          </a:prstGeom>
+          <a:solidFill>
+            <a:srgbClr val="F2A71B"/>
+          </a:solidFill>
+          <a:ln w="12700">
+            <a:solidFill>
+              <a:srgbClr val="F2A71B"/>
+            </a:solidFill>
+            <a:prstDash val="solid"/>
+          </a:ln>
+        </p:spPr>
+      </p:sp>
+      <p:sp>
+        <p:nvSpPr>
+          <p:cNvPr id="26" name="Shape 23"/>
+          <p:cNvSpPr/>
+          <p:nvPr/>
+        </p:nvSpPr>
+        <p:spPr>
+          <a:xfrm>
+            <a:off x="10280599" y="3895344"/>
+            <a:ext cx="219456" cy="219456"/>
+          </a:xfrm>
+          <a:prstGeom prst="star5">
+            <a:avLst/>
+          </a:prstGeom>
+          <a:solidFill>
+            <a:srgbClr val="F2A71B"/>
+          </a:solidFill>
+          <a:ln w="12700">
+            <a:solidFill>
+              <a:srgbClr val="F2A71B"/>
+            </a:solidFill>
+            <a:prstDash val="solid"/>
+          </a:ln>
+        </p:spPr>
+      </p:sp>
+      <p:sp>
+        <p:nvSpPr>
+          <p:cNvPr id="27" name="Shape 24"/>
+          <p:cNvSpPr/>
+          <p:nvPr/>
+        </p:nvSpPr>
+        <p:spPr>
+          <a:xfrm>
+            <a:off x="10554919" y="3895344"/>
+            <a:ext cx="219456" cy="219456"/>
+          </a:xfrm>
+          <a:prstGeom prst="star5">
+            <a:avLst/>
+          </a:prstGeom>
+          <a:solidFill>
+            <a:srgbClr val="F2A71B"/>
+          </a:solidFill>
+          <a:ln w="12700">
+            <a:solidFill>
+              <a:srgbClr val="F2A71B"/>
+            </a:solidFill>
+            <a:prstDash val="solid"/>
+          </a:ln>
+        </p:spPr>
+      </p:sp>
+      <p:sp>
+        <p:nvSpPr>
+          <p:cNvPr id="28" name="Shape 25"/>
+          <p:cNvSpPr/>
+          <p:nvPr/>
+        </p:nvSpPr>
+        <p:spPr>
+          <a:xfrm>
+            <a:off x="10829239" y="3895344"/>
+            <a:ext cx="219456" cy="219456"/>
+          </a:xfrm>
+          <a:prstGeom prst="star5">
+            <a:avLst/>
+          </a:prstGeom>
+          <a:solidFill>
+            <a:srgbClr val="F2A71B"/>
+          </a:solidFill>
+          <a:ln w="12700">
+            <a:solidFill>
+              <a:srgbClr val="F2A71B"/>
+            </a:solidFill>
+            <a:prstDash val="solid"/>
+          </a:ln>
+        </p:spPr>
+      </p:sp>
+      <p:sp>
+        <p:nvSpPr>
+          <p:cNvPr id="29" name="Shape 26"/>
+          <p:cNvSpPr/>
+          <p:nvPr/>
+        </p:nvSpPr>
+        <p:spPr>
+          <a:xfrm>
+            <a:off x="11103559" y="3895344"/>
+            <a:ext cx="219456" cy="219456"/>
+          </a:xfrm>
+          <a:prstGeom prst="star5">
+            <a:avLst/>
+          </a:prstGeom>
+          <a:solidFill>
+            <a:srgbClr val="F2A71B"/>
+          </a:solidFill>
+          <a:ln w="12700">
+            <a:solidFill>
+              <a:srgbClr val="F2A71B"/>
+            </a:solidFill>
+            <a:prstDash val="solid"/>
+          </a:ln>
+        </p:spPr>
+      </p:sp>
+      <p:sp>
+        <p:nvSpPr>
+          <p:cNvPr id="30" name="Text 27"/>
+          <p:cNvSpPr txBox="1"/>
+          <p:nvPr/>
+        </p:nvSpPr>
+        <p:spPr>
+          <a:xfrm>
+            <a:off x="6172200" y="4142232"/>
+            <a:ext cx="5150815" cy="219456"/>
+          </a:xfrm>
+          <a:prstGeom prst="rect">
+            <a:avLst/>
+          </a:prstGeom>
+          <a:noFill/>
+          <a:ln/>
+        </p:spPr>
+        <p:txBody>
+          <a:bodyPr wrap="square" lIns="0" tIns="0" rIns="0" bIns="0" rtlCol="0" anchor="t"/>
+          <a:lstStyle/>
+          <a:p>
+            <a:pPr indent="0" marL="0">
+              <a:buNone/>
+            </a:pPr>
+            <a:r>
+              <a:rPr lang="en-US" sz="1200" dirty="0">
+                <a:solidFill>
+                  <a:srgbClr val="4A5751"/>
+                </a:solidFill>
+                <a:latin typeface="Calibri" pitchFamily="34" charset="0"/>
+                <a:ea typeface="Calibri" pitchFamily="34" charset="-122"/>
+                <a:cs typeface="Calibri" pitchFamily="34" charset="-120"/>
+              </a:rPr>
+              <a:t>15 of 15 round</a:t>
+            </a:r>
+            <a:endParaRPr lang="en-US" sz="1200" dirty="0"/>
+          </a:p>
+        </p:txBody>
+      </p:sp>
+      <p:sp>
+        <p:nvSpPr>
+          <p:cNvPr id="31" name="Text 28"/>
+          <p:cNvSpPr txBox="1"/>
+          <p:nvPr/>
+        </p:nvSpPr>
+        <p:spPr>
+          <a:xfrm>
+            <a:off x="6172200" y="4416552"/>
+            <a:ext cx="2560320" cy="274320"/>
+          </a:xfrm>
+          <a:prstGeom prst="rect">
+            <a:avLst/>
+          </a:prstGeom>
+          <a:noFill/>
+          <a:ln/>
+        </p:spPr>
+        <p:txBody>
+          <a:bodyPr wrap="square" lIns="0" tIns="0" rIns="0" bIns="0" rtlCol="0" anchor="ctr"/>
+          <a:lstStyle/>
+          <a:p>
+            <a:pPr indent="0" marL="0">
+              <a:buNone/>
+            </a:pPr>
+            <a:r>
+              <a:rPr lang="en-US" sz="1400" b="1" dirty="0">
+                <a:solidFill>
+                  <a:srgbClr val="14201B"/>
+                </a:solidFill>
+                <a:latin typeface="Calibri" pitchFamily="34" charset="0"/>
+                <a:ea typeface="Calibri" pitchFamily="34" charset="-122"/>
+                <a:cs typeface="Calibri" pitchFamily="34" charset="-120"/>
+              </a:rPr>
+              <a:t>Dispensing position</a:t>
+            </a:r>
+            <a:endParaRPr lang="en-US" sz="1400" dirty="0"/>
+          </a:p>
+        </p:txBody>
+      </p:sp>
+      <p:sp>
+        <p:nvSpPr>
+          <p:cNvPr id="32" name="Shape 29"/>
+          <p:cNvSpPr/>
+          <p:nvPr/>
+        </p:nvSpPr>
+        <p:spPr>
+          <a:xfrm>
+            <a:off x="10006279" y="4443984"/>
+            <a:ext cx="219456" cy="219456"/>
+          </a:xfrm>
+          <a:prstGeom prst="star5">
+            <a:avLst/>
+          </a:prstGeom>
+          <a:solidFill>
+            <a:srgbClr val="F2A71B"/>
+          </a:solidFill>
+          <a:ln w="12700">
+            <a:solidFill>
+              <a:srgbClr val="F2A71B"/>
+            </a:solidFill>
+            <a:prstDash val="solid"/>
+          </a:ln>
+        </p:spPr>
+      </p:sp>
+      <p:sp>
+        <p:nvSpPr>
+          <p:cNvPr id="33" name="Shape 30"/>
+          <p:cNvSpPr/>
+          <p:nvPr/>
+        </p:nvSpPr>
+        <p:spPr>
+          <a:xfrm>
+            <a:off x="10280599" y="4443984"/>
+            <a:ext cx="219456" cy="219456"/>
+          </a:xfrm>
+          <a:prstGeom prst="star5">
+            <a:avLst/>
+          </a:prstGeom>
+          <a:solidFill>
+            <a:srgbClr val="F2A71B"/>
+          </a:solidFill>
+          <a:ln w="12700">
+            <a:solidFill>
+              <a:srgbClr val="F2A71B"/>
+            </a:solidFill>
+            <a:prstDash val="solid"/>
+          </a:ln>
+        </p:spPr>
+      </p:sp>
+      <p:sp>
+        <p:nvSpPr>
+          <p:cNvPr id="34" name="Shape 31"/>
+          <p:cNvSpPr/>
+          <p:nvPr/>
+        </p:nvSpPr>
+        <p:spPr>
+          <a:xfrm>
+            <a:off x="10554919" y="4443984"/>
+            <a:ext cx="219456" cy="219456"/>
+          </a:xfrm>
+          <a:prstGeom prst="star5">
+            <a:avLst/>
+          </a:prstGeom>
+          <a:solidFill>
+            <a:srgbClr val="F2A71B"/>
+          </a:solidFill>
+          <a:ln w="12700">
+            <a:solidFill>
+              <a:srgbClr val="F2A71B"/>
+            </a:solidFill>
+            <a:prstDash val="solid"/>
+          </a:ln>
+        </p:spPr>
+      </p:sp>
+      <p:sp>
+        <p:nvSpPr>
+          <p:cNvPr id="35" name="Shape 32"/>
+          <p:cNvSpPr/>
+          <p:nvPr/>
+        </p:nvSpPr>
+        <p:spPr>
+          <a:xfrm>
+            <a:off x="10829239" y="4443984"/>
+            <a:ext cx="219456" cy="219456"/>
+          </a:xfrm>
+          <a:prstGeom prst="star5">
+            <a:avLst/>
+          </a:prstGeom>
+          <a:solidFill>
+            <a:srgbClr val="F2A71B"/>
+          </a:solidFill>
+          <a:ln w="12700">
+            <a:solidFill>
+              <a:srgbClr val="F2A71B"/>
+            </a:solidFill>
+            <a:prstDash val="solid"/>
+          </a:ln>
+        </p:spPr>
+      </p:sp>
+      <p:sp>
+        <p:nvSpPr>
+          <p:cNvPr id="36" name="Shape 33"/>
+          <p:cNvSpPr/>
+          <p:nvPr/>
+        </p:nvSpPr>
+        <p:spPr>
+          <a:xfrm>
+            <a:off x="11103559" y="4443984"/>
+            <a:ext cx="219456" cy="219456"/>
+          </a:xfrm>
+          <a:prstGeom prst="star5">
+            <a:avLst/>
+          </a:prstGeom>
+          <a:solidFill>
+            <a:srgbClr val="F2A71B"/>
+          </a:solidFill>
+          <a:ln w="12700">
+            <a:solidFill>
+              <a:srgbClr val="F2A71B"/>
+            </a:solidFill>
+            <a:prstDash val="solid"/>
+          </a:ln>
+        </p:spPr>
+      </p:sp>
+      <p:sp>
+        <p:nvSpPr>
+          <p:cNvPr id="37" name="Text 34"/>
+          <p:cNvSpPr txBox="1"/>
+          <p:nvPr/>
+        </p:nvSpPr>
+        <p:spPr>
+          <a:xfrm>
+            <a:off x="6172200" y="4690872"/>
+            <a:ext cx="5150815" cy="219456"/>
+          </a:xfrm>
+          <a:prstGeom prst="rect">
+            <a:avLst/>
+          </a:prstGeom>
+          <a:noFill/>
+          <a:ln/>
+        </p:spPr>
+        <p:txBody>
+          <a:bodyPr wrap="square" lIns="0" tIns="0" rIns="0" bIns="0" rtlCol="0" anchor="t"/>
+          <a:lstStyle/>
+          <a:p>
+            <a:pPr indent="0" marL="0">
+              <a:buNone/>
+            </a:pPr>
+            <a:r>
+              <a:rPr lang="en-US" sz="1200" dirty="0">
+                <a:solidFill>
+                  <a:srgbClr val="4A5751"/>
+                </a:solidFill>
+                <a:latin typeface="Calibri" pitchFamily="34" charset="0"/>
+                <a:ea typeface="Calibri" pitchFamily="34" charset="-122"/>
+                <a:cs typeface="Calibri" pitchFamily="34" charset="-120"/>
+              </a:rPr>
+              <a:t>15 of 15 where the recipe puts them</a:t>
+            </a:r>
+            <a:endParaRPr lang="en-US" sz="1200" dirty="0"/>
+          </a:p>
+        </p:txBody>
+      </p:sp>
+      <p:sp>
+        <p:nvSpPr>
+          <p:cNvPr id="38" name="Shape 35"/>
+          <p:cNvSpPr/>
+          <p:nvPr/>
+        </p:nvSpPr>
+        <p:spPr>
+          <a:xfrm>
+            <a:off x="548640" y="5669280"/>
+            <a:ext cx="420624" cy="420624"/>
+          </a:xfrm>
+          <a:prstGeom prst="ellipse">
+            <a:avLst/>
+          </a:prstGeom>
+          <a:solidFill>
+            <a:srgbClr val="1F7A4D"/>
+          </a:solidFill>
+          <a:ln w="12700">
+            <a:solidFill>
+              <a:srgbClr val="1F7A4D"/>
+            </a:solidFill>
+            <a:prstDash val="solid"/>
+          </a:ln>
+        </p:spPr>
+      </p:sp>
+      <p:pic>
+        <p:nvPicPr>
+          <p:cNvPr id="39" name="Image 1" descr="preencoded.png">    </p:cNvPr>
+          <p:cNvPicPr>
+            <a:picLocks noChangeAspect="1"/>
+          </p:cNvPicPr>
+          <p:nvPr/>
+        </p:nvPicPr>
+        <p:blipFill>
+          <a:blip r:embed="rId2"/>
+          <a:stretch>
+            <a:fillRect/>
+          </a:stretch>
+        </p:blipFill>
+        <p:spPr>
+          <a:xfrm>
+            <a:off x="645384" y="5766024"/>
+            <a:ext cx="227137" cy="227137"/>
+          </a:xfrm>
+          <a:prstGeom prst="rect">
+            <a:avLst/>
+          </a:prstGeom>
+        </p:spPr>
+      </p:pic>
+      <p:sp>
+        <p:nvSpPr>
+          <p:cNvPr id="40" name="Text 36"/>
+          <p:cNvSpPr txBox="1"/>
+          <p:nvPr/>
+        </p:nvSpPr>
+        <p:spPr>
+          <a:xfrm>
+            <a:off x="1097280" y="5559552"/>
+            <a:ext cx="2920898" cy="640080"/>
+          </a:xfrm>
+          <a:prstGeom prst="rect">
+            <a:avLst/>
+          </a:prstGeom>
+          <a:noFill/>
+          <a:ln/>
+        </p:spPr>
+        <p:txBody>
+          <a:bodyPr wrap="square" lIns="0" tIns="0" rIns="0" bIns="0" rtlCol="0" anchor="ctr"/>
+          <a:lstStyle/>
+          <a:p>
+            <a:pPr indent="0" marL="0">
+              <a:buNone/>
+            </a:pPr>
+            <a:r>
+              <a:rPr lang="en-US" sz="1250" dirty="0">
+                <a:solidFill>
+                  <a:srgbClr val="4A5751"/>
+                </a:solidFill>
+                <a:latin typeface="Calibri" pitchFamily="34" charset="0"/>
+                <a:ea typeface="Calibri" pitchFamily="34" charset="-122"/>
+                <a:cs typeface="Calibri" pitchFamily="34" charset="-120"/>
+              </a:rPr>
+              <a:t>Stars = share passed × 5, rounded down, so one failure always costs a star</a:t>
+            </a:r>
+            <a:endParaRPr lang="en-US" sz="1250" dirty="0"/>
+          </a:p>
+        </p:txBody>
+      </p:sp>
+      <p:sp>
+        <p:nvSpPr>
+          <p:cNvPr id="41" name="Shape 37"/>
+          <p:cNvSpPr/>
+          <p:nvPr/>
+        </p:nvSpPr>
+        <p:spPr>
+          <a:xfrm>
+            <a:off x="4338218" y="5669280"/>
+            <a:ext cx="420624" cy="420624"/>
+          </a:xfrm>
+          <a:prstGeom prst="ellipse">
+            <a:avLst/>
+          </a:prstGeom>
+          <a:solidFill>
+            <a:srgbClr val="1F7A4D"/>
+          </a:solidFill>
+          <a:ln w="12700">
+            <a:solidFill>
+              <a:srgbClr val="1F7A4D"/>
+            </a:solidFill>
+            <a:prstDash val="solid"/>
+          </a:ln>
+        </p:spPr>
+      </p:sp>
+      <p:pic>
+        <p:nvPicPr>
+          <p:cNvPr id="42" name="Image 2" descr="preencoded.png">    </p:cNvPr>
+          <p:cNvPicPr>
+            <a:picLocks noChangeAspect="1"/>
+          </p:cNvPicPr>
+          <p:nvPr/>
+        </p:nvPicPr>
+        <p:blipFill>
+          <a:blip r:embed="rId3"/>
+          <a:stretch>
+            <a:fillRect/>
+          </a:stretch>
+        </p:blipFill>
+        <p:spPr>
+          <a:xfrm>
+            <a:off x="4434962" y="5766024"/>
+            <a:ext cx="227137" cy="227137"/>
+          </a:xfrm>
+          <a:prstGeom prst="rect">
+            <a:avLst/>
+          </a:prstGeom>
+        </p:spPr>
+      </p:pic>
+      <p:sp>
+        <p:nvSpPr>
+          <p:cNvPr id="43" name="Text 38"/>
+          <p:cNvSpPr txBox="1"/>
+          <p:nvPr/>
+        </p:nvSpPr>
+        <p:spPr>
+          <a:xfrm>
+            <a:off x="4886858" y="5559552"/>
+            <a:ext cx="2920898" cy="640080"/>
+          </a:xfrm>
+          <a:prstGeom prst="rect">
+            <a:avLst/>
+          </a:prstGeom>
+          <a:noFill/>
+          <a:ln/>
+        </p:spPr>
+        <p:txBody>
+          <a:bodyPr wrap="square" lIns="0" tIns="0" rIns="0" bIns="0" rtlCol="0" anchor="ctr"/>
+          <a:lstStyle/>
+          <a:p>
+            <a:pPr indent="0" marL="0">
+              <a:buNone/>
+            </a:pPr>
+            <a:r>
+              <a:rPr lang="en-US" sz="1250" dirty="0">
+                <a:solidFill>
+                  <a:srgbClr val="4A5751"/>
+                </a:solidFill>
+                <a:latin typeface="Calibri" pitchFamily="34" charset="0"/>
+                <a:ea typeface="Calibri" pitchFamily="34" charset="-122"/>
+                <a:cs typeface="Calibri" pitchFamily="34" charset="-120"/>
+              </a:rPr>
+              <a:t>Overall = dots passing all four ÷ all dots: 3 of 15 → 20/100</a:t>
+            </a:r>
+            <a:endParaRPr lang="en-US" sz="1250" dirty="0"/>
+          </a:p>
+        </p:txBody>
+      </p:sp>
+      <p:sp>
+        <p:nvSpPr>
+          <p:cNvPr id="44" name="Shape 39"/>
+          <p:cNvSpPr/>
+          <p:nvPr/>
+        </p:nvSpPr>
+        <p:spPr>
+          <a:xfrm>
+            <a:off x="8127797" y="5669280"/>
+            <a:ext cx="420624" cy="420624"/>
+          </a:xfrm>
+          <a:prstGeom prst="ellipse">
+            <a:avLst/>
+          </a:prstGeom>
+          <a:solidFill>
+            <a:srgbClr val="1F7A4D"/>
+          </a:solidFill>
+          <a:ln w="12700">
+            <a:solidFill>
+              <a:srgbClr val="1F7A4D"/>
+            </a:solidFill>
+            <a:prstDash val="solid"/>
+          </a:ln>
+        </p:spPr>
+      </p:sp>
+      <p:pic>
+        <p:nvPicPr>
+          <p:cNvPr id="45" name="Image 3" descr="preencoded.png">    </p:cNvPr>
+          <p:cNvPicPr>
+            <a:picLocks noChangeAspect="1"/>
+          </p:cNvPicPr>
+          <p:nvPr/>
+        </p:nvPicPr>
+        <p:blipFill>
+          <a:blip r:embed="rId4"/>
+          <a:stretch>
+            <a:fillRect/>
+          </a:stretch>
+        </p:blipFill>
+        <p:spPr>
+          <a:xfrm>
+            <a:off x="8224540" y="5766024"/>
+            <a:ext cx="227137" cy="227137"/>
+          </a:xfrm>
+          <a:prstGeom prst="rect">
+            <a:avLst/>
+          </a:prstGeom>
+        </p:spPr>
+      </p:pic>
+      <p:sp>
+        <p:nvSpPr>
+          <p:cNvPr id="46" name="Text 40"/>
+          <p:cNvSpPr txBox="1"/>
+          <p:nvPr/>
+        </p:nvSpPr>
+        <p:spPr>
+          <a:xfrm>
+            <a:off x="8676437" y="5559552"/>
+            <a:ext cx="2920898" cy="640080"/>
+          </a:xfrm>
+          <a:prstGeom prst="rect">
+            <a:avLst/>
+          </a:prstGeom>
+          <a:noFill/>
+          <a:ln/>
+        </p:spPr>
+        <p:txBody>
+          <a:bodyPr wrap="square" lIns="0" tIns="0" rIns="0" bIns="0" rtlCol="0" anchor="ctr"/>
+          <a:lstStyle/>
+          <a:p>
+            <a:pPr indent="0" marL="0">
+              <a:buNone/>
+            </a:pPr>
+            <a:r>
+              <a:rPr lang="en-US" sz="1250" dirty="0">
+                <a:solidFill>
+                  <a:srgbClr val="4A5751"/>
+                </a:solidFill>
+                <a:latin typeface="Calibri" pitchFamily="34" charset="0"/>
+                <a:ea typeface="Calibri" pitchFamily="34" charset="-122"/>
+                <a:cs typeface="Calibri" pitchFamily="34" charset="-120"/>
+              </a:rPr>
+              <a:t>Rates the dots, not the diagnosis: how far to trust the ranking is the tier's job</a:t>
+            </a:r>
+            <a:endParaRPr lang="en-US" sz="1250" dirty="0"/>
+          </a:p>
+        </p:txBody>
+      </p:sp>
+      <p:sp>
+        <p:nvSpPr>
+          <p:cNvPr id="47" name="Text 41"/>
+          <p:cNvSpPr txBox="1"/>
+          <p:nvPr/>
+        </p:nvSpPr>
+        <p:spPr>
+          <a:xfrm>
+            <a:off x="548640" y="6355080"/>
+            <a:ext cx="11094415" cy="320040"/>
+          </a:xfrm>
+          <a:prstGeom prst="rect">
+            <a:avLst/>
+          </a:prstGeom>
+          <a:noFill/>
+          <a:ln/>
+        </p:spPr>
+        <p:txBody>
+          <a:bodyPr wrap="square" lIns="0" tIns="0" rIns="0" bIns="0" rtlCol="0" anchor="b"/>
+          <a:lstStyle/>
+          <a:p>
+            <a:pPr indent="0" marL="0">
+              <a:buNone/>
+            </a:pPr>
+            <a:r>
+              <a:rPr lang="en-US" sz="1100" i="1" dirty="0">
+                <a:solidFill>
+                  <a:srgbClr val="7B8781"/>
+                </a:solidFill>
+                <a:latin typeface="Calibri" pitchFamily="34" charset="0"/>
+                <a:ea typeface="Calibri" pitchFamily="34" charset="-122"/>
+                <a:cs typeface="Calibri" pitchFamily="34" charset="-120"/>
+              </a:rPr>
+              <a:t>Shown when the photo passes the quality check and the job has a recipe; without the expected dot positions there is nothing to rate.</a:t>
+            </a:r>
+            <a:endParaRPr lang="en-US" sz="1100" dirty="0"/>
           </a:p>
         </p:txBody>
       </p:sp>
